--- a/FitApp.pptx
+++ b/FitApp.pptx
@@ -1,8 +1,8 @@
 
 <file path=ppt/presentation.xml><?xml version="1.0" encoding="utf-8"?>
-<p:presentation xmlns:a="http://schemas.openxmlformats.org/drawingml/2006/main" xmlns:r="http://schemas.openxmlformats.org/officeDocument/2006/relationships" xmlns:p="http://schemas.openxmlformats.org/presentationml/2006/main" saveSubsetFonts="1" autoCompressPictures="0">
+<p:presentation xmlns:a="http://schemas.openxmlformats.org/drawingml/2006/main" xmlns:r="http://schemas.openxmlformats.org/officeDocument/2006/relationships" xmlns:p="http://schemas.openxmlformats.org/presentationml/2006/main" saveSubsetFonts="1">
   <p:sldMasterIdLst>
-    <p:sldMasterId id="2147483648" r:id="rId1"/>
+    <p:sldMasterId id="2147483748" r:id="rId1"/>
   </p:sldMasterIdLst>
   <p:sldIdLst>
     <p:sldId id="256" r:id="rId2"/>
@@ -16,13 +16,13 @@
     <p:sldId id="264" r:id="rId10"/>
     <p:sldId id="265" r:id="rId11"/>
   </p:sldIdLst>
-  <p:sldSz cx="9144000" cy="6858000" type="screen4x3"/>
+  <p:sldSz cx="12192000" cy="6858000"/>
   <p:notesSz cx="6858000" cy="9144000"/>
   <p:defaultTextStyle>
     <a:defPPr>
-      <a:defRPr lang="en-US"/>
+      <a:defRPr lang="hu-HU"/>
     </a:defPPr>
-    <a:lvl1pPr marL="0" algn="l" defTabSz="457200" rtl="0" eaLnBrk="1" latinLnBrk="0" hangingPunct="1">
+    <a:lvl1pPr marL="0" algn="l" defTabSz="914400" rtl="0" eaLnBrk="1" latinLnBrk="0" hangingPunct="1">
       <a:defRPr sz="1800" kern="1200">
         <a:solidFill>
           <a:schemeClr val="tx1"/>
@@ -32,7 +32,7 @@
         <a:cs typeface="+mn-cs"/>
       </a:defRPr>
     </a:lvl1pPr>
-    <a:lvl2pPr marL="457200" algn="l" defTabSz="457200" rtl="0" eaLnBrk="1" latinLnBrk="0" hangingPunct="1">
+    <a:lvl2pPr marL="457200" algn="l" defTabSz="914400" rtl="0" eaLnBrk="1" latinLnBrk="0" hangingPunct="1">
       <a:defRPr sz="1800" kern="1200">
         <a:solidFill>
           <a:schemeClr val="tx1"/>
@@ -42,7 +42,7 @@
         <a:cs typeface="+mn-cs"/>
       </a:defRPr>
     </a:lvl2pPr>
-    <a:lvl3pPr marL="914400" algn="l" defTabSz="457200" rtl="0" eaLnBrk="1" latinLnBrk="0" hangingPunct="1">
+    <a:lvl3pPr marL="914400" algn="l" defTabSz="914400" rtl="0" eaLnBrk="1" latinLnBrk="0" hangingPunct="1">
       <a:defRPr sz="1800" kern="1200">
         <a:solidFill>
           <a:schemeClr val="tx1"/>
@@ -52,7 +52,7 @@
         <a:cs typeface="+mn-cs"/>
       </a:defRPr>
     </a:lvl3pPr>
-    <a:lvl4pPr marL="1371600" algn="l" defTabSz="457200" rtl="0" eaLnBrk="1" latinLnBrk="0" hangingPunct="1">
+    <a:lvl4pPr marL="1371600" algn="l" defTabSz="914400" rtl="0" eaLnBrk="1" latinLnBrk="0" hangingPunct="1">
       <a:defRPr sz="1800" kern="1200">
         <a:solidFill>
           <a:schemeClr val="tx1"/>
@@ -62,7 +62,7 @@
         <a:cs typeface="+mn-cs"/>
       </a:defRPr>
     </a:lvl4pPr>
-    <a:lvl5pPr marL="1828800" algn="l" defTabSz="457200" rtl="0" eaLnBrk="1" latinLnBrk="0" hangingPunct="1">
+    <a:lvl5pPr marL="1828800" algn="l" defTabSz="914400" rtl="0" eaLnBrk="1" latinLnBrk="0" hangingPunct="1">
       <a:defRPr sz="1800" kern="1200">
         <a:solidFill>
           <a:schemeClr val="tx1"/>
@@ -72,7 +72,7 @@
         <a:cs typeface="+mn-cs"/>
       </a:defRPr>
     </a:lvl5pPr>
-    <a:lvl6pPr marL="2286000" algn="l" defTabSz="457200" rtl="0" eaLnBrk="1" latinLnBrk="0" hangingPunct="1">
+    <a:lvl6pPr marL="2286000" algn="l" defTabSz="914400" rtl="0" eaLnBrk="1" latinLnBrk="0" hangingPunct="1">
       <a:defRPr sz="1800" kern="1200">
         <a:solidFill>
           <a:schemeClr val="tx1"/>
@@ -82,7 +82,7 @@
         <a:cs typeface="+mn-cs"/>
       </a:defRPr>
     </a:lvl6pPr>
-    <a:lvl7pPr marL="2743200" algn="l" defTabSz="457200" rtl="0" eaLnBrk="1" latinLnBrk="0" hangingPunct="1">
+    <a:lvl7pPr marL="2743200" algn="l" defTabSz="914400" rtl="0" eaLnBrk="1" latinLnBrk="0" hangingPunct="1">
       <a:defRPr sz="1800" kern="1200">
         <a:solidFill>
           <a:schemeClr val="tx1"/>
@@ -92,7 +92,7 @@
         <a:cs typeface="+mn-cs"/>
       </a:defRPr>
     </a:lvl7pPr>
-    <a:lvl8pPr marL="3200400" algn="l" defTabSz="457200" rtl="0" eaLnBrk="1" latinLnBrk="0" hangingPunct="1">
+    <a:lvl8pPr marL="3200400" algn="l" defTabSz="914400" rtl="0" eaLnBrk="1" latinLnBrk="0" hangingPunct="1">
       <a:defRPr sz="1800" kern="1200">
         <a:solidFill>
           <a:schemeClr val="tx1"/>
@@ -102,7 +102,7 @@
         <a:cs typeface="+mn-cs"/>
       </a:defRPr>
     </a:lvl8pPr>
-    <a:lvl9pPr marL="3657600" algn="l" defTabSz="457200" rtl="0" eaLnBrk="1" latinLnBrk="0" hangingPunct="1">
+    <a:lvl9pPr marL="3657600" algn="l" defTabSz="914400" rtl="0" eaLnBrk="1" latinLnBrk="0" hangingPunct="1">
       <a:defRPr sz="1800" kern="1200">
         <a:solidFill>
           <a:schemeClr val="tx1"/>
@@ -113,22 +113,6 @@
       </a:defRPr>
     </a:lvl9pPr>
   </p:defaultTextStyle>
-  <p:extLst>
-    <p:ext uri="{EFAFB233-063F-42B5-8137-9DF3F51BA10A}">
-      <p15:sldGuideLst xmlns:p15="http://schemas.microsoft.com/office/powerpoint/2012/main">
-        <p15:guide id="1" orient="horz" pos="2160">
-          <p15:clr>
-            <a:srgbClr val="A4A3A4"/>
-          </p15:clr>
-        </p15:guide>
-        <p15:guide id="2" pos="2880">
-          <p15:clr>
-            <a:srgbClr val="A4A3A4"/>
-          </p15:clr>
-        </p15:guide>
-      </p15:sldGuideLst>
-    </p:ext>
-  </p:extLst>
 </p:presentation>
 </file>
 
@@ -151,7 +135,13 @@
       </p:grpSpPr>
       <p:sp>
         <p:nvSpPr>
-          <p:cNvPr id="2" name="Title 1"/>
+          <p:cNvPr id="2" name="Title 1">
+            <a:extLst>
+              <a:ext uri="{FF2B5EF4-FFF2-40B4-BE49-F238E27FC236}">
+                <a16:creationId xmlns:a16="http://schemas.microsoft.com/office/drawing/2014/main" id="{6ADF9204-3F29-4C3A-BA41-3063400202C4}"/>
+              </a:ext>
+            </a:extLst>
+          </p:cNvPr>
           <p:cNvSpPr>
             <a:spLocks noGrp="1"/>
           </p:cNvSpPr>
@@ -161,25 +151,34 @@
         </p:nvSpPr>
         <p:spPr>
           <a:xfrm>
-            <a:off x="685800" y="2130425"/>
-            <a:ext cx="7772400" cy="1470025"/>
+            <a:off x="1524000" y="1122363"/>
+            <a:ext cx="9144000" cy="2387600"/>
           </a:xfrm>
         </p:spPr>
         <p:txBody>
-          <a:bodyPr/>
-          <a:lstStyle/>
-          <a:p>
-            <a:r>
-              <a:rPr lang="en-US" smtClean="0"/>
+          <a:bodyPr anchor="b"/>
+          <a:lstStyle>
+            <a:lvl1pPr algn="ctr">
+              <a:defRPr sz="4400"/>
+            </a:lvl1pPr>
+          </a:lstStyle>
+          <a:p>
+            <a:r>
+              <a:rPr lang="en-US" dirty="0"/>
               <a:t>Click to edit Master title style</a:t>
             </a:r>
-            <a:endParaRPr lang="en-US"/>
-          </a:p>
-        </p:txBody>
-      </p:sp>
-      <p:sp>
-        <p:nvSpPr>
-          <p:cNvPr id="3" name="Subtitle 2"/>
+          </a:p>
+        </p:txBody>
+      </p:sp>
+      <p:sp>
+        <p:nvSpPr>
+          <p:cNvPr id="3" name="Subtitle 2">
+            <a:extLst>
+              <a:ext uri="{FF2B5EF4-FFF2-40B4-BE49-F238E27FC236}">
+                <a16:creationId xmlns:a16="http://schemas.microsoft.com/office/drawing/2014/main" id="{203393CD-7262-4AC7-80E6-52FE6F3F39BA}"/>
+              </a:ext>
+            </a:extLst>
+          </p:cNvPr>
           <p:cNvSpPr>
             <a:spLocks noGrp="1"/>
           </p:cNvSpPr>
@@ -189,8 +188,8 @@
         </p:nvSpPr>
         <p:spPr>
           <a:xfrm>
-            <a:off x="1371600" y="3886200"/>
-            <a:ext cx="6400800" cy="1752600"/>
+            <a:off x="1524000" y="3602038"/>
+            <a:ext cx="9144000" cy="1655762"/>
           </a:xfrm>
         </p:spPr>
         <p:txBody>
@@ -198,122 +197,82 @@
           <a:lstStyle>
             <a:lvl1pPr marL="0" indent="0" algn="ctr">
               <a:buNone/>
-              <a:defRPr>
-                <a:solidFill>
-                  <a:schemeClr val="tx1">
-                    <a:tint val="75000"/>
-                  </a:schemeClr>
-                </a:solidFill>
+              <a:defRPr sz="2000">
+                <a:latin typeface="+mn-lt"/>
               </a:defRPr>
             </a:lvl1pPr>
             <a:lvl2pPr marL="457200" indent="0" algn="ctr">
               <a:buNone/>
-              <a:defRPr>
-                <a:solidFill>
-                  <a:schemeClr val="tx1">
-                    <a:tint val="75000"/>
-                  </a:schemeClr>
-                </a:solidFill>
-              </a:defRPr>
+              <a:defRPr sz="2000"/>
             </a:lvl2pPr>
             <a:lvl3pPr marL="914400" indent="0" algn="ctr">
               <a:buNone/>
-              <a:defRPr>
-                <a:solidFill>
-                  <a:schemeClr val="tx1">
-                    <a:tint val="75000"/>
-                  </a:schemeClr>
-                </a:solidFill>
-              </a:defRPr>
+              <a:defRPr sz="1800"/>
             </a:lvl3pPr>
             <a:lvl4pPr marL="1371600" indent="0" algn="ctr">
               <a:buNone/>
-              <a:defRPr>
-                <a:solidFill>
-                  <a:schemeClr val="tx1">
-                    <a:tint val="75000"/>
-                  </a:schemeClr>
-                </a:solidFill>
-              </a:defRPr>
+              <a:defRPr sz="1600"/>
             </a:lvl4pPr>
             <a:lvl5pPr marL="1828800" indent="0" algn="ctr">
               <a:buNone/>
-              <a:defRPr>
-                <a:solidFill>
-                  <a:schemeClr val="tx1">
-                    <a:tint val="75000"/>
-                  </a:schemeClr>
-                </a:solidFill>
-              </a:defRPr>
+              <a:defRPr sz="1600"/>
             </a:lvl5pPr>
             <a:lvl6pPr marL="2286000" indent="0" algn="ctr">
               <a:buNone/>
-              <a:defRPr>
-                <a:solidFill>
-                  <a:schemeClr val="tx1">
-                    <a:tint val="75000"/>
-                  </a:schemeClr>
-                </a:solidFill>
-              </a:defRPr>
+              <a:defRPr sz="1600"/>
             </a:lvl6pPr>
             <a:lvl7pPr marL="2743200" indent="0" algn="ctr">
               <a:buNone/>
-              <a:defRPr>
-                <a:solidFill>
-                  <a:schemeClr val="tx1">
-                    <a:tint val="75000"/>
-                  </a:schemeClr>
-                </a:solidFill>
-              </a:defRPr>
+              <a:defRPr sz="1600"/>
             </a:lvl7pPr>
             <a:lvl8pPr marL="3200400" indent="0" algn="ctr">
               <a:buNone/>
-              <a:defRPr>
-                <a:solidFill>
-                  <a:schemeClr val="tx1">
-                    <a:tint val="75000"/>
-                  </a:schemeClr>
-                </a:solidFill>
-              </a:defRPr>
+              <a:defRPr sz="1600"/>
             </a:lvl8pPr>
             <a:lvl9pPr marL="3657600" indent="0" algn="ctr">
               <a:buNone/>
-              <a:defRPr>
-                <a:solidFill>
-                  <a:schemeClr val="tx1">
-                    <a:tint val="75000"/>
-                  </a:schemeClr>
-                </a:solidFill>
-              </a:defRPr>
+              <a:defRPr sz="1600"/>
             </a:lvl9pPr>
           </a:lstStyle>
           <a:p>
             <a:r>
+              <a:rPr lang="en-US" dirty="0"/>
+              <a:t>Click to edit Master subtitle style</a:t>
+            </a:r>
+          </a:p>
+        </p:txBody>
+      </p:sp>
+      <p:sp>
+        <p:nvSpPr>
+          <p:cNvPr id="4" name="Date Placeholder 3">
+            <a:extLst>
+              <a:ext uri="{FF2B5EF4-FFF2-40B4-BE49-F238E27FC236}">
+                <a16:creationId xmlns:a16="http://schemas.microsoft.com/office/drawing/2014/main" id="{D7D430AE-0210-4E82-AD7B-41B112DE7F7D}"/>
+              </a:ext>
+            </a:extLst>
+          </p:cNvPr>
+          <p:cNvSpPr>
+            <a:spLocks noGrp="1"/>
+          </p:cNvSpPr>
+          <p:nvPr>
+            <p:ph type="dt" sz="half" idx="10"/>
+          </p:nvPr>
+        </p:nvSpPr>
+        <p:spPr/>
+        <p:txBody>
+          <a:bodyPr/>
+          <a:lstStyle>
+            <a:lvl1pPr>
+              <a:defRPr>
+                <a:latin typeface="+mn-lt"/>
+              </a:defRPr>
+            </a:lvl1pPr>
+          </a:lstStyle>
+          <a:p>
+            <a:fld id="{11A6662E-FAF4-44BC-88B5-85A7CBFB6D30}" type="datetime1">
               <a:rPr lang="en-US" smtClean="0"/>
-              <a:t>Click to edit Master subtitle style</a:t>
-            </a:r>
-            <a:endParaRPr lang="en-US"/>
-          </a:p>
-        </p:txBody>
-      </p:sp>
-      <p:sp>
-        <p:nvSpPr>
-          <p:cNvPr id="4" name="Date Placeholder 3"/>
-          <p:cNvSpPr>
-            <a:spLocks noGrp="1"/>
-          </p:cNvSpPr>
-          <p:nvPr>
-            <p:ph type="dt" sz="half" idx="10"/>
-          </p:nvPr>
-        </p:nvSpPr>
-        <p:spPr/>
-        <p:txBody>
-          <a:bodyPr/>
-          <a:lstStyle/>
-          <a:p>
-            <a:fld id="{5BCAD085-E8A6-8845-BD4E-CB4CCA059FC4}" type="datetimeFigureOut">
-              <a:rPr lang="en-US" smtClean="0"/>
-              <a:t>1/5/2026</a:t>
+              <a:pPr/>
+              <a:t>2/12/2026</a:t>
             </a:fld>
             <a:endParaRPr lang="en-US"/>
           </a:p>
@@ -321,7 +280,13 @@
       </p:sp>
       <p:sp>
         <p:nvSpPr>
-          <p:cNvPr id="5" name="Footer Placeholder 4"/>
+          <p:cNvPr id="5" name="Footer Placeholder 4">
+            <a:extLst>
+              <a:ext uri="{FF2B5EF4-FFF2-40B4-BE49-F238E27FC236}">
+                <a16:creationId xmlns:a16="http://schemas.microsoft.com/office/drawing/2014/main" id="{0F221974-7DEC-459D-9642-CB5B59C82771}"/>
+              </a:ext>
+            </a:extLst>
+          </p:cNvPr>
           <p:cNvSpPr>
             <a:spLocks noGrp="1"/>
           </p:cNvSpPr>
@@ -332,7 +297,13 @@
         <p:spPr/>
         <p:txBody>
           <a:bodyPr/>
-          <a:lstStyle/>
+          <a:lstStyle>
+            <a:lvl1pPr>
+              <a:defRPr>
+                <a:latin typeface="+mn-lt"/>
+              </a:defRPr>
+            </a:lvl1pPr>
+          </a:lstStyle>
           <a:p>
             <a:endParaRPr lang="en-US"/>
           </a:p>
@@ -340,7 +311,13 @@
       </p:sp>
       <p:sp>
         <p:nvSpPr>
-          <p:cNvPr id="6" name="Slide Number Placeholder 5"/>
+          <p:cNvPr id="6" name="Slide Number Placeholder 5">
+            <a:extLst>
+              <a:ext uri="{FF2B5EF4-FFF2-40B4-BE49-F238E27FC236}">
+                <a16:creationId xmlns:a16="http://schemas.microsoft.com/office/drawing/2014/main" id="{60731837-C94E-4B5B-BCF0-110C69EDB41C}"/>
+              </a:ext>
+            </a:extLst>
+          </p:cNvPr>
           <p:cNvSpPr>
             <a:spLocks noGrp="1"/>
           </p:cNvSpPr>
@@ -351,10 +328,17 @@
         <p:spPr/>
         <p:txBody>
           <a:bodyPr/>
-          <a:lstStyle/>
-          <a:p>
-            <a:fld id="{C1FF6DA9-008F-8B48-92A6-B652298478BF}" type="slidenum">
+          <a:lstStyle>
+            <a:lvl1pPr>
+              <a:defRPr>
+                <a:latin typeface="+mn-lt"/>
+              </a:defRPr>
+            </a:lvl1pPr>
+          </a:lstStyle>
+          <a:p>
+            <a:fld id="{73B850FF-6169-4056-8077-06FFA93A5366}" type="slidenum">
               <a:rPr lang="en-US" smtClean="0"/>
+              <a:pPr/>
               <a:t>‹#›</a:t>
             </a:fld>
             <a:endParaRPr lang="en-US"/>
@@ -364,7 +348,7 @@
     </p:spTree>
     <p:extLst>
       <p:ext uri="{BB962C8B-B14F-4D97-AF65-F5344CB8AC3E}">
-        <p14:creationId xmlns:p14="http://schemas.microsoft.com/office/powerpoint/2010/main" val="3168075583"/>
+        <p14:creationId xmlns:p14="http://schemas.microsoft.com/office/powerpoint/2010/main" val="4193820278"/>
       </p:ext>
     </p:extLst>
   </p:cSld>
@@ -393,7 +377,13 @@
       </p:grpSpPr>
       <p:sp>
         <p:nvSpPr>
-          <p:cNvPr id="2" name="Title 1"/>
+          <p:cNvPr id="2" name="Title 1">
+            <a:extLst>
+              <a:ext uri="{FF2B5EF4-FFF2-40B4-BE49-F238E27FC236}">
+                <a16:creationId xmlns:a16="http://schemas.microsoft.com/office/drawing/2014/main" id="{077ABDD2-E186-4F25-8FDE-D1E875E9C303}"/>
+              </a:ext>
+            </a:extLst>
+          </p:cNvPr>
           <p:cNvSpPr>
             <a:spLocks noGrp="1"/>
           </p:cNvSpPr>
@@ -407,83 +397,93 @@
           <a:lstStyle/>
           <a:p>
             <a:r>
+              <a:rPr lang="en-US"/>
+              <a:t>Click to edit Master title style</a:t>
+            </a:r>
+          </a:p>
+        </p:txBody>
+      </p:sp>
+      <p:sp>
+        <p:nvSpPr>
+          <p:cNvPr id="3" name="Vertical Text Placeholder 2">
+            <a:extLst>
+              <a:ext uri="{FF2B5EF4-FFF2-40B4-BE49-F238E27FC236}">
+                <a16:creationId xmlns:a16="http://schemas.microsoft.com/office/drawing/2014/main" id="{8318CC5B-A7E0-48B1-8329-6533AC76E7B7}"/>
+              </a:ext>
+            </a:extLst>
+          </p:cNvPr>
+          <p:cNvSpPr>
+            <a:spLocks noGrp="1"/>
+          </p:cNvSpPr>
+          <p:nvPr>
+            <p:ph type="body" orient="vert" idx="1"/>
+          </p:nvPr>
+        </p:nvSpPr>
+        <p:spPr/>
+        <p:txBody>
+          <a:bodyPr vert="eaVert"/>
+          <a:lstStyle/>
+          <a:p>
+            <a:pPr lvl="0"/>
+            <a:r>
+              <a:rPr lang="en-US"/>
+              <a:t>Click to edit Master text styles</a:t>
+            </a:r>
+          </a:p>
+          <a:p>
+            <a:pPr lvl="1"/>
+            <a:r>
+              <a:rPr lang="en-US"/>
+              <a:t>Second level</a:t>
+            </a:r>
+          </a:p>
+          <a:p>
+            <a:pPr lvl="2"/>
+            <a:r>
+              <a:rPr lang="en-US"/>
+              <a:t>Third level</a:t>
+            </a:r>
+          </a:p>
+          <a:p>
+            <a:pPr lvl="3"/>
+            <a:r>
+              <a:rPr lang="en-US"/>
+              <a:t>Fourth level</a:t>
+            </a:r>
+          </a:p>
+          <a:p>
+            <a:pPr lvl="4"/>
+            <a:r>
+              <a:rPr lang="en-US"/>
+              <a:t>Fifth level</a:t>
+            </a:r>
+          </a:p>
+        </p:txBody>
+      </p:sp>
+      <p:sp>
+        <p:nvSpPr>
+          <p:cNvPr id="4" name="Date Placeholder 3">
+            <a:extLst>
+              <a:ext uri="{FF2B5EF4-FFF2-40B4-BE49-F238E27FC236}">
+                <a16:creationId xmlns:a16="http://schemas.microsoft.com/office/drawing/2014/main" id="{63905B1B-77FE-4BFC-BF87-87DA989F0082}"/>
+              </a:ext>
+            </a:extLst>
+          </p:cNvPr>
+          <p:cNvSpPr>
+            <a:spLocks noGrp="1"/>
+          </p:cNvSpPr>
+          <p:nvPr>
+            <p:ph type="dt" sz="half" idx="10"/>
+          </p:nvPr>
+        </p:nvSpPr>
+        <p:spPr/>
+        <p:txBody>
+          <a:bodyPr/>
+          <a:lstStyle/>
+          <a:p>
+            <a:fld id="{4C559632-1575-4E14-B53B-3DC3D5ED3947}" type="datetime1">
               <a:rPr lang="en-US" smtClean="0"/>
-              <a:t>Click to edit Master title style</a:t>
-            </a:r>
-            <a:endParaRPr lang="en-US"/>
-          </a:p>
-        </p:txBody>
-      </p:sp>
-      <p:sp>
-        <p:nvSpPr>
-          <p:cNvPr id="3" name="Vertical Text Placeholder 2"/>
-          <p:cNvSpPr>
-            <a:spLocks noGrp="1"/>
-          </p:cNvSpPr>
-          <p:nvPr>
-            <p:ph type="body" orient="vert" idx="1"/>
-          </p:nvPr>
-        </p:nvSpPr>
-        <p:spPr/>
-        <p:txBody>
-          <a:bodyPr vert="eaVert"/>
-          <a:lstStyle/>
-          <a:p>
-            <a:pPr lvl="0"/>
-            <a:r>
-              <a:rPr lang="en-US" smtClean="0"/>
-              <a:t>Click to edit Master text styles</a:t>
-            </a:r>
-          </a:p>
-          <a:p>
-            <a:pPr lvl="1"/>
-            <a:r>
-              <a:rPr lang="en-US" smtClean="0"/>
-              <a:t>Second level</a:t>
-            </a:r>
-          </a:p>
-          <a:p>
-            <a:pPr lvl="2"/>
-            <a:r>
-              <a:rPr lang="en-US" smtClean="0"/>
-              <a:t>Third level</a:t>
-            </a:r>
-          </a:p>
-          <a:p>
-            <a:pPr lvl="3"/>
-            <a:r>
-              <a:rPr lang="en-US" smtClean="0"/>
-              <a:t>Fourth level</a:t>
-            </a:r>
-          </a:p>
-          <a:p>
-            <a:pPr lvl="4"/>
-            <a:r>
-              <a:rPr lang="en-US" smtClean="0"/>
-              <a:t>Fifth level</a:t>
-            </a:r>
-            <a:endParaRPr lang="en-US"/>
-          </a:p>
-        </p:txBody>
-      </p:sp>
-      <p:sp>
-        <p:nvSpPr>
-          <p:cNvPr id="4" name="Date Placeholder 3"/>
-          <p:cNvSpPr>
-            <a:spLocks noGrp="1"/>
-          </p:cNvSpPr>
-          <p:nvPr>
-            <p:ph type="dt" sz="half" idx="10"/>
-          </p:nvPr>
-        </p:nvSpPr>
-        <p:spPr/>
-        <p:txBody>
-          <a:bodyPr/>
-          <a:lstStyle/>
-          <a:p>
-            <a:fld id="{5BCAD085-E8A6-8845-BD4E-CB4CCA059FC4}" type="datetimeFigureOut">
-              <a:rPr lang="en-US" smtClean="0"/>
-              <a:t>1/5/2026</a:t>
+              <a:t>2/12/2026</a:t>
             </a:fld>
             <a:endParaRPr lang="en-US"/>
           </a:p>
@@ -491,7 +491,13 @@
       </p:sp>
       <p:sp>
         <p:nvSpPr>
-          <p:cNvPr id="5" name="Footer Placeholder 4"/>
+          <p:cNvPr id="5" name="Footer Placeholder 4">
+            <a:extLst>
+              <a:ext uri="{FF2B5EF4-FFF2-40B4-BE49-F238E27FC236}">
+                <a16:creationId xmlns:a16="http://schemas.microsoft.com/office/drawing/2014/main" id="{3118531E-1B90-4631-BD37-4BB1DBFABF44}"/>
+              </a:ext>
+            </a:extLst>
+          </p:cNvPr>
           <p:cNvSpPr>
             <a:spLocks noGrp="1"/>
           </p:cNvSpPr>
@@ -510,7 +516,13 @@
       </p:sp>
       <p:sp>
         <p:nvSpPr>
-          <p:cNvPr id="6" name="Slide Number Placeholder 5"/>
+          <p:cNvPr id="6" name="Slide Number Placeholder 5">
+            <a:extLst>
+              <a:ext uri="{FF2B5EF4-FFF2-40B4-BE49-F238E27FC236}">
+                <a16:creationId xmlns:a16="http://schemas.microsoft.com/office/drawing/2014/main" id="{238A55E8-88DC-4280-8E04-FF50FF8EDB5A}"/>
+              </a:ext>
+            </a:extLst>
+          </p:cNvPr>
           <p:cNvSpPr>
             <a:spLocks noGrp="1"/>
           </p:cNvSpPr>
@@ -523,7 +535,7 @@
           <a:bodyPr/>
           <a:lstStyle/>
           <a:p>
-            <a:fld id="{C1FF6DA9-008F-8B48-92A6-B652298478BF}" type="slidenum">
+            <a:fld id="{73B850FF-6169-4056-8077-06FFA93A5366}" type="slidenum">
               <a:rPr lang="en-US" smtClean="0"/>
               <a:t>‹#›</a:t>
             </a:fld>
@@ -534,7 +546,7 @@
     </p:spTree>
     <p:extLst>
       <p:ext uri="{BB962C8B-B14F-4D97-AF65-F5344CB8AC3E}">
-        <p14:creationId xmlns:p14="http://schemas.microsoft.com/office/powerpoint/2010/main" val="2910927964"/>
+        <p14:creationId xmlns:p14="http://schemas.microsoft.com/office/powerpoint/2010/main" val="2230587242"/>
       </p:ext>
     </p:extLst>
   </p:cSld>
@@ -563,7 +575,13 @@
       </p:grpSpPr>
       <p:sp>
         <p:nvSpPr>
-          <p:cNvPr id="2" name="Vertical Title 1"/>
+          <p:cNvPr id="2" name="Vertical Title 1">
+            <a:extLst>
+              <a:ext uri="{FF2B5EF4-FFF2-40B4-BE49-F238E27FC236}">
+                <a16:creationId xmlns:a16="http://schemas.microsoft.com/office/drawing/2014/main" id="{6960633D-90E4-4F5A-9EBF-DDEC2B0B471A}"/>
+              </a:ext>
+            </a:extLst>
+          </p:cNvPr>
           <p:cNvSpPr>
             <a:spLocks noGrp="1"/>
           </p:cNvSpPr>
@@ -573,8 +591,8 @@
         </p:nvSpPr>
         <p:spPr>
           <a:xfrm>
-            <a:off x="6629400" y="274638"/>
-            <a:ext cx="2057400" cy="5851525"/>
+            <a:off x="8724900" y="365125"/>
+            <a:ext cx="2628900" cy="5811838"/>
           </a:xfrm>
         </p:spPr>
         <p:txBody>
@@ -582,16 +600,21 @@
           <a:lstStyle/>
           <a:p>
             <a:r>
-              <a:rPr lang="en-US" smtClean="0"/>
+              <a:rPr lang="en-US"/>
               <a:t>Click to edit Master title style</a:t>
             </a:r>
-            <a:endParaRPr lang="en-US"/>
-          </a:p>
-        </p:txBody>
-      </p:sp>
-      <p:sp>
-        <p:nvSpPr>
-          <p:cNvPr id="3" name="Vertical Text Placeholder 2"/>
+          </a:p>
+        </p:txBody>
+      </p:sp>
+      <p:sp>
+        <p:nvSpPr>
+          <p:cNvPr id="3" name="Vertical Text Placeholder 2">
+            <a:extLst>
+              <a:ext uri="{FF2B5EF4-FFF2-40B4-BE49-F238E27FC236}">
+                <a16:creationId xmlns:a16="http://schemas.microsoft.com/office/drawing/2014/main" id="{0DDD3065-FA3D-42C8-BFDA-967C87F4F285}"/>
+              </a:ext>
+            </a:extLst>
+          </p:cNvPr>
           <p:cNvSpPr>
             <a:spLocks noGrp="1"/>
           </p:cNvSpPr>
@@ -601,8 +624,8 @@
         </p:nvSpPr>
         <p:spPr>
           <a:xfrm>
-            <a:off x="457200" y="274638"/>
-            <a:ext cx="6019800" cy="5851525"/>
+            <a:off x="838200" y="365125"/>
+            <a:ext cx="7734300" cy="5811838"/>
           </a:xfrm>
         </p:spPr>
         <p:txBody>
@@ -611,59 +634,64 @@
           <a:p>
             <a:pPr lvl="0"/>
             <a:r>
+              <a:rPr lang="en-US"/>
+              <a:t>Click to edit Master text styles</a:t>
+            </a:r>
+          </a:p>
+          <a:p>
+            <a:pPr lvl="1"/>
+            <a:r>
+              <a:rPr lang="en-US"/>
+              <a:t>Second level</a:t>
+            </a:r>
+          </a:p>
+          <a:p>
+            <a:pPr lvl="2"/>
+            <a:r>
+              <a:rPr lang="en-US"/>
+              <a:t>Third level</a:t>
+            </a:r>
+          </a:p>
+          <a:p>
+            <a:pPr lvl="3"/>
+            <a:r>
+              <a:rPr lang="en-US"/>
+              <a:t>Fourth level</a:t>
+            </a:r>
+          </a:p>
+          <a:p>
+            <a:pPr lvl="4"/>
+            <a:r>
+              <a:rPr lang="en-US"/>
+              <a:t>Fifth level</a:t>
+            </a:r>
+          </a:p>
+        </p:txBody>
+      </p:sp>
+      <p:sp>
+        <p:nvSpPr>
+          <p:cNvPr id="4" name="Date Placeholder 3">
+            <a:extLst>
+              <a:ext uri="{FF2B5EF4-FFF2-40B4-BE49-F238E27FC236}">
+                <a16:creationId xmlns:a16="http://schemas.microsoft.com/office/drawing/2014/main" id="{E4DC126F-38E2-4425-861F-98ED432284BA}"/>
+              </a:ext>
+            </a:extLst>
+          </p:cNvPr>
+          <p:cNvSpPr>
+            <a:spLocks noGrp="1"/>
+          </p:cNvSpPr>
+          <p:nvPr>
+            <p:ph type="dt" sz="half" idx="10"/>
+          </p:nvPr>
+        </p:nvSpPr>
+        <p:spPr/>
+        <p:txBody>
+          <a:bodyPr/>
+          <a:lstStyle/>
+          <a:p>
+            <a:fld id="{CC4A6868-2568-4CC9-B302-F37117B01A6E}" type="datetime1">
               <a:rPr lang="en-US" smtClean="0"/>
-              <a:t>Click to edit Master text styles</a:t>
-            </a:r>
-          </a:p>
-          <a:p>
-            <a:pPr lvl="1"/>
-            <a:r>
-              <a:rPr lang="en-US" smtClean="0"/>
-              <a:t>Second level</a:t>
-            </a:r>
-          </a:p>
-          <a:p>
-            <a:pPr lvl="2"/>
-            <a:r>
-              <a:rPr lang="en-US" smtClean="0"/>
-              <a:t>Third level</a:t>
-            </a:r>
-          </a:p>
-          <a:p>
-            <a:pPr lvl="3"/>
-            <a:r>
-              <a:rPr lang="en-US" smtClean="0"/>
-              <a:t>Fourth level</a:t>
-            </a:r>
-          </a:p>
-          <a:p>
-            <a:pPr lvl="4"/>
-            <a:r>
-              <a:rPr lang="en-US" smtClean="0"/>
-              <a:t>Fifth level</a:t>
-            </a:r>
-            <a:endParaRPr lang="en-US"/>
-          </a:p>
-        </p:txBody>
-      </p:sp>
-      <p:sp>
-        <p:nvSpPr>
-          <p:cNvPr id="4" name="Date Placeholder 3"/>
-          <p:cNvSpPr>
-            <a:spLocks noGrp="1"/>
-          </p:cNvSpPr>
-          <p:nvPr>
-            <p:ph type="dt" sz="half" idx="10"/>
-          </p:nvPr>
-        </p:nvSpPr>
-        <p:spPr/>
-        <p:txBody>
-          <a:bodyPr/>
-          <a:lstStyle/>
-          <a:p>
-            <a:fld id="{5BCAD085-E8A6-8845-BD4E-CB4CCA059FC4}" type="datetimeFigureOut">
-              <a:rPr lang="en-US" smtClean="0"/>
-              <a:t>1/5/2026</a:t>
+              <a:t>2/12/2026</a:t>
             </a:fld>
             <a:endParaRPr lang="en-US"/>
           </a:p>
@@ -671,7 +699,13 @@
       </p:sp>
       <p:sp>
         <p:nvSpPr>
-          <p:cNvPr id="5" name="Footer Placeholder 4"/>
+          <p:cNvPr id="5" name="Footer Placeholder 4">
+            <a:extLst>
+              <a:ext uri="{FF2B5EF4-FFF2-40B4-BE49-F238E27FC236}">
+                <a16:creationId xmlns:a16="http://schemas.microsoft.com/office/drawing/2014/main" id="{CA9645D8-F22A-4354-A8B3-96E8A2D232AE}"/>
+              </a:ext>
+            </a:extLst>
+          </p:cNvPr>
           <p:cNvSpPr>
             <a:spLocks noGrp="1"/>
           </p:cNvSpPr>
@@ -690,7 +724,13 @@
       </p:sp>
       <p:sp>
         <p:nvSpPr>
-          <p:cNvPr id="6" name="Slide Number Placeholder 5"/>
+          <p:cNvPr id="6" name="Slide Number Placeholder 5">
+            <a:extLst>
+              <a:ext uri="{FF2B5EF4-FFF2-40B4-BE49-F238E27FC236}">
+                <a16:creationId xmlns:a16="http://schemas.microsoft.com/office/drawing/2014/main" id="{E59E2295-A616-4D57-8800-7B7E213A8CC8}"/>
+              </a:ext>
+            </a:extLst>
+          </p:cNvPr>
           <p:cNvSpPr>
             <a:spLocks noGrp="1"/>
           </p:cNvSpPr>
@@ -703,7 +743,7 @@
           <a:bodyPr/>
           <a:lstStyle/>
           <a:p>
-            <a:fld id="{C1FF6DA9-008F-8B48-92A6-B652298478BF}" type="slidenum">
+            <a:fld id="{73B850FF-6169-4056-8077-06FFA93A5366}" type="slidenum">
               <a:rPr lang="en-US" smtClean="0"/>
               <a:t>‹#›</a:t>
             </a:fld>
@@ -714,7 +754,7 @@
     </p:spTree>
     <p:extLst>
       <p:ext uri="{BB962C8B-B14F-4D97-AF65-F5344CB8AC3E}">
-        <p14:creationId xmlns:p14="http://schemas.microsoft.com/office/powerpoint/2010/main" val="3612223792"/>
+        <p14:creationId xmlns:p14="http://schemas.microsoft.com/office/powerpoint/2010/main" val="1334085207"/>
       </p:ext>
     </p:extLst>
   </p:cSld>
@@ -743,7 +783,13 @@
       </p:grpSpPr>
       <p:sp>
         <p:nvSpPr>
-          <p:cNvPr id="2" name="Title 1"/>
+          <p:cNvPr id="2" name="Title 1">
+            <a:extLst>
+              <a:ext uri="{FF2B5EF4-FFF2-40B4-BE49-F238E27FC236}">
+                <a16:creationId xmlns:a16="http://schemas.microsoft.com/office/drawing/2014/main" id="{7D4CC1FC-ADE8-488C-A1DA-2FD569FD4D09}"/>
+              </a:ext>
+            </a:extLst>
+          </p:cNvPr>
           <p:cNvSpPr>
             <a:spLocks noGrp="1"/>
           </p:cNvSpPr>
@@ -751,27 +797,148 @@
             <p:ph type="title"/>
           </p:nvPr>
         </p:nvSpPr>
+        <p:spPr>
+          <a:xfrm>
+            <a:off x="838200" y="365760"/>
+            <a:ext cx="10515600" cy="1325563"/>
+          </a:xfrm>
+        </p:spPr>
+        <p:txBody>
+          <a:bodyPr/>
+          <a:lstStyle/>
+          <a:p>
+            <a:r>
+              <a:rPr lang="en-US" dirty="0"/>
+              <a:t>Click to edit Master title style</a:t>
+            </a:r>
+          </a:p>
+        </p:txBody>
+      </p:sp>
+      <p:sp>
+        <p:nvSpPr>
+          <p:cNvPr id="3" name="Content Placeholder 2">
+            <a:extLst>
+              <a:ext uri="{FF2B5EF4-FFF2-40B4-BE49-F238E27FC236}">
+                <a16:creationId xmlns:a16="http://schemas.microsoft.com/office/drawing/2014/main" id="{57F02842-38C3-46D6-8527-0F6FE623C511}"/>
+              </a:ext>
+            </a:extLst>
+          </p:cNvPr>
+          <p:cNvSpPr>
+            <a:spLocks noGrp="1"/>
+          </p:cNvSpPr>
+          <p:nvPr>
+            <p:ph idx="1"/>
+          </p:nvPr>
+        </p:nvSpPr>
         <p:spPr/>
         <p:txBody>
           <a:bodyPr/>
           <a:lstStyle/>
           <a:p>
-            <a:r>
+            <a:pPr lvl="0"/>
+            <a:r>
+              <a:rPr lang="en-US" dirty="0"/>
+              <a:t>Click to edit Master text styles</a:t>
+            </a:r>
+          </a:p>
+          <a:p>
+            <a:pPr lvl="1"/>
+            <a:r>
+              <a:rPr lang="en-US" dirty="0"/>
+              <a:t>Second level</a:t>
+            </a:r>
+          </a:p>
+          <a:p>
+            <a:pPr lvl="2"/>
+            <a:r>
+              <a:rPr lang="en-US" dirty="0"/>
+              <a:t>Third level</a:t>
+            </a:r>
+          </a:p>
+          <a:p>
+            <a:pPr lvl="3"/>
+            <a:r>
+              <a:rPr lang="en-US" dirty="0"/>
+              <a:t>Fourth level</a:t>
+            </a:r>
+          </a:p>
+          <a:p>
+            <a:pPr lvl="4"/>
+            <a:r>
+              <a:rPr lang="en-US" dirty="0"/>
+              <a:t>Fifth level</a:t>
+            </a:r>
+          </a:p>
+        </p:txBody>
+      </p:sp>
+      <p:sp>
+        <p:nvSpPr>
+          <p:cNvPr id="4" name="Date Placeholder 3">
+            <a:extLst>
+              <a:ext uri="{FF2B5EF4-FFF2-40B4-BE49-F238E27FC236}">
+                <a16:creationId xmlns:a16="http://schemas.microsoft.com/office/drawing/2014/main" id="{0E864CF5-F681-40C2-88CC-E02206C9CECB}"/>
+              </a:ext>
+            </a:extLst>
+          </p:cNvPr>
+          <p:cNvSpPr>
+            <a:spLocks noGrp="1"/>
+          </p:cNvSpPr>
+          <p:nvPr>
+            <p:ph type="dt" sz="half" idx="10"/>
+          </p:nvPr>
+        </p:nvSpPr>
+        <p:spPr/>
+        <p:txBody>
+          <a:bodyPr/>
+          <a:lstStyle/>
+          <a:p>
+            <a:fld id="{0055F08A-1E71-4B2B-BB49-E743F2903911}" type="datetime1">
               <a:rPr lang="en-US" smtClean="0"/>
-              <a:t>Click to edit Master title style</a:t>
-            </a:r>
+              <a:t>2/12/2026</a:t>
+            </a:fld>
+            <a:endParaRPr lang="en-US" dirty="0"/>
+          </a:p>
+        </p:txBody>
+      </p:sp>
+      <p:sp>
+        <p:nvSpPr>
+          <p:cNvPr id="5" name="Footer Placeholder 4">
+            <a:extLst>
+              <a:ext uri="{FF2B5EF4-FFF2-40B4-BE49-F238E27FC236}">
+                <a16:creationId xmlns:a16="http://schemas.microsoft.com/office/drawing/2014/main" id="{82C04753-4FE4-4A6F-99BB-CFFC92E0CD06}"/>
+              </a:ext>
+            </a:extLst>
+          </p:cNvPr>
+          <p:cNvSpPr>
+            <a:spLocks noGrp="1"/>
+          </p:cNvSpPr>
+          <p:nvPr>
+            <p:ph type="ftr" sz="quarter" idx="11"/>
+          </p:nvPr>
+        </p:nvSpPr>
+        <p:spPr/>
+        <p:txBody>
+          <a:bodyPr/>
+          <a:lstStyle/>
+          <a:p>
             <a:endParaRPr lang="en-US"/>
           </a:p>
         </p:txBody>
       </p:sp>
       <p:sp>
         <p:nvSpPr>
-          <p:cNvPr id="3" name="Content Placeholder 2"/>
-          <p:cNvSpPr>
-            <a:spLocks noGrp="1"/>
-          </p:cNvSpPr>
-          <p:nvPr>
-            <p:ph idx="1"/>
+          <p:cNvPr id="6" name="Slide Number Placeholder 5">
+            <a:extLst>
+              <a:ext uri="{FF2B5EF4-FFF2-40B4-BE49-F238E27FC236}">
+                <a16:creationId xmlns:a16="http://schemas.microsoft.com/office/drawing/2014/main" id="{80A569D1-DB13-4BD9-8BA9-0DEAD98F893F}"/>
+              </a:ext>
+            </a:extLst>
+          </p:cNvPr>
+          <p:cNvSpPr>
+            <a:spLocks noGrp="1"/>
+          </p:cNvSpPr>
+          <p:nvPr>
+            <p:ph type="sldNum" sz="quarter" idx="12"/>
           </p:nvPr>
         </p:nvSpPr>
         <p:spPr/>
@@ -779,101 +946,7 @@
           <a:bodyPr/>
           <a:lstStyle/>
           <a:p>
-            <a:pPr lvl="0"/>
-            <a:r>
-              <a:rPr lang="en-US" smtClean="0"/>
-              <a:t>Click to edit Master text styles</a:t>
-            </a:r>
-          </a:p>
-          <a:p>
-            <a:pPr lvl="1"/>
-            <a:r>
-              <a:rPr lang="en-US" smtClean="0"/>
-              <a:t>Second level</a:t>
-            </a:r>
-          </a:p>
-          <a:p>
-            <a:pPr lvl="2"/>
-            <a:r>
-              <a:rPr lang="en-US" smtClean="0"/>
-              <a:t>Third level</a:t>
-            </a:r>
-          </a:p>
-          <a:p>
-            <a:pPr lvl="3"/>
-            <a:r>
-              <a:rPr lang="en-US" smtClean="0"/>
-              <a:t>Fourth level</a:t>
-            </a:r>
-          </a:p>
-          <a:p>
-            <a:pPr lvl="4"/>
-            <a:r>
-              <a:rPr lang="en-US" smtClean="0"/>
-              <a:t>Fifth level</a:t>
-            </a:r>
-            <a:endParaRPr lang="en-US"/>
-          </a:p>
-        </p:txBody>
-      </p:sp>
-      <p:sp>
-        <p:nvSpPr>
-          <p:cNvPr id="4" name="Date Placeholder 3"/>
-          <p:cNvSpPr>
-            <a:spLocks noGrp="1"/>
-          </p:cNvSpPr>
-          <p:nvPr>
-            <p:ph type="dt" sz="half" idx="10"/>
-          </p:nvPr>
-        </p:nvSpPr>
-        <p:spPr/>
-        <p:txBody>
-          <a:bodyPr/>
-          <a:lstStyle/>
-          <a:p>
-            <a:fld id="{5BCAD085-E8A6-8845-BD4E-CB4CCA059FC4}" type="datetimeFigureOut">
-              <a:rPr lang="en-US" smtClean="0"/>
-              <a:t>1/5/2026</a:t>
-            </a:fld>
-            <a:endParaRPr lang="en-US"/>
-          </a:p>
-        </p:txBody>
-      </p:sp>
-      <p:sp>
-        <p:nvSpPr>
-          <p:cNvPr id="5" name="Footer Placeholder 4"/>
-          <p:cNvSpPr>
-            <a:spLocks noGrp="1"/>
-          </p:cNvSpPr>
-          <p:nvPr>
-            <p:ph type="ftr" sz="quarter" idx="11"/>
-          </p:nvPr>
-        </p:nvSpPr>
-        <p:spPr/>
-        <p:txBody>
-          <a:bodyPr/>
-          <a:lstStyle/>
-          <a:p>
-            <a:endParaRPr lang="en-US"/>
-          </a:p>
-        </p:txBody>
-      </p:sp>
-      <p:sp>
-        <p:nvSpPr>
-          <p:cNvPr id="6" name="Slide Number Placeholder 5"/>
-          <p:cNvSpPr>
-            <a:spLocks noGrp="1"/>
-          </p:cNvSpPr>
-          <p:nvPr>
-            <p:ph type="sldNum" sz="quarter" idx="12"/>
-          </p:nvPr>
-        </p:nvSpPr>
-        <p:spPr/>
-        <p:txBody>
-          <a:bodyPr/>
-          <a:lstStyle/>
-          <a:p>
-            <a:fld id="{C1FF6DA9-008F-8B48-92A6-B652298478BF}" type="slidenum">
+            <a:fld id="{73B850FF-6169-4056-8077-06FFA93A5366}" type="slidenum">
               <a:rPr lang="en-US" smtClean="0"/>
               <a:t>‹#›</a:t>
             </a:fld>
@@ -884,7 +957,7 @@
     </p:spTree>
     <p:extLst>
       <p:ext uri="{BB962C8B-B14F-4D97-AF65-F5344CB8AC3E}">
-        <p14:creationId xmlns:p14="http://schemas.microsoft.com/office/powerpoint/2010/main" val="2614314258"/>
+        <p14:creationId xmlns:p14="http://schemas.microsoft.com/office/powerpoint/2010/main" val="1466766077"/>
       </p:ext>
     </p:extLst>
   </p:cSld>
@@ -913,7 +986,13 @@
       </p:grpSpPr>
       <p:sp>
         <p:nvSpPr>
-          <p:cNvPr id="2" name="Title 1"/>
+          <p:cNvPr id="2" name="Title 1">
+            <a:extLst>
+              <a:ext uri="{FF2B5EF4-FFF2-40B4-BE49-F238E27FC236}">
+                <a16:creationId xmlns:a16="http://schemas.microsoft.com/office/drawing/2014/main" id="{AE020B05-7BF6-4073-9106-FA19E97273CB}"/>
+              </a:ext>
+            </a:extLst>
+          </p:cNvPr>
           <p:cNvSpPr>
             <a:spLocks noGrp="1"/>
           </p:cNvSpPr>
@@ -923,29 +1002,35 @@
         </p:nvSpPr>
         <p:spPr>
           <a:xfrm>
-            <a:off x="722313" y="4406900"/>
-            <a:ext cx="7772400" cy="1362075"/>
+            <a:off x="831850" y="1709738"/>
+            <a:ext cx="10515600" cy="2852737"/>
           </a:xfrm>
         </p:spPr>
         <p:txBody>
-          <a:bodyPr anchor="t"/>
+          <a:bodyPr anchor="b"/>
           <a:lstStyle>
-            <a:lvl1pPr algn="l">
-              <a:defRPr sz="4000" b="1" cap="all"/>
+            <a:lvl1pPr>
+              <a:defRPr sz="4400"/>
             </a:lvl1pPr>
           </a:lstStyle>
           <a:p>
             <a:r>
-              <a:rPr lang="en-US" smtClean="0"/>
+              <a:rPr lang="en-US"/>
               <a:t>Click to edit Master title style</a:t>
             </a:r>
-            <a:endParaRPr lang="en-US"/>
-          </a:p>
-        </p:txBody>
-      </p:sp>
-      <p:sp>
-        <p:nvSpPr>
-          <p:cNvPr id="3" name="Text Placeholder 2"/>
+            <a:endParaRPr lang="en-US" dirty="0"/>
+          </a:p>
+        </p:txBody>
+      </p:sp>
+      <p:sp>
+        <p:nvSpPr>
+          <p:cNvPr id="3" name="Text Placeholder 2">
+            <a:extLst>
+              <a:ext uri="{FF2B5EF4-FFF2-40B4-BE49-F238E27FC236}">
+                <a16:creationId xmlns:a16="http://schemas.microsoft.com/office/drawing/2014/main" id="{4E8EE8D7-6B58-4A3F-9DD5-E563D5192A68}"/>
+              </a:ext>
+            </a:extLst>
+          </p:cNvPr>
           <p:cNvSpPr>
             <a:spLocks noGrp="1"/>
           </p:cNvSpPr>
@@ -955,26 +1040,24 @@
         </p:nvSpPr>
         <p:spPr>
           <a:xfrm>
-            <a:off x="722313" y="2906713"/>
-            <a:ext cx="7772400" cy="1500187"/>
+            <a:off x="831850" y="4589463"/>
+            <a:ext cx="10515600" cy="1500187"/>
           </a:xfrm>
         </p:spPr>
         <p:txBody>
-          <a:bodyPr anchor="b"/>
+          <a:bodyPr/>
           <a:lstStyle>
             <a:lvl1pPr marL="0" indent="0">
               <a:buNone/>
-              <a:defRPr sz="2000">
+              <a:defRPr sz="2400">
                 <a:solidFill>
-                  <a:schemeClr val="tx1">
-                    <a:tint val="75000"/>
-                  </a:schemeClr>
+                  <a:schemeClr val="bg1"/>
                 </a:solidFill>
               </a:defRPr>
             </a:lvl1pPr>
             <a:lvl2pPr marL="457200" indent="0">
               <a:buNone/>
-              <a:defRPr sz="1800">
+              <a:defRPr sz="2000">
                 <a:solidFill>
                   <a:schemeClr val="tx1">
                     <a:tint val="75000"/>
@@ -984,7 +1067,7 @@
             </a:lvl2pPr>
             <a:lvl3pPr marL="914400" indent="0">
               <a:buNone/>
-              <a:defRPr sz="1600">
+              <a:defRPr sz="1800">
                 <a:solidFill>
                   <a:schemeClr val="tx1">
                     <a:tint val="75000"/>
@@ -994,7 +1077,7 @@
             </a:lvl3pPr>
             <a:lvl4pPr marL="1371600" indent="0">
               <a:buNone/>
-              <a:defRPr sz="1400">
+              <a:defRPr sz="1600">
                 <a:solidFill>
                   <a:schemeClr val="tx1">
                     <a:tint val="75000"/>
@@ -1004,7 +1087,7 @@
             </a:lvl4pPr>
             <a:lvl5pPr marL="1828800" indent="0">
               <a:buNone/>
-              <a:defRPr sz="1400">
+              <a:defRPr sz="1600">
                 <a:solidFill>
                   <a:schemeClr val="tx1">
                     <a:tint val="75000"/>
@@ -1014,7 +1097,7 @@
             </a:lvl5pPr>
             <a:lvl6pPr marL="2286000" indent="0">
               <a:buNone/>
-              <a:defRPr sz="1400">
+              <a:defRPr sz="1600">
                 <a:solidFill>
                   <a:schemeClr val="tx1">
                     <a:tint val="75000"/>
@@ -1024,7 +1107,7 @@
             </a:lvl6pPr>
             <a:lvl7pPr marL="2743200" indent="0">
               <a:buNone/>
-              <a:defRPr sz="1400">
+              <a:defRPr sz="1600">
                 <a:solidFill>
                   <a:schemeClr val="tx1">
                     <a:tint val="75000"/>
@@ -1034,7 +1117,7 @@
             </a:lvl7pPr>
             <a:lvl8pPr marL="3200400" indent="0">
               <a:buNone/>
-              <a:defRPr sz="1400">
+              <a:defRPr sz="1600">
                 <a:solidFill>
                   <a:schemeClr val="tx1">
                     <a:tint val="75000"/>
@@ -1044,7 +1127,7 @@
             </a:lvl8pPr>
             <a:lvl9pPr marL="3657600" indent="0">
               <a:buNone/>
-              <a:defRPr sz="1400">
+              <a:defRPr sz="1600">
                 <a:solidFill>
                   <a:schemeClr val="tx1">
                     <a:tint val="75000"/>
@@ -1056,30 +1139,36 @@
           <a:p>
             <a:pPr lvl="0"/>
             <a:r>
+              <a:rPr lang="en-US"/>
+              <a:t>Click to edit Master text styles</a:t>
+            </a:r>
+          </a:p>
+        </p:txBody>
+      </p:sp>
+      <p:sp>
+        <p:nvSpPr>
+          <p:cNvPr id="4" name="Date Placeholder 3">
+            <a:extLst>
+              <a:ext uri="{FF2B5EF4-FFF2-40B4-BE49-F238E27FC236}">
+                <a16:creationId xmlns:a16="http://schemas.microsoft.com/office/drawing/2014/main" id="{2102990E-9F0A-446A-B5B8-459CA8D98D92}"/>
+              </a:ext>
+            </a:extLst>
+          </p:cNvPr>
+          <p:cNvSpPr>
+            <a:spLocks noGrp="1"/>
+          </p:cNvSpPr>
+          <p:nvPr>
+            <p:ph type="dt" sz="half" idx="10"/>
+          </p:nvPr>
+        </p:nvSpPr>
+        <p:spPr/>
+        <p:txBody>
+          <a:bodyPr/>
+          <a:lstStyle/>
+          <a:p>
+            <a:fld id="{15417D9E-721A-44BB-8863-9873FE64DA75}" type="datetime1">
               <a:rPr lang="en-US" smtClean="0"/>
-              <a:t>Click to edit Master text styles</a:t>
-            </a:r>
-          </a:p>
-        </p:txBody>
-      </p:sp>
-      <p:sp>
-        <p:nvSpPr>
-          <p:cNvPr id="4" name="Date Placeholder 3"/>
-          <p:cNvSpPr>
-            <a:spLocks noGrp="1"/>
-          </p:cNvSpPr>
-          <p:nvPr>
-            <p:ph type="dt" sz="half" idx="10"/>
-          </p:nvPr>
-        </p:nvSpPr>
-        <p:spPr/>
-        <p:txBody>
-          <a:bodyPr/>
-          <a:lstStyle/>
-          <a:p>
-            <a:fld id="{5BCAD085-E8A6-8845-BD4E-CB4CCA059FC4}" type="datetimeFigureOut">
-              <a:rPr lang="en-US" smtClean="0"/>
-              <a:t>1/5/2026</a:t>
+              <a:t>2/12/2026</a:t>
             </a:fld>
             <a:endParaRPr lang="en-US"/>
           </a:p>
@@ -1087,7 +1176,13 @@
       </p:sp>
       <p:sp>
         <p:nvSpPr>
-          <p:cNvPr id="5" name="Footer Placeholder 4"/>
+          <p:cNvPr id="5" name="Footer Placeholder 4">
+            <a:extLst>
+              <a:ext uri="{FF2B5EF4-FFF2-40B4-BE49-F238E27FC236}">
+                <a16:creationId xmlns:a16="http://schemas.microsoft.com/office/drawing/2014/main" id="{89E68EAA-4377-45FF-9D7C-9E77BC9F275D}"/>
+              </a:ext>
+            </a:extLst>
+          </p:cNvPr>
           <p:cNvSpPr>
             <a:spLocks noGrp="1"/>
           </p:cNvSpPr>
@@ -1106,7 +1201,13 @@
       </p:sp>
       <p:sp>
         <p:nvSpPr>
-          <p:cNvPr id="6" name="Slide Number Placeholder 5"/>
+          <p:cNvPr id="6" name="Slide Number Placeholder 5">
+            <a:extLst>
+              <a:ext uri="{FF2B5EF4-FFF2-40B4-BE49-F238E27FC236}">
+                <a16:creationId xmlns:a16="http://schemas.microsoft.com/office/drawing/2014/main" id="{8207FA71-74C3-44B8-A0AC-E18A1E76B43D}"/>
+              </a:ext>
+            </a:extLst>
+          </p:cNvPr>
           <p:cNvSpPr>
             <a:spLocks noGrp="1"/>
           </p:cNvSpPr>
@@ -1119,7 +1220,7 @@
           <a:bodyPr/>
           <a:lstStyle/>
           <a:p>
-            <a:fld id="{C1FF6DA9-008F-8B48-92A6-B652298478BF}" type="slidenum">
+            <a:fld id="{73B850FF-6169-4056-8077-06FFA93A5366}" type="slidenum">
               <a:rPr lang="en-US" smtClean="0"/>
               <a:t>‹#›</a:t>
             </a:fld>
@@ -1130,7 +1231,7 @@
     </p:spTree>
     <p:extLst>
       <p:ext uri="{BB962C8B-B14F-4D97-AF65-F5344CB8AC3E}">
-        <p14:creationId xmlns:p14="http://schemas.microsoft.com/office/powerpoint/2010/main" val="960648375"/>
+        <p14:creationId xmlns:p14="http://schemas.microsoft.com/office/powerpoint/2010/main" val="44364019"/>
       </p:ext>
     </p:extLst>
   </p:cSld>
@@ -1159,215 +1260,185 @@
       </p:grpSpPr>
       <p:sp>
         <p:nvSpPr>
-          <p:cNvPr id="2" name="Title 1"/>
+          <p:cNvPr id="2" name="Title 1">
+            <a:extLst>
+              <a:ext uri="{FF2B5EF4-FFF2-40B4-BE49-F238E27FC236}">
+                <a16:creationId xmlns:a16="http://schemas.microsoft.com/office/drawing/2014/main" id="{9AB71F12-2D88-4F76-AF46-BD5156C127A9}"/>
+              </a:ext>
+            </a:extLst>
+          </p:cNvPr>
           <p:cNvSpPr>
             <a:spLocks noGrp="1"/>
           </p:cNvSpPr>
           <p:nvPr>
             <p:ph type="title"/>
-          </p:nvPr>
-        </p:nvSpPr>
-        <p:spPr/>
-        <p:txBody>
-          <a:bodyPr/>
-          <a:lstStyle/>
-          <a:p>
-            <a:r>
-              <a:rPr lang="en-US" smtClean="0"/>
-              <a:t>Click to edit Master title style</a:t>
-            </a:r>
-            <a:endParaRPr lang="en-US"/>
-          </a:p>
-        </p:txBody>
-      </p:sp>
-      <p:sp>
-        <p:nvSpPr>
-          <p:cNvPr id="3" name="Content Placeholder 2"/>
-          <p:cNvSpPr>
-            <a:spLocks noGrp="1"/>
-          </p:cNvSpPr>
-          <p:nvPr>
-            <p:ph sz="half" idx="1"/>
           </p:nvPr>
         </p:nvSpPr>
         <p:spPr>
           <a:xfrm>
-            <a:off x="457200" y="1600200"/>
-            <a:ext cx="4038600" cy="4525963"/>
+            <a:off x="838200" y="365760"/>
+            <a:ext cx="10515600" cy="1325563"/>
           </a:xfrm>
         </p:spPr>
         <p:txBody>
           <a:bodyPr/>
-          <a:lstStyle>
-            <a:lvl1pPr>
-              <a:defRPr sz="2800"/>
-            </a:lvl1pPr>
-            <a:lvl2pPr>
-              <a:defRPr sz="2400"/>
-            </a:lvl2pPr>
-            <a:lvl3pPr>
-              <a:defRPr sz="2000"/>
-            </a:lvl3pPr>
-            <a:lvl4pPr>
-              <a:defRPr sz="1800"/>
-            </a:lvl4pPr>
-            <a:lvl5pPr>
-              <a:defRPr sz="1800"/>
-            </a:lvl5pPr>
-            <a:lvl6pPr>
-              <a:defRPr sz="1800"/>
-            </a:lvl6pPr>
-            <a:lvl7pPr>
-              <a:defRPr sz="1800"/>
-            </a:lvl7pPr>
-            <a:lvl8pPr>
-              <a:defRPr sz="1800"/>
-            </a:lvl8pPr>
-            <a:lvl9pPr>
-              <a:defRPr sz="1800"/>
-            </a:lvl9pPr>
-          </a:lstStyle>
-          <a:p>
-            <a:pPr lvl="0"/>
-            <a:r>
-              <a:rPr lang="en-US" smtClean="0"/>
-              <a:t>Click to edit Master text styles</a:t>
-            </a:r>
-          </a:p>
-          <a:p>
-            <a:pPr lvl="1"/>
-            <a:r>
-              <a:rPr lang="en-US" smtClean="0"/>
-              <a:t>Second level</a:t>
-            </a:r>
-          </a:p>
-          <a:p>
-            <a:pPr lvl="2"/>
-            <a:r>
-              <a:rPr lang="en-US" smtClean="0"/>
-              <a:t>Third level</a:t>
-            </a:r>
-          </a:p>
-          <a:p>
-            <a:pPr lvl="3"/>
-            <a:r>
-              <a:rPr lang="en-US" smtClean="0"/>
-              <a:t>Fourth level</a:t>
-            </a:r>
-          </a:p>
-          <a:p>
-            <a:pPr lvl="4"/>
-            <a:r>
-              <a:rPr lang="en-US" smtClean="0"/>
-              <a:t>Fifth level</a:t>
-            </a:r>
-            <a:endParaRPr lang="en-US"/>
-          </a:p>
-        </p:txBody>
-      </p:sp>
-      <p:sp>
-        <p:nvSpPr>
-          <p:cNvPr id="4" name="Content Placeholder 3"/>
-          <p:cNvSpPr>
-            <a:spLocks noGrp="1"/>
-          </p:cNvSpPr>
-          <p:nvPr>
-            <p:ph sz="half" idx="2"/>
+          <a:lstStyle/>
+          <a:p>
+            <a:r>
+              <a:rPr lang="en-US"/>
+              <a:t>Click to edit Master title style</a:t>
+            </a:r>
+          </a:p>
+        </p:txBody>
+      </p:sp>
+      <p:sp>
+        <p:nvSpPr>
+          <p:cNvPr id="3" name="Content Placeholder 2">
+            <a:extLst>
+              <a:ext uri="{FF2B5EF4-FFF2-40B4-BE49-F238E27FC236}">
+                <a16:creationId xmlns:a16="http://schemas.microsoft.com/office/drawing/2014/main" id="{E6E1AA46-E3EB-4704-B019-F90F1E6177A5}"/>
+              </a:ext>
+            </a:extLst>
+          </p:cNvPr>
+          <p:cNvSpPr>
+            <a:spLocks noGrp="1"/>
+          </p:cNvSpPr>
+          <p:nvPr>
+            <p:ph sz="half" idx="1"/>
           </p:nvPr>
         </p:nvSpPr>
         <p:spPr>
           <a:xfrm>
-            <a:off x="4648200" y="1600200"/>
-            <a:ext cx="4038600" cy="4525963"/>
+            <a:off x="838200" y="1825625"/>
+            <a:ext cx="5181600" cy="4351338"/>
           </a:xfrm>
         </p:spPr>
         <p:txBody>
           <a:bodyPr/>
-          <a:lstStyle>
-            <a:lvl1pPr>
-              <a:defRPr sz="2800"/>
-            </a:lvl1pPr>
-            <a:lvl2pPr>
-              <a:defRPr sz="2400"/>
-            </a:lvl2pPr>
-            <a:lvl3pPr>
-              <a:defRPr sz="2000"/>
-            </a:lvl3pPr>
-            <a:lvl4pPr>
-              <a:defRPr sz="1800"/>
-            </a:lvl4pPr>
-            <a:lvl5pPr>
-              <a:defRPr sz="1800"/>
-            </a:lvl5pPr>
-            <a:lvl6pPr>
-              <a:defRPr sz="1800"/>
-            </a:lvl6pPr>
-            <a:lvl7pPr>
-              <a:defRPr sz="1800"/>
-            </a:lvl7pPr>
-            <a:lvl8pPr>
-              <a:defRPr sz="1800"/>
-            </a:lvl8pPr>
-            <a:lvl9pPr>
-              <a:defRPr sz="1800"/>
-            </a:lvl9pPr>
-          </a:lstStyle>
+          <a:lstStyle/>
           <a:p>
             <a:pPr lvl="0"/>
             <a:r>
+              <a:rPr lang="en-US" dirty="0"/>
+              <a:t>Click to edit Master text styles</a:t>
+            </a:r>
+          </a:p>
+          <a:p>
+            <a:pPr lvl="1"/>
+            <a:r>
+              <a:rPr lang="en-US" dirty="0"/>
+              <a:t>Second level</a:t>
+            </a:r>
+          </a:p>
+          <a:p>
+            <a:pPr lvl="2"/>
+            <a:r>
+              <a:rPr lang="en-US" dirty="0"/>
+              <a:t>Third level</a:t>
+            </a:r>
+          </a:p>
+          <a:p>
+            <a:pPr lvl="3"/>
+            <a:r>
+              <a:rPr lang="en-US" dirty="0"/>
+              <a:t>Fourth level</a:t>
+            </a:r>
+          </a:p>
+          <a:p>
+            <a:pPr lvl="4"/>
+            <a:r>
+              <a:rPr lang="en-US" dirty="0"/>
+              <a:t>Fifth level</a:t>
+            </a:r>
+          </a:p>
+        </p:txBody>
+      </p:sp>
+      <p:sp>
+        <p:nvSpPr>
+          <p:cNvPr id="4" name="Content Placeholder 3">
+            <a:extLst>
+              <a:ext uri="{FF2B5EF4-FFF2-40B4-BE49-F238E27FC236}">
+                <a16:creationId xmlns:a16="http://schemas.microsoft.com/office/drawing/2014/main" id="{5C17480F-A530-4D05-9A22-E573FB4BA620}"/>
+              </a:ext>
+            </a:extLst>
+          </p:cNvPr>
+          <p:cNvSpPr>
+            <a:spLocks noGrp="1"/>
+          </p:cNvSpPr>
+          <p:nvPr>
+            <p:ph sz="half" idx="2"/>
+          </p:nvPr>
+        </p:nvSpPr>
+        <p:spPr>
+          <a:xfrm>
+            <a:off x="6172200" y="1825625"/>
+            <a:ext cx="5181600" cy="4351338"/>
+          </a:xfrm>
+        </p:spPr>
+        <p:txBody>
+          <a:bodyPr/>
+          <a:lstStyle/>
+          <a:p>
+            <a:pPr lvl="0"/>
+            <a:r>
+              <a:rPr lang="en-US"/>
+              <a:t>Click to edit Master text styles</a:t>
+            </a:r>
+          </a:p>
+          <a:p>
+            <a:pPr lvl="1"/>
+            <a:r>
+              <a:rPr lang="en-US"/>
+              <a:t>Second level</a:t>
+            </a:r>
+          </a:p>
+          <a:p>
+            <a:pPr lvl="2"/>
+            <a:r>
+              <a:rPr lang="en-US"/>
+              <a:t>Third level</a:t>
+            </a:r>
+          </a:p>
+          <a:p>
+            <a:pPr lvl="3"/>
+            <a:r>
+              <a:rPr lang="en-US"/>
+              <a:t>Fourth level</a:t>
+            </a:r>
+          </a:p>
+          <a:p>
+            <a:pPr lvl="4"/>
+            <a:r>
+              <a:rPr lang="en-US"/>
+              <a:t>Fifth level</a:t>
+            </a:r>
+          </a:p>
+        </p:txBody>
+      </p:sp>
+      <p:sp>
+        <p:nvSpPr>
+          <p:cNvPr id="5" name="Date Placeholder 4">
+            <a:extLst>
+              <a:ext uri="{FF2B5EF4-FFF2-40B4-BE49-F238E27FC236}">
+                <a16:creationId xmlns:a16="http://schemas.microsoft.com/office/drawing/2014/main" id="{55B56FDA-C47A-4F4A-A364-BA60A25AB90A}"/>
+              </a:ext>
+            </a:extLst>
+          </p:cNvPr>
+          <p:cNvSpPr>
+            <a:spLocks noGrp="1"/>
+          </p:cNvSpPr>
+          <p:nvPr>
+            <p:ph type="dt" sz="half" idx="10"/>
+          </p:nvPr>
+        </p:nvSpPr>
+        <p:spPr/>
+        <p:txBody>
+          <a:bodyPr/>
+          <a:lstStyle/>
+          <a:p>
+            <a:fld id="{5F31DA2F-80B8-49CF-99FB-5ABCA53A607A}" type="datetime1">
               <a:rPr lang="en-US" smtClean="0"/>
-              <a:t>Click to edit Master text styles</a:t>
-            </a:r>
-          </a:p>
-          <a:p>
-            <a:pPr lvl="1"/>
-            <a:r>
-              <a:rPr lang="en-US" smtClean="0"/>
-              <a:t>Second level</a:t>
-            </a:r>
-          </a:p>
-          <a:p>
-            <a:pPr lvl="2"/>
-            <a:r>
-              <a:rPr lang="en-US" smtClean="0"/>
-              <a:t>Third level</a:t>
-            </a:r>
-          </a:p>
-          <a:p>
-            <a:pPr lvl="3"/>
-            <a:r>
-              <a:rPr lang="en-US" smtClean="0"/>
-              <a:t>Fourth level</a:t>
-            </a:r>
-          </a:p>
-          <a:p>
-            <a:pPr lvl="4"/>
-            <a:r>
-              <a:rPr lang="en-US" smtClean="0"/>
-              <a:t>Fifth level</a:t>
-            </a:r>
-            <a:endParaRPr lang="en-US"/>
-          </a:p>
-        </p:txBody>
-      </p:sp>
-      <p:sp>
-        <p:nvSpPr>
-          <p:cNvPr id="5" name="Date Placeholder 4"/>
-          <p:cNvSpPr>
-            <a:spLocks noGrp="1"/>
-          </p:cNvSpPr>
-          <p:nvPr>
-            <p:ph type="dt" sz="half" idx="10"/>
-          </p:nvPr>
-        </p:nvSpPr>
-        <p:spPr/>
-        <p:txBody>
-          <a:bodyPr/>
-          <a:lstStyle/>
-          <a:p>
-            <a:fld id="{5BCAD085-E8A6-8845-BD4E-CB4CCA059FC4}" type="datetimeFigureOut">
-              <a:rPr lang="en-US" smtClean="0"/>
-              <a:t>1/5/2026</a:t>
+              <a:t>2/12/2026</a:t>
             </a:fld>
             <a:endParaRPr lang="en-US"/>
           </a:p>
@@ -1375,7 +1446,13 @@
       </p:sp>
       <p:sp>
         <p:nvSpPr>
-          <p:cNvPr id="6" name="Footer Placeholder 5"/>
+          <p:cNvPr id="6" name="Footer Placeholder 5">
+            <a:extLst>
+              <a:ext uri="{FF2B5EF4-FFF2-40B4-BE49-F238E27FC236}">
+                <a16:creationId xmlns:a16="http://schemas.microsoft.com/office/drawing/2014/main" id="{7326D8DD-6D84-44D4-8A1B-57615B3ED835}"/>
+              </a:ext>
+            </a:extLst>
+          </p:cNvPr>
           <p:cNvSpPr>
             <a:spLocks noGrp="1"/>
           </p:cNvSpPr>
@@ -1394,7 +1471,13 @@
       </p:sp>
       <p:sp>
         <p:nvSpPr>
-          <p:cNvPr id="7" name="Slide Number Placeholder 6"/>
+          <p:cNvPr id="7" name="Slide Number Placeholder 6">
+            <a:extLst>
+              <a:ext uri="{FF2B5EF4-FFF2-40B4-BE49-F238E27FC236}">
+                <a16:creationId xmlns:a16="http://schemas.microsoft.com/office/drawing/2014/main" id="{14C8FE31-B577-4017-8AFE-A8BA09596E9C}"/>
+              </a:ext>
+            </a:extLst>
+          </p:cNvPr>
           <p:cNvSpPr>
             <a:spLocks noGrp="1"/>
           </p:cNvSpPr>
@@ -1407,7 +1490,7 @@
           <a:bodyPr/>
           <a:lstStyle/>
           <a:p>
-            <a:fld id="{C1FF6DA9-008F-8B48-92A6-B652298478BF}" type="slidenum">
+            <a:fld id="{73B850FF-6169-4056-8077-06FFA93A5366}" type="slidenum">
               <a:rPr lang="en-US" smtClean="0"/>
               <a:t>‹#›</a:t>
             </a:fld>
@@ -1418,7 +1501,7 @@
     </p:spTree>
     <p:extLst>
       <p:ext uri="{BB962C8B-B14F-4D97-AF65-F5344CB8AC3E}">
-        <p14:creationId xmlns:p14="http://schemas.microsoft.com/office/powerpoint/2010/main" val="2782244947"/>
+        <p14:creationId xmlns:p14="http://schemas.microsoft.com/office/powerpoint/2010/main" val="1406981766"/>
       </p:ext>
     </p:extLst>
   </p:cSld>
@@ -1447,45 +1530,57 @@
       </p:grpSpPr>
       <p:sp>
         <p:nvSpPr>
-          <p:cNvPr id="2" name="Title 1"/>
+          <p:cNvPr id="2" name="Title 1">
+            <a:extLst>
+              <a:ext uri="{FF2B5EF4-FFF2-40B4-BE49-F238E27FC236}">
+                <a16:creationId xmlns:a16="http://schemas.microsoft.com/office/drawing/2014/main" id="{A1EC28C9-B8CC-413F-9FFA-626680E4A828}"/>
+              </a:ext>
+            </a:extLst>
+          </p:cNvPr>
           <p:cNvSpPr>
             <a:spLocks noGrp="1"/>
           </p:cNvSpPr>
           <p:nvPr>
             <p:ph type="title"/>
-          </p:nvPr>
-        </p:nvSpPr>
-        <p:spPr/>
-        <p:txBody>
-          <a:bodyPr/>
-          <a:lstStyle>
-            <a:lvl1pPr>
-              <a:defRPr/>
-            </a:lvl1pPr>
-          </a:lstStyle>
-          <a:p>
-            <a:r>
-              <a:rPr lang="en-US" smtClean="0"/>
-              <a:t>Click to edit Master title style</a:t>
-            </a:r>
-            <a:endParaRPr lang="en-US"/>
-          </a:p>
-        </p:txBody>
-      </p:sp>
-      <p:sp>
-        <p:nvSpPr>
-          <p:cNvPr id="3" name="Text Placeholder 2"/>
-          <p:cNvSpPr>
-            <a:spLocks noGrp="1"/>
-          </p:cNvSpPr>
-          <p:nvPr>
-            <p:ph type="body" idx="1"/>
           </p:nvPr>
         </p:nvSpPr>
         <p:spPr>
           <a:xfrm>
-            <a:off x="457200" y="1535113"/>
-            <a:ext cx="4040188" cy="639762"/>
+            <a:off x="839788" y="365125"/>
+            <a:ext cx="10515600" cy="1325563"/>
+          </a:xfrm>
+        </p:spPr>
+        <p:txBody>
+          <a:bodyPr/>
+          <a:lstStyle/>
+          <a:p>
+            <a:r>
+              <a:rPr lang="en-US"/>
+              <a:t>Click to edit Master title style</a:t>
+            </a:r>
+          </a:p>
+        </p:txBody>
+      </p:sp>
+      <p:sp>
+        <p:nvSpPr>
+          <p:cNvPr id="3" name="Text Placeholder 2">
+            <a:extLst>
+              <a:ext uri="{FF2B5EF4-FFF2-40B4-BE49-F238E27FC236}">
+                <a16:creationId xmlns:a16="http://schemas.microsoft.com/office/drawing/2014/main" id="{CB53FE72-9D42-45F5-A37F-B12130388AD5}"/>
+              </a:ext>
+            </a:extLst>
+          </p:cNvPr>
+          <p:cNvSpPr>
+            <a:spLocks noGrp="1"/>
+          </p:cNvSpPr>
+          <p:nvPr>
+            <p:ph type="body" idx="1"/>
+          </p:nvPr>
+        </p:nvSpPr>
+        <p:spPr>
+          <a:xfrm>
+            <a:off x="839788" y="1752600"/>
+            <a:ext cx="5157787" cy="823912"/>
           </a:xfrm>
         </p:spPr>
         <p:txBody>
@@ -1531,7 +1626,7 @@
           <a:p>
             <a:pPr lvl="0"/>
             <a:r>
-              <a:rPr lang="en-US" smtClean="0"/>
+              <a:rPr lang="en-US"/>
               <a:t>Click to edit Master text styles</a:t>
             </a:r>
           </a:p>
@@ -1539,7 +1634,13 @@
       </p:sp>
       <p:sp>
         <p:nvSpPr>
-          <p:cNvPr id="4" name="Content Placeholder 3"/>
+          <p:cNvPr id="4" name="Content Placeholder 3">
+            <a:extLst>
+              <a:ext uri="{FF2B5EF4-FFF2-40B4-BE49-F238E27FC236}">
+                <a16:creationId xmlns:a16="http://schemas.microsoft.com/office/drawing/2014/main" id="{5EE3A31D-9B5F-4DE3-B18D-F7F77782EB46}"/>
+              </a:ext>
+            </a:extLst>
+          </p:cNvPr>
           <p:cNvSpPr>
             <a:spLocks noGrp="1"/>
           </p:cNvSpPr>
@@ -1549,82 +1650,60 @@
         </p:nvSpPr>
         <p:spPr>
           <a:xfrm>
-            <a:off x="457200" y="2174875"/>
-            <a:ext cx="4040188" cy="3951288"/>
+            <a:off x="839788" y="2666999"/>
+            <a:ext cx="5157787" cy="3522663"/>
           </a:xfrm>
         </p:spPr>
         <p:txBody>
           <a:bodyPr/>
-          <a:lstStyle>
-            <a:lvl1pPr>
-              <a:defRPr sz="2400"/>
-            </a:lvl1pPr>
-            <a:lvl2pPr>
-              <a:defRPr sz="2000"/>
-            </a:lvl2pPr>
-            <a:lvl3pPr>
-              <a:defRPr sz="1800"/>
-            </a:lvl3pPr>
-            <a:lvl4pPr>
-              <a:defRPr sz="1600"/>
-            </a:lvl4pPr>
-            <a:lvl5pPr>
-              <a:defRPr sz="1600"/>
-            </a:lvl5pPr>
-            <a:lvl6pPr>
-              <a:defRPr sz="1600"/>
-            </a:lvl6pPr>
-            <a:lvl7pPr>
-              <a:defRPr sz="1600"/>
-            </a:lvl7pPr>
-            <a:lvl8pPr>
-              <a:defRPr sz="1600"/>
-            </a:lvl8pPr>
-            <a:lvl9pPr>
-              <a:defRPr sz="1600"/>
-            </a:lvl9pPr>
-          </a:lstStyle>
+          <a:lstStyle/>
           <a:p>
             <a:pPr lvl="0"/>
             <a:r>
-              <a:rPr lang="en-US" smtClean="0"/>
+              <a:rPr lang="en-US"/>
               <a:t>Click to edit Master text styles</a:t>
             </a:r>
           </a:p>
           <a:p>
             <a:pPr lvl="1"/>
             <a:r>
-              <a:rPr lang="en-US" smtClean="0"/>
+              <a:rPr lang="en-US"/>
               <a:t>Second level</a:t>
             </a:r>
           </a:p>
           <a:p>
             <a:pPr lvl="2"/>
             <a:r>
-              <a:rPr lang="en-US" smtClean="0"/>
+              <a:rPr lang="en-US"/>
               <a:t>Third level</a:t>
             </a:r>
           </a:p>
           <a:p>
             <a:pPr lvl="3"/>
             <a:r>
-              <a:rPr lang="en-US" smtClean="0"/>
+              <a:rPr lang="en-US"/>
               <a:t>Fourth level</a:t>
             </a:r>
           </a:p>
           <a:p>
             <a:pPr lvl="4"/>
             <a:r>
-              <a:rPr lang="en-US" smtClean="0"/>
+              <a:rPr lang="en-US"/>
               <a:t>Fifth level</a:t>
             </a:r>
-            <a:endParaRPr lang="en-US"/>
-          </a:p>
-        </p:txBody>
-      </p:sp>
-      <p:sp>
-        <p:nvSpPr>
-          <p:cNvPr id="5" name="Text Placeholder 4"/>
+            <a:endParaRPr lang="en-US" dirty="0"/>
+          </a:p>
+        </p:txBody>
+      </p:sp>
+      <p:sp>
+        <p:nvSpPr>
+          <p:cNvPr id="5" name="Text Placeholder 4">
+            <a:extLst>
+              <a:ext uri="{FF2B5EF4-FFF2-40B4-BE49-F238E27FC236}">
+                <a16:creationId xmlns:a16="http://schemas.microsoft.com/office/drawing/2014/main" id="{F0BE1D2D-822C-466C-A7B9-1A2D97366A41}"/>
+              </a:ext>
+            </a:extLst>
+          </p:cNvPr>
           <p:cNvSpPr>
             <a:spLocks noGrp="1"/>
           </p:cNvSpPr>
@@ -1634,8 +1713,8 @@
         </p:nvSpPr>
         <p:spPr>
           <a:xfrm>
-            <a:off x="4645025" y="1535113"/>
-            <a:ext cx="4041775" cy="639762"/>
+            <a:off x="6172200" y="1752600"/>
+            <a:ext cx="5183188" cy="823912"/>
           </a:xfrm>
         </p:spPr>
         <p:txBody>
@@ -1681,7 +1760,7 @@
           <a:p>
             <a:pPr lvl="0"/>
             <a:r>
-              <a:rPr lang="en-US" smtClean="0"/>
+              <a:rPr lang="en-US"/>
               <a:t>Click to edit Master text styles</a:t>
             </a:r>
           </a:p>
@@ -1689,7 +1768,13 @@
       </p:sp>
       <p:sp>
         <p:nvSpPr>
-          <p:cNvPr id="6" name="Content Placeholder 5"/>
+          <p:cNvPr id="6" name="Content Placeholder 5">
+            <a:extLst>
+              <a:ext uri="{FF2B5EF4-FFF2-40B4-BE49-F238E27FC236}">
+                <a16:creationId xmlns:a16="http://schemas.microsoft.com/office/drawing/2014/main" id="{F6F13B2C-44CA-49C4-BC84-02AF1638F381}"/>
+              </a:ext>
+            </a:extLst>
+          </p:cNvPr>
           <p:cNvSpPr>
             <a:spLocks noGrp="1"/>
           </p:cNvSpPr>
@@ -1699,97 +1784,74 @@
         </p:nvSpPr>
         <p:spPr>
           <a:xfrm>
-            <a:off x="4645025" y="2174875"/>
-            <a:ext cx="4041775" cy="3951288"/>
+            <a:off x="6172200" y="2666999"/>
+            <a:ext cx="5183188" cy="3522663"/>
           </a:xfrm>
         </p:spPr>
         <p:txBody>
           <a:bodyPr/>
-          <a:lstStyle>
-            <a:lvl1pPr>
-              <a:defRPr sz="2400"/>
-            </a:lvl1pPr>
-            <a:lvl2pPr>
-              <a:defRPr sz="2000"/>
-            </a:lvl2pPr>
-            <a:lvl3pPr>
-              <a:defRPr sz="1800"/>
-            </a:lvl3pPr>
-            <a:lvl4pPr>
-              <a:defRPr sz="1600"/>
-            </a:lvl4pPr>
-            <a:lvl5pPr>
-              <a:defRPr sz="1600"/>
-            </a:lvl5pPr>
-            <a:lvl6pPr>
-              <a:defRPr sz="1600"/>
-            </a:lvl6pPr>
-            <a:lvl7pPr>
-              <a:defRPr sz="1600"/>
-            </a:lvl7pPr>
-            <a:lvl8pPr>
-              <a:defRPr sz="1600"/>
-            </a:lvl8pPr>
-            <a:lvl9pPr>
-              <a:defRPr sz="1600"/>
-            </a:lvl9pPr>
-          </a:lstStyle>
+          <a:lstStyle/>
           <a:p>
             <a:pPr lvl="0"/>
             <a:r>
+              <a:rPr lang="en-US"/>
+              <a:t>Click to edit Master text styles</a:t>
+            </a:r>
+          </a:p>
+          <a:p>
+            <a:pPr lvl="1"/>
+            <a:r>
+              <a:rPr lang="en-US"/>
+              <a:t>Second level</a:t>
+            </a:r>
+          </a:p>
+          <a:p>
+            <a:pPr lvl="2"/>
+            <a:r>
+              <a:rPr lang="en-US"/>
+              <a:t>Third level</a:t>
+            </a:r>
+          </a:p>
+          <a:p>
+            <a:pPr lvl="3"/>
+            <a:r>
+              <a:rPr lang="en-US"/>
+              <a:t>Fourth level</a:t>
+            </a:r>
+          </a:p>
+          <a:p>
+            <a:pPr lvl="4"/>
+            <a:r>
+              <a:rPr lang="en-US"/>
+              <a:t>Fifth level</a:t>
+            </a:r>
+          </a:p>
+        </p:txBody>
+      </p:sp>
+      <p:sp>
+        <p:nvSpPr>
+          <p:cNvPr id="7" name="Date Placeholder 6">
+            <a:extLst>
+              <a:ext uri="{FF2B5EF4-FFF2-40B4-BE49-F238E27FC236}">
+                <a16:creationId xmlns:a16="http://schemas.microsoft.com/office/drawing/2014/main" id="{3793CB55-E9C1-4CE6-9B61-81B71475B960}"/>
+              </a:ext>
+            </a:extLst>
+          </p:cNvPr>
+          <p:cNvSpPr>
+            <a:spLocks noGrp="1"/>
+          </p:cNvSpPr>
+          <p:nvPr>
+            <p:ph type="dt" sz="half" idx="10"/>
+          </p:nvPr>
+        </p:nvSpPr>
+        <p:spPr/>
+        <p:txBody>
+          <a:bodyPr/>
+          <a:lstStyle/>
+          <a:p>
+            <a:fld id="{28852172-E6C9-4B6C-929A-A9DE3837BBF1}" type="datetime1">
               <a:rPr lang="en-US" smtClean="0"/>
-              <a:t>Click to edit Master text styles</a:t>
-            </a:r>
-          </a:p>
-          <a:p>
-            <a:pPr lvl="1"/>
-            <a:r>
-              <a:rPr lang="en-US" smtClean="0"/>
-              <a:t>Second level</a:t>
-            </a:r>
-          </a:p>
-          <a:p>
-            <a:pPr lvl="2"/>
-            <a:r>
-              <a:rPr lang="en-US" smtClean="0"/>
-              <a:t>Third level</a:t>
-            </a:r>
-          </a:p>
-          <a:p>
-            <a:pPr lvl="3"/>
-            <a:r>
-              <a:rPr lang="en-US" smtClean="0"/>
-              <a:t>Fourth level</a:t>
-            </a:r>
-          </a:p>
-          <a:p>
-            <a:pPr lvl="4"/>
-            <a:r>
-              <a:rPr lang="en-US" smtClean="0"/>
-              <a:t>Fifth level</a:t>
-            </a:r>
-            <a:endParaRPr lang="en-US"/>
-          </a:p>
-        </p:txBody>
-      </p:sp>
-      <p:sp>
-        <p:nvSpPr>
-          <p:cNvPr id="7" name="Date Placeholder 6"/>
-          <p:cNvSpPr>
-            <a:spLocks noGrp="1"/>
-          </p:cNvSpPr>
-          <p:nvPr>
-            <p:ph type="dt" sz="half" idx="10"/>
-          </p:nvPr>
-        </p:nvSpPr>
-        <p:spPr/>
-        <p:txBody>
-          <a:bodyPr/>
-          <a:lstStyle/>
-          <a:p>
-            <a:fld id="{5BCAD085-E8A6-8845-BD4E-CB4CCA059FC4}" type="datetimeFigureOut">
-              <a:rPr lang="en-US" smtClean="0"/>
-              <a:t>1/5/2026</a:t>
+              <a:t>2/12/2026</a:t>
             </a:fld>
             <a:endParaRPr lang="en-US"/>
           </a:p>
@@ -1797,7 +1859,13 @@
       </p:sp>
       <p:sp>
         <p:nvSpPr>
-          <p:cNvPr id="8" name="Footer Placeholder 7"/>
+          <p:cNvPr id="8" name="Footer Placeholder 7">
+            <a:extLst>
+              <a:ext uri="{FF2B5EF4-FFF2-40B4-BE49-F238E27FC236}">
+                <a16:creationId xmlns:a16="http://schemas.microsoft.com/office/drawing/2014/main" id="{0DF22318-747B-4EC9-862C-D9FD488CCCE9}"/>
+              </a:ext>
+            </a:extLst>
+          </p:cNvPr>
           <p:cNvSpPr>
             <a:spLocks noGrp="1"/>
           </p:cNvSpPr>
@@ -1816,7 +1884,13 @@
       </p:sp>
       <p:sp>
         <p:nvSpPr>
-          <p:cNvPr id="9" name="Slide Number Placeholder 8"/>
+          <p:cNvPr id="9" name="Slide Number Placeholder 8">
+            <a:extLst>
+              <a:ext uri="{FF2B5EF4-FFF2-40B4-BE49-F238E27FC236}">
+                <a16:creationId xmlns:a16="http://schemas.microsoft.com/office/drawing/2014/main" id="{0CFBDDDF-16BD-438D-937D-0E3E30E74E86}"/>
+              </a:ext>
+            </a:extLst>
+          </p:cNvPr>
           <p:cNvSpPr>
             <a:spLocks noGrp="1"/>
           </p:cNvSpPr>
@@ -1829,7 +1903,7 @@
           <a:bodyPr/>
           <a:lstStyle/>
           <a:p>
-            <a:fld id="{C1FF6DA9-008F-8B48-92A6-B652298478BF}" type="slidenum">
+            <a:fld id="{73B850FF-6169-4056-8077-06FFA93A5366}" type="slidenum">
               <a:rPr lang="en-US" smtClean="0"/>
               <a:t>‹#›</a:t>
             </a:fld>
@@ -1840,7 +1914,7 @@
     </p:spTree>
     <p:extLst>
       <p:ext uri="{BB962C8B-B14F-4D97-AF65-F5344CB8AC3E}">
-        <p14:creationId xmlns:p14="http://schemas.microsoft.com/office/powerpoint/2010/main" val="990158736"/>
+        <p14:creationId xmlns:p14="http://schemas.microsoft.com/office/powerpoint/2010/main" val="3337732489"/>
       </p:ext>
     </p:extLst>
   </p:cSld>
@@ -1869,7 +1943,13 @@
       </p:grpSpPr>
       <p:sp>
         <p:nvSpPr>
-          <p:cNvPr id="2" name="Title 1"/>
+          <p:cNvPr id="2" name="Title 1">
+            <a:extLst>
+              <a:ext uri="{FF2B5EF4-FFF2-40B4-BE49-F238E27FC236}">
+                <a16:creationId xmlns:a16="http://schemas.microsoft.com/office/drawing/2014/main" id="{35792D5F-0BD4-4517-9233-E08AF405B6DE}"/>
+              </a:ext>
+            </a:extLst>
+          </p:cNvPr>
           <p:cNvSpPr>
             <a:spLocks noGrp="1"/>
           </p:cNvSpPr>
@@ -1877,37 +1957,47 @@
             <p:ph type="title"/>
           </p:nvPr>
         </p:nvSpPr>
+        <p:spPr>
+          <a:xfrm>
+            <a:off x="838200" y="365760"/>
+            <a:ext cx="10515600" cy="1325563"/>
+          </a:xfrm>
+        </p:spPr>
+        <p:txBody>
+          <a:bodyPr/>
+          <a:lstStyle/>
+          <a:p>
+            <a:r>
+              <a:rPr lang="en-US"/>
+              <a:t>Click to edit Master title style</a:t>
+            </a:r>
+          </a:p>
+        </p:txBody>
+      </p:sp>
+      <p:sp>
+        <p:nvSpPr>
+          <p:cNvPr id="3" name="Date Placeholder 2">
+            <a:extLst>
+              <a:ext uri="{FF2B5EF4-FFF2-40B4-BE49-F238E27FC236}">
+                <a16:creationId xmlns:a16="http://schemas.microsoft.com/office/drawing/2014/main" id="{B83523B8-51E3-48B8-BFD8-CE950619804E}"/>
+              </a:ext>
+            </a:extLst>
+          </p:cNvPr>
+          <p:cNvSpPr>
+            <a:spLocks noGrp="1"/>
+          </p:cNvSpPr>
+          <p:nvPr>
+            <p:ph type="dt" sz="half" idx="10"/>
+          </p:nvPr>
+        </p:nvSpPr>
         <p:spPr/>
         <p:txBody>
           <a:bodyPr/>
           <a:lstStyle/>
           <a:p>
-            <a:r>
+            <a:fld id="{3AB41CFF-90C9-47B3-9DA1-F2BF8D839F7E}" type="datetime1">
               <a:rPr lang="en-US" smtClean="0"/>
-              <a:t>Click to edit Master title style</a:t>
-            </a:r>
-            <a:endParaRPr lang="en-US"/>
-          </a:p>
-        </p:txBody>
-      </p:sp>
-      <p:sp>
-        <p:nvSpPr>
-          <p:cNvPr id="3" name="Date Placeholder 2"/>
-          <p:cNvSpPr>
-            <a:spLocks noGrp="1"/>
-          </p:cNvSpPr>
-          <p:nvPr>
-            <p:ph type="dt" sz="half" idx="10"/>
-          </p:nvPr>
-        </p:nvSpPr>
-        <p:spPr/>
-        <p:txBody>
-          <a:bodyPr/>
-          <a:lstStyle/>
-          <a:p>
-            <a:fld id="{5BCAD085-E8A6-8845-BD4E-CB4CCA059FC4}" type="datetimeFigureOut">
-              <a:rPr lang="en-US" smtClean="0"/>
-              <a:t>1/5/2026</a:t>
+              <a:t>2/12/2026</a:t>
             </a:fld>
             <a:endParaRPr lang="en-US"/>
           </a:p>
@@ -1915,7 +2005,13 @@
       </p:sp>
       <p:sp>
         <p:nvSpPr>
-          <p:cNvPr id="4" name="Footer Placeholder 3"/>
+          <p:cNvPr id="4" name="Footer Placeholder 3">
+            <a:extLst>
+              <a:ext uri="{FF2B5EF4-FFF2-40B4-BE49-F238E27FC236}">
+                <a16:creationId xmlns:a16="http://schemas.microsoft.com/office/drawing/2014/main" id="{7D739B90-5D50-4424-B51D-53C391621869}"/>
+              </a:ext>
+            </a:extLst>
+          </p:cNvPr>
           <p:cNvSpPr>
             <a:spLocks noGrp="1"/>
           </p:cNvSpPr>
@@ -1934,7 +2030,13 @@
       </p:sp>
       <p:sp>
         <p:nvSpPr>
-          <p:cNvPr id="5" name="Slide Number Placeholder 4"/>
+          <p:cNvPr id="5" name="Slide Number Placeholder 4">
+            <a:extLst>
+              <a:ext uri="{FF2B5EF4-FFF2-40B4-BE49-F238E27FC236}">
+                <a16:creationId xmlns:a16="http://schemas.microsoft.com/office/drawing/2014/main" id="{216F9286-3A00-4D3C-A3F0-50AC9045C4E1}"/>
+              </a:ext>
+            </a:extLst>
+          </p:cNvPr>
           <p:cNvSpPr>
             <a:spLocks noGrp="1"/>
           </p:cNvSpPr>
@@ -1947,7 +2049,7 @@
           <a:bodyPr/>
           <a:lstStyle/>
           <a:p>
-            <a:fld id="{C1FF6DA9-008F-8B48-92A6-B652298478BF}" type="slidenum">
+            <a:fld id="{73B850FF-6169-4056-8077-06FFA93A5366}" type="slidenum">
               <a:rPr lang="en-US" smtClean="0"/>
               <a:t>‹#›</a:t>
             </a:fld>
@@ -1958,7 +2060,7 @@
     </p:spTree>
     <p:extLst>
       <p:ext uri="{BB962C8B-B14F-4D97-AF65-F5344CB8AC3E}">
-        <p14:creationId xmlns:p14="http://schemas.microsoft.com/office/powerpoint/2010/main" val="727027711"/>
+        <p14:creationId xmlns:p14="http://schemas.microsoft.com/office/powerpoint/2010/main" val="592624476"/>
       </p:ext>
     </p:extLst>
   </p:cSld>
@@ -1987,7 +2089,13 @@
       </p:grpSpPr>
       <p:sp>
         <p:nvSpPr>
-          <p:cNvPr id="2" name="Date Placeholder 1"/>
+          <p:cNvPr id="2" name="Date Placeholder 1">
+            <a:extLst>
+              <a:ext uri="{FF2B5EF4-FFF2-40B4-BE49-F238E27FC236}">
+                <a16:creationId xmlns:a16="http://schemas.microsoft.com/office/drawing/2014/main" id="{72933BE2-665A-42DA-A3B7-835F81A3F46B}"/>
+              </a:ext>
+            </a:extLst>
+          </p:cNvPr>
           <p:cNvSpPr>
             <a:spLocks noGrp="1"/>
           </p:cNvSpPr>
@@ -2000,9 +2108,9 @@
           <a:bodyPr/>
           <a:lstStyle/>
           <a:p>
-            <a:fld id="{5BCAD085-E8A6-8845-BD4E-CB4CCA059FC4}" type="datetimeFigureOut">
+            <a:fld id="{F06048FA-06AB-4884-A69B-986B96E68A24}" type="datetime1">
               <a:rPr lang="en-US" smtClean="0"/>
-              <a:t>1/5/2026</a:t>
+              <a:t>2/12/2026</a:t>
             </a:fld>
             <a:endParaRPr lang="en-US"/>
           </a:p>
@@ -2010,7 +2118,13 @@
       </p:sp>
       <p:sp>
         <p:nvSpPr>
-          <p:cNvPr id="3" name="Footer Placeholder 2"/>
+          <p:cNvPr id="3" name="Footer Placeholder 2">
+            <a:extLst>
+              <a:ext uri="{FF2B5EF4-FFF2-40B4-BE49-F238E27FC236}">
+                <a16:creationId xmlns:a16="http://schemas.microsoft.com/office/drawing/2014/main" id="{634DBCBD-AD42-432D-ABA9-20D616AF3ED7}"/>
+              </a:ext>
+            </a:extLst>
+          </p:cNvPr>
           <p:cNvSpPr>
             <a:spLocks noGrp="1"/>
           </p:cNvSpPr>
@@ -2029,7 +2143,13 @@
       </p:sp>
       <p:sp>
         <p:nvSpPr>
-          <p:cNvPr id="4" name="Slide Number Placeholder 3"/>
+          <p:cNvPr id="4" name="Slide Number Placeholder 3">
+            <a:extLst>
+              <a:ext uri="{FF2B5EF4-FFF2-40B4-BE49-F238E27FC236}">
+                <a16:creationId xmlns:a16="http://schemas.microsoft.com/office/drawing/2014/main" id="{EE140251-3596-4673-B24B-59A6F9ED8FB3}"/>
+              </a:ext>
+            </a:extLst>
+          </p:cNvPr>
           <p:cNvSpPr>
             <a:spLocks noGrp="1"/>
           </p:cNvSpPr>
@@ -2042,7 +2162,7 @@
           <a:bodyPr/>
           <a:lstStyle/>
           <a:p>
-            <a:fld id="{C1FF6DA9-008F-8B48-92A6-B652298478BF}" type="slidenum">
+            <a:fld id="{73B850FF-6169-4056-8077-06FFA93A5366}" type="slidenum">
               <a:rPr lang="en-US" smtClean="0"/>
               <a:t>‹#›</a:t>
             </a:fld>
@@ -2053,7 +2173,7 @@
     </p:spTree>
     <p:extLst>
       <p:ext uri="{BB962C8B-B14F-4D97-AF65-F5344CB8AC3E}">
-        <p14:creationId xmlns:p14="http://schemas.microsoft.com/office/powerpoint/2010/main" val="1212999818"/>
+        <p14:creationId xmlns:p14="http://schemas.microsoft.com/office/powerpoint/2010/main" val="4113470468"/>
       </p:ext>
     </p:extLst>
   </p:cSld>
@@ -2082,7 +2202,13 @@
       </p:grpSpPr>
       <p:sp>
         <p:nvSpPr>
-          <p:cNvPr id="2" name="Title 1"/>
+          <p:cNvPr id="2" name="Title 1">
+            <a:extLst>
+              <a:ext uri="{FF2B5EF4-FFF2-40B4-BE49-F238E27FC236}">
+                <a16:creationId xmlns:a16="http://schemas.microsoft.com/office/drawing/2014/main" id="{2D6A81A1-6D8E-4DD6-8E49-DABDE6D107E4}"/>
+              </a:ext>
+            </a:extLst>
+          </p:cNvPr>
           <p:cNvSpPr>
             <a:spLocks noGrp="1"/>
           </p:cNvSpPr>
@@ -2092,29 +2218,34 @@
         </p:nvSpPr>
         <p:spPr>
           <a:xfrm>
-            <a:off x="457200" y="273050"/>
-            <a:ext cx="3008313" cy="1162050"/>
+            <a:off x="839788" y="457200"/>
+            <a:ext cx="3932237" cy="1600200"/>
           </a:xfrm>
         </p:spPr>
         <p:txBody>
           <a:bodyPr anchor="b"/>
           <a:lstStyle>
-            <a:lvl1pPr algn="l">
-              <a:defRPr sz="2000" b="1"/>
+            <a:lvl1pPr>
+              <a:defRPr sz="3200"/>
             </a:lvl1pPr>
           </a:lstStyle>
           <a:p>
             <a:r>
-              <a:rPr lang="en-US" smtClean="0"/>
+              <a:rPr lang="en-US"/>
               <a:t>Click to edit Master title style</a:t>
             </a:r>
-            <a:endParaRPr lang="en-US"/>
-          </a:p>
-        </p:txBody>
-      </p:sp>
-      <p:sp>
-        <p:nvSpPr>
-          <p:cNvPr id="3" name="Content Placeholder 2"/>
+          </a:p>
+        </p:txBody>
+      </p:sp>
+      <p:sp>
+        <p:nvSpPr>
+          <p:cNvPr id="3" name="Content Placeholder 2">
+            <a:extLst>
+              <a:ext uri="{FF2B5EF4-FFF2-40B4-BE49-F238E27FC236}">
+                <a16:creationId xmlns:a16="http://schemas.microsoft.com/office/drawing/2014/main" id="{1693F18F-F78D-4A31-A6BC-6552105BCFDA}"/>
+              </a:ext>
+            </a:extLst>
+          </p:cNvPr>
           <p:cNvSpPr>
             <a:spLocks noGrp="1"/>
           </p:cNvSpPr>
@@ -2124,8 +2255,8 @@
         </p:nvSpPr>
         <p:spPr>
           <a:xfrm>
-            <a:off x="3575050" y="273050"/>
-            <a:ext cx="5111750" cy="5853113"/>
+            <a:off x="5183188" y="987425"/>
+            <a:ext cx="6172200" cy="4873625"/>
           </a:xfrm>
         </p:spPr>
         <p:txBody>
@@ -2162,44 +2293,49 @@
           <a:p>
             <a:pPr lvl="0"/>
             <a:r>
-              <a:rPr lang="en-US" smtClean="0"/>
+              <a:rPr lang="en-US"/>
               <a:t>Click to edit Master text styles</a:t>
             </a:r>
           </a:p>
           <a:p>
             <a:pPr lvl="1"/>
             <a:r>
-              <a:rPr lang="en-US" smtClean="0"/>
+              <a:rPr lang="en-US"/>
               <a:t>Second level</a:t>
             </a:r>
           </a:p>
           <a:p>
             <a:pPr lvl="2"/>
             <a:r>
-              <a:rPr lang="en-US" smtClean="0"/>
+              <a:rPr lang="en-US"/>
               <a:t>Third level</a:t>
             </a:r>
           </a:p>
           <a:p>
             <a:pPr lvl="3"/>
             <a:r>
-              <a:rPr lang="en-US" smtClean="0"/>
+              <a:rPr lang="en-US"/>
               <a:t>Fourth level</a:t>
             </a:r>
           </a:p>
           <a:p>
             <a:pPr lvl="4"/>
             <a:r>
-              <a:rPr lang="en-US" smtClean="0"/>
+              <a:rPr lang="en-US"/>
               <a:t>Fifth level</a:t>
             </a:r>
-            <a:endParaRPr lang="en-US"/>
-          </a:p>
-        </p:txBody>
-      </p:sp>
-      <p:sp>
-        <p:nvSpPr>
-          <p:cNvPr id="4" name="Text Placeholder 3"/>
+          </a:p>
+        </p:txBody>
+      </p:sp>
+      <p:sp>
+        <p:nvSpPr>
+          <p:cNvPr id="4" name="Text Placeholder 3">
+            <a:extLst>
+              <a:ext uri="{FF2B5EF4-FFF2-40B4-BE49-F238E27FC236}">
+                <a16:creationId xmlns:a16="http://schemas.microsoft.com/office/drawing/2014/main" id="{8582C2F4-BDF4-4A4F-AA3D-52692932C24C}"/>
+              </a:ext>
+            </a:extLst>
+          </p:cNvPr>
           <p:cNvSpPr>
             <a:spLocks noGrp="1"/>
           </p:cNvSpPr>
@@ -2209,8 +2345,8 @@
         </p:nvSpPr>
         <p:spPr>
           <a:xfrm>
-            <a:off x="457200" y="1435100"/>
-            <a:ext cx="3008313" cy="4691063"/>
+            <a:off x="839788" y="2057400"/>
+            <a:ext cx="3932237" cy="3811588"/>
           </a:xfrm>
         </p:spPr>
         <p:txBody>
@@ -2218,68 +2354,74 @@
           <a:lstStyle>
             <a:lvl1pPr marL="0" indent="0">
               <a:buNone/>
-              <a:defRPr sz="1400"/>
+              <a:defRPr sz="1600"/>
             </a:lvl1pPr>
             <a:lvl2pPr marL="457200" indent="0">
               <a:buNone/>
-              <a:defRPr sz="1200"/>
+              <a:defRPr sz="1400"/>
             </a:lvl2pPr>
             <a:lvl3pPr marL="914400" indent="0">
               <a:buNone/>
-              <a:defRPr sz="1000"/>
+              <a:defRPr sz="1200"/>
             </a:lvl3pPr>
             <a:lvl4pPr marL="1371600" indent="0">
               <a:buNone/>
-              <a:defRPr sz="900"/>
+              <a:defRPr sz="1000"/>
             </a:lvl4pPr>
             <a:lvl5pPr marL="1828800" indent="0">
               <a:buNone/>
-              <a:defRPr sz="900"/>
+              <a:defRPr sz="1000"/>
             </a:lvl5pPr>
             <a:lvl6pPr marL="2286000" indent="0">
               <a:buNone/>
-              <a:defRPr sz="900"/>
+              <a:defRPr sz="1000"/>
             </a:lvl6pPr>
             <a:lvl7pPr marL="2743200" indent="0">
               <a:buNone/>
-              <a:defRPr sz="900"/>
+              <a:defRPr sz="1000"/>
             </a:lvl7pPr>
             <a:lvl8pPr marL="3200400" indent="0">
               <a:buNone/>
-              <a:defRPr sz="900"/>
+              <a:defRPr sz="1000"/>
             </a:lvl8pPr>
             <a:lvl9pPr marL="3657600" indent="0">
               <a:buNone/>
-              <a:defRPr sz="900"/>
+              <a:defRPr sz="1000"/>
             </a:lvl9pPr>
           </a:lstStyle>
           <a:p>
             <a:pPr lvl="0"/>
             <a:r>
+              <a:rPr lang="en-US"/>
+              <a:t>Click to edit Master text styles</a:t>
+            </a:r>
+          </a:p>
+        </p:txBody>
+      </p:sp>
+      <p:sp>
+        <p:nvSpPr>
+          <p:cNvPr id="5" name="Date Placeholder 4">
+            <a:extLst>
+              <a:ext uri="{FF2B5EF4-FFF2-40B4-BE49-F238E27FC236}">
+                <a16:creationId xmlns:a16="http://schemas.microsoft.com/office/drawing/2014/main" id="{0113850F-5C87-4F08-9658-EAF049B60EB0}"/>
+              </a:ext>
+            </a:extLst>
+          </p:cNvPr>
+          <p:cNvSpPr>
+            <a:spLocks noGrp="1"/>
+          </p:cNvSpPr>
+          <p:nvPr>
+            <p:ph type="dt" sz="half" idx="10"/>
+          </p:nvPr>
+        </p:nvSpPr>
+        <p:spPr/>
+        <p:txBody>
+          <a:bodyPr/>
+          <a:lstStyle/>
+          <a:p>
+            <a:fld id="{50DB7ABA-0172-4F9C-889D-567164F66BCD}" type="datetime1">
               <a:rPr lang="en-US" smtClean="0"/>
-              <a:t>Click to edit Master text styles</a:t>
-            </a:r>
-          </a:p>
-        </p:txBody>
-      </p:sp>
-      <p:sp>
-        <p:nvSpPr>
-          <p:cNvPr id="5" name="Date Placeholder 4"/>
-          <p:cNvSpPr>
-            <a:spLocks noGrp="1"/>
-          </p:cNvSpPr>
-          <p:nvPr>
-            <p:ph type="dt" sz="half" idx="10"/>
-          </p:nvPr>
-        </p:nvSpPr>
-        <p:spPr/>
-        <p:txBody>
-          <a:bodyPr/>
-          <a:lstStyle/>
-          <a:p>
-            <a:fld id="{5BCAD085-E8A6-8845-BD4E-CB4CCA059FC4}" type="datetimeFigureOut">
-              <a:rPr lang="en-US" smtClean="0"/>
-              <a:t>1/5/2026</a:t>
+              <a:t>2/12/2026</a:t>
             </a:fld>
             <a:endParaRPr lang="en-US"/>
           </a:p>
@@ -2287,7 +2429,13 @@
       </p:sp>
       <p:sp>
         <p:nvSpPr>
-          <p:cNvPr id="6" name="Footer Placeholder 5"/>
+          <p:cNvPr id="6" name="Footer Placeholder 5">
+            <a:extLst>
+              <a:ext uri="{FF2B5EF4-FFF2-40B4-BE49-F238E27FC236}">
+                <a16:creationId xmlns:a16="http://schemas.microsoft.com/office/drawing/2014/main" id="{210BCE9A-A746-4439-B5D3-966FBC8E5FC2}"/>
+              </a:ext>
+            </a:extLst>
+          </p:cNvPr>
           <p:cNvSpPr>
             <a:spLocks noGrp="1"/>
           </p:cNvSpPr>
@@ -2306,7 +2454,13 @@
       </p:sp>
       <p:sp>
         <p:nvSpPr>
-          <p:cNvPr id="7" name="Slide Number Placeholder 6"/>
+          <p:cNvPr id="7" name="Slide Number Placeholder 6">
+            <a:extLst>
+              <a:ext uri="{FF2B5EF4-FFF2-40B4-BE49-F238E27FC236}">
+                <a16:creationId xmlns:a16="http://schemas.microsoft.com/office/drawing/2014/main" id="{E41D3B51-AA2E-4AA1-8062-A0D476D80CCB}"/>
+              </a:ext>
+            </a:extLst>
+          </p:cNvPr>
           <p:cNvSpPr>
             <a:spLocks noGrp="1"/>
           </p:cNvSpPr>
@@ -2319,7 +2473,7 @@
           <a:bodyPr/>
           <a:lstStyle/>
           <a:p>
-            <a:fld id="{C1FF6DA9-008F-8B48-92A6-B652298478BF}" type="slidenum">
+            <a:fld id="{73B850FF-6169-4056-8077-06FFA93A5366}" type="slidenum">
               <a:rPr lang="en-US" smtClean="0"/>
               <a:t>‹#›</a:t>
             </a:fld>
@@ -2330,7 +2484,7 @@
     </p:spTree>
     <p:extLst>
       <p:ext uri="{BB962C8B-B14F-4D97-AF65-F5344CB8AC3E}">
-        <p14:creationId xmlns:p14="http://schemas.microsoft.com/office/powerpoint/2010/main" val="1840726560"/>
+        <p14:creationId xmlns:p14="http://schemas.microsoft.com/office/powerpoint/2010/main" val="3531013135"/>
       </p:ext>
     </p:extLst>
   </p:cSld>
@@ -2359,7 +2513,13 @@
       </p:grpSpPr>
       <p:sp>
         <p:nvSpPr>
-          <p:cNvPr id="2" name="Title 1"/>
+          <p:cNvPr id="2" name="Title 1">
+            <a:extLst>
+              <a:ext uri="{FF2B5EF4-FFF2-40B4-BE49-F238E27FC236}">
+                <a16:creationId xmlns:a16="http://schemas.microsoft.com/office/drawing/2014/main" id="{4ED02CF7-F453-4B3E-9510-D747979878A9}"/>
+              </a:ext>
+            </a:extLst>
+          </p:cNvPr>
           <p:cNvSpPr>
             <a:spLocks noGrp="1"/>
           </p:cNvSpPr>
@@ -2369,29 +2529,34 @@
         </p:nvSpPr>
         <p:spPr>
           <a:xfrm>
-            <a:off x="1792288" y="4800600"/>
-            <a:ext cx="5486400" cy="566738"/>
+            <a:off x="839788" y="457200"/>
+            <a:ext cx="3932237" cy="1600200"/>
           </a:xfrm>
         </p:spPr>
         <p:txBody>
           <a:bodyPr anchor="b"/>
           <a:lstStyle>
-            <a:lvl1pPr algn="l">
-              <a:defRPr sz="2000" b="1"/>
+            <a:lvl1pPr>
+              <a:defRPr sz="3200"/>
             </a:lvl1pPr>
           </a:lstStyle>
           <a:p>
             <a:r>
-              <a:rPr lang="en-US" smtClean="0"/>
+              <a:rPr lang="en-US"/>
               <a:t>Click to edit Master title style</a:t>
             </a:r>
-            <a:endParaRPr lang="en-US"/>
-          </a:p>
-        </p:txBody>
-      </p:sp>
-      <p:sp>
-        <p:nvSpPr>
-          <p:cNvPr id="3" name="Picture Placeholder 2"/>
+          </a:p>
+        </p:txBody>
+      </p:sp>
+      <p:sp>
+        <p:nvSpPr>
+          <p:cNvPr id="3" name="Picture Placeholder 2">
+            <a:extLst>
+              <a:ext uri="{FF2B5EF4-FFF2-40B4-BE49-F238E27FC236}">
+                <a16:creationId xmlns:a16="http://schemas.microsoft.com/office/drawing/2014/main" id="{63E2A1B9-8A2A-4B49-8B79-76D3EEB36B43}"/>
+              </a:ext>
+            </a:extLst>
+          </p:cNvPr>
           <p:cNvSpPr>
             <a:spLocks noGrp="1"/>
           </p:cNvSpPr>
@@ -2401,8 +2566,8 @@
         </p:nvSpPr>
         <p:spPr>
           <a:xfrm>
-            <a:off x="1792288" y="612775"/>
-            <a:ext cx="5486400" cy="4114800"/>
+            <a:off x="5183188" y="987425"/>
+            <a:ext cx="6172200" cy="4873625"/>
           </a:xfrm>
         </p:spPr>
         <p:txBody>
@@ -2446,13 +2611,22 @@
             </a:lvl9pPr>
           </a:lstStyle>
           <a:p>
-            <a:endParaRPr lang="en-US"/>
-          </a:p>
-        </p:txBody>
-      </p:sp>
-      <p:sp>
-        <p:nvSpPr>
-          <p:cNvPr id="4" name="Text Placeholder 3"/>
+            <a:r>
+              <a:rPr lang="en-US"/>
+              <a:t>Click icon to add picture</a:t>
+            </a:r>
+          </a:p>
+        </p:txBody>
+      </p:sp>
+      <p:sp>
+        <p:nvSpPr>
+          <p:cNvPr id="4" name="Text Placeholder 3">
+            <a:extLst>
+              <a:ext uri="{FF2B5EF4-FFF2-40B4-BE49-F238E27FC236}">
+                <a16:creationId xmlns:a16="http://schemas.microsoft.com/office/drawing/2014/main" id="{BD9FEA03-0EC4-4085-AE63-4AA492D61A97}"/>
+              </a:ext>
+            </a:extLst>
+          </p:cNvPr>
           <p:cNvSpPr>
             <a:spLocks noGrp="1"/>
           </p:cNvSpPr>
@@ -2462,8 +2636,8 @@
         </p:nvSpPr>
         <p:spPr>
           <a:xfrm>
-            <a:off x="1792288" y="5367338"/>
-            <a:ext cx="5486400" cy="804862"/>
+            <a:off x="839788" y="2057400"/>
+            <a:ext cx="3932237" cy="3811588"/>
           </a:xfrm>
         </p:spPr>
         <p:txBody>
@@ -2471,68 +2645,74 @@
           <a:lstStyle>
             <a:lvl1pPr marL="0" indent="0">
               <a:buNone/>
-              <a:defRPr sz="1400"/>
+              <a:defRPr sz="1600"/>
             </a:lvl1pPr>
             <a:lvl2pPr marL="457200" indent="0">
               <a:buNone/>
-              <a:defRPr sz="1200"/>
+              <a:defRPr sz="1400"/>
             </a:lvl2pPr>
             <a:lvl3pPr marL="914400" indent="0">
               <a:buNone/>
-              <a:defRPr sz="1000"/>
+              <a:defRPr sz="1200"/>
             </a:lvl3pPr>
             <a:lvl4pPr marL="1371600" indent="0">
               <a:buNone/>
-              <a:defRPr sz="900"/>
+              <a:defRPr sz="1000"/>
             </a:lvl4pPr>
             <a:lvl5pPr marL="1828800" indent="0">
               <a:buNone/>
-              <a:defRPr sz="900"/>
+              <a:defRPr sz="1000"/>
             </a:lvl5pPr>
             <a:lvl6pPr marL="2286000" indent="0">
               <a:buNone/>
-              <a:defRPr sz="900"/>
+              <a:defRPr sz="1000"/>
             </a:lvl6pPr>
             <a:lvl7pPr marL="2743200" indent="0">
               <a:buNone/>
-              <a:defRPr sz="900"/>
+              <a:defRPr sz="1000"/>
             </a:lvl7pPr>
             <a:lvl8pPr marL="3200400" indent="0">
               <a:buNone/>
-              <a:defRPr sz="900"/>
+              <a:defRPr sz="1000"/>
             </a:lvl8pPr>
             <a:lvl9pPr marL="3657600" indent="0">
               <a:buNone/>
-              <a:defRPr sz="900"/>
+              <a:defRPr sz="1000"/>
             </a:lvl9pPr>
           </a:lstStyle>
           <a:p>
             <a:pPr lvl="0"/>
             <a:r>
+              <a:rPr lang="en-US"/>
+              <a:t>Click to edit Master text styles</a:t>
+            </a:r>
+          </a:p>
+        </p:txBody>
+      </p:sp>
+      <p:sp>
+        <p:nvSpPr>
+          <p:cNvPr id="5" name="Date Placeholder 4">
+            <a:extLst>
+              <a:ext uri="{FF2B5EF4-FFF2-40B4-BE49-F238E27FC236}">
+                <a16:creationId xmlns:a16="http://schemas.microsoft.com/office/drawing/2014/main" id="{9605AD5B-0DEA-4C6F-94D2-FAA99F2E5DA9}"/>
+              </a:ext>
+            </a:extLst>
+          </p:cNvPr>
+          <p:cNvSpPr>
+            <a:spLocks noGrp="1"/>
+          </p:cNvSpPr>
+          <p:nvPr>
+            <p:ph type="dt" sz="half" idx="10"/>
+          </p:nvPr>
+        </p:nvSpPr>
+        <p:spPr/>
+        <p:txBody>
+          <a:bodyPr/>
+          <a:lstStyle/>
+          <a:p>
+            <a:fld id="{78AC6A5B-8AE7-4A41-B5A7-9ADC6686DC18}" type="datetime1">
               <a:rPr lang="en-US" smtClean="0"/>
-              <a:t>Click to edit Master text styles</a:t>
-            </a:r>
-          </a:p>
-        </p:txBody>
-      </p:sp>
-      <p:sp>
-        <p:nvSpPr>
-          <p:cNvPr id="5" name="Date Placeholder 4"/>
-          <p:cNvSpPr>
-            <a:spLocks noGrp="1"/>
-          </p:cNvSpPr>
-          <p:nvPr>
-            <p:ph type="dt" sz="half" idx="10"/>
-          </p:nvPr>
-        </p:nvSpPr>
-        <p:spPr/>
-        <p:txBody>
-          <a:bodyPr/>
-          <a:lstStyle/>
-          <a:p>
-            <a:fld id="{5BCAD085-E8A6-8845-BD4E-CB4CCA059FC4}" type="datetimeFigureOut">
-              <a:rPr lang="en-US" smtClean="0"/>
-              <a:t>1/5/2026</a:t>
+              <a:t>2/12/2026</a:t>
             </a:fld>
             <a:endParaRPr lang="en-US"/>
           </a:p>
@@ -2540,7 +2720,13 @@
       </p:sp>
       <p:sp>
         <p:nvSpPr>
-          <p:cNvPr id="6" name="Footer Placeholder 5"/>
+          <p:cNvPr id="6" name="Footer Placeholder 5">
+            <a:extLst>
+              <a:ext uri="{FF2B5EF4-FFF2-40B4-BE49-F238E27FC236}">
+                <a16:creationId xmlns:a16="http://schemas.microsoft.com/office/drawing/2014/main" id="{F0DC6744-7CBA-4A1D-8F87-10699F9812F3}"/>
+              </a:ext>
+            </a:extLst>
+          </p:cNvPr>
           <p:cNvSpPr>
             <a:spLocks noGrp="1"/>
           </p:cNvSpPr>
@@ -2559,7 +2745,13 @@
       </p:sp>
       <p:sp>
         <p:nvSpPr>
-          <p:cNvPr id="7" name="Slide Number Placeholder 6"/>
+          <p:cNvPr id="7" name="Slide Number Placeholder 6">
+            <a:extLst>
+              <a:ext uri="{FF2B5EF4-FFF2-40B4-BE49-F238E27FC236}">
+                <a16:creationId xmlns:a16="http://schemas.microsoft.com/office/drawing/2014/main" id="{DEAD9048-35FF-4BE9-8157-BE4BAA1C7251}"/>
+              </a:ext>
+            </a:extLst>
+          </p:cNvPr>
           <p:cNvSpPr>
             <a:spLocks noGrp="1"/>
           </p:cNvSpPr>
@@ -2572,7 +2764,7 @@
           <a:bodyPr/>
           <a:lstStyle/>
           <a:p>
-            <a:fld id="{C1FF6DA9-008F-8B48-92A6-B652298478BF}" type="slidenum">
+            <a:fld id="{73B850FF-6169-4056-8077-06FFA93A5366}" type="slidenum">
               <a:rPr lang="en-US" smtClean="0"/>
               <a:t>‹#›</a:t>
             </a:fld>
@@ -2583,7 +2775,7 @@
     </p:spTree>
     <p:extLst>
       <p:ext uri="{BB962C8B-B14F-4D97-AF65-F5344CB8AC3E}">
-        <p14:creationId xmlns:p14="http://schemas.microsoft.com/office/powerpoint/2010/main" val="3889236939"/>
+        <p14:creationId xmlns:p14="http://schemas.microsoft.com/office/powerpoint/2010/main" val="851222591"/>
       </p:ext>
     </p:extLst>
   </p:cSld>
@@ -2617,154 +2809,232 @@
       </p:grpSpPr>
       <p:sp>
         <p:nvSpPr>
-          <p:cNvPr id="2" name="Title Placeholder 1"/>
-          <p:cNvSpPr>
-            <a:spLocks noGrp="1"/>
-          </p:cNvSpPr>
-          <p:nvPr>
-            <p:ph type="title"/>
-          </p:nvPr>
+          <p:cNvPr id="12" name="Rectangle 11">
+            <a:extLst>
+              <a:ext uri="{FF2B5EF4-FFF2-40B4-BE49-F238E27FC236}">
+                <a16:creationId xmlns:a16="http://schemas.microsoft.com/office/drawing/2014/main" id="{0BABF38A-8A0D-492E-BD20-6CF4D46B50BD}"/>
+              </a:ext>
+              <a:ext uri="{C183D7F6-B498-43B3-948B-1728B52AA6E4}">
+                <adec:decorative xmlns:adec="http://schemas.microsoft.com/office/drawing/2017/decorative" val="1"/>
+              </a:ext>
+            </a:extLst>
+          </p:cNvPr>
+          <p:cNvSpPr/>
+          <p:nvPr/>
         </p:nvSpPr>
         <p:spPr>
           <a:xfrm>
-            <a:off x="457200" y="274638"/>
-            <a:ext cx="8229600" cy="1143000"/>
+            <a:off x="0" y="1"/>
+            <a:ext cx="12192000" cy="6858004"/>
+          </a:xfrm>
+          <a:prstGeom prst="rect">
+            <a:avLst/>
+          </a:prstGeom>
+          <a:solidFill>
+            <a:schemeClr val="tx2">
+              <a:lumMod val="90000"/>
+              <a:lumOff val="10000"/>
+            </a:schemeClr>
+          </a:solidFill>
+          <a:ln>
+            <a:noFill/>
+          </a:ln>
+        </p:spPr>
+        <p:style>
+          <a:lnRef idx="2">
+            <a:schemeClr val="accent1">
+              <a:shade val="50000"/>
+            </a:schemeClr>
+          </a:lnRef>
+          <a:fillRef idx="1">
+            <a:schemeClr val="accent1"/>
+          </a:fillRef>
+          <a:effectRef idx="0">
+            <a:schemeClr val="accent1"/>
+          </a:effectRef>
+          <a:fontRef idx="minor">
+            <a:schemeClr val="lt1"/>
+          </a:fontRef>
+        </p:style>
+        <p:txBody>
+          <a:bodyPr rtlCol="0" anchor="ctr"/>
+          <a:lstStyle/>
+          <a:p>
+            <a:pPr algn="ctr"/>
+            <a:endParaRPr lang="en-US" dirty="0">
+              <a:solidFill>
+                <a:schemeClr val="tx1">
+                  <a:lumMod val="65000"/>
+                  <a:lumOff val="35000"/>
+                </a:schemeClr>
+              </a:solidFill>
+              <a:latin typeface="AvenirNext LT Pro Medium" panose="020B0504020202020204" pitchFamily="34" charset="0"/>
+            </a:endParaRPr>
+          </a:p>
+        </p:txBody>
+      </p:sp>
+      <p:pic>
+        <p:nvPicPr>
+          <p:cNvPr id="40" name="Picture 39">
+            <a:extLst>
+              <a:ext uri="{FF2B5EF4-FFF2-40B4-BE49-F238E27FC236}">
+                <a16:creationId xmlns:a16="http://schemas.microsoft.com/office/drawing/2014/main" id="{1CB7E8AE-A3AC-4BB7-A5C6-F00EC697B265}"/>
+              </a:ext>
+            </a:extLst>
+          </p:cNvPr>
+          <p:cNvPicPr>
+            <a:picLocks noChangeAspect="1"/>
+          </p:cNvPicPr>
+          <p:nvPr/>
+        </p:nvPicPr>
+        <p:blipFill>
+          <a:blip r:embed="rId13">
+            <a:alphaModFix amt="35000"/>
+            <a:extLst>
+              <a:ext uri="{28A0092B-C50C-407E-A947-70E740481C1C}">
+                <a14:useLocalDpi xmlns:a14="http://schemas.microsoft.com/office/drawing/2010/main" val="0"/>
+              </a:ext>
+            </a:extLst>
+          </a:blip>
+          <a:stretch>
+            <a:fillRect/>
+          </a:stretch>
+        </p:blipFill>
+        <p:spPr>
+          <a:xfrm>
+            <a:off x="0" y="1"/>
+            <a:ext cx="12192000" cy="1392401"/>
           </a:xfrm>
           <a:prstGeom prst="rect">
             <a:avLst/>
           </a:prstGeom>
         </p:spPr>
-        <p:txBody>
-          <a:bodyPr vert="horz" lIns="91440" tIns="45720" rIns="91440" bIns="45720" rtlCol="0" anchor="ctr">
-            <a:normAutofit/>
-          </a:bodyPr>
-          <a:lstStyle/>
-          <a:p>
-            <a:r>
-              <a:rPr lang="en-US" smtClean="0"/>
-              <a:t>Click to edit Master title style</a:t>
-            </a:r>
-            <a:endParaRPr lang="en-US"/>
-          </a:p>
-        </p:txBody>
-      </p:sp>
-      <p:sp>
-        <p:nvSpPr>
-          <p:cNvPr id="3" name="Text Placeholder 2"/>
-          <p:cNvSpPr>
-            <a:spLocks noGrp="1"/>
-          </p:cNvSpPr>
-          <p:nvPr>
-            <p:ph type="body" idx="1"/>
+      </p:pic>
+      <p:sp>
+        <p:nvSpPr>
+          <p:cNvPr id="2" name="Title Placeholder 1">
+            <a:extLst>
+              <a:ext uri="{FF2B5EF4-FFF2-40B4-BE49-F238E27FC236}">
+                <a16:creationId xmlns:a16="http://schemas.microsoft.com/office/drawing/2014/main" id="{E9984D45-0ED3-4D03-8E44-5E355C9134F1}"/>
+              </a:ext>
+            </a:extLst>
+          </p:cNvPr>
+          <p:cNvSpPr>
+            <a:spLocks noGrp="1"/>
+          </p:cNvSpPr>
+          <p:nvPr>
+            <p:ph type="title"/>
           </p:nvPr>
         </p:nvSpPr>
         <p:spPr>
           <a:xfrm>
-            <a:off x="457200" y="1600200"/>
-            <a:ext cx="8229600" cy="4525963"/>
+            <a:off x="838200" y="425450"/>
+            <a:ext cx="10515600" cy="1325563"/>
           </a:xfrm>
           <a:prstGeom prst="rect">
             <a:avLst/>
           </a:prstGeom>
         </p:spPr>
         <p:txBody>
-          <a:bodyPr vert="horz" lIns="91440" tIns="45720" rIns="91440" bIns="45720" rtlCol="0">
+          <a:bodyPr vert="horz" lIns="91440" tIns="45720" rIns="91440" bIns="45720" rtlCol="0" anchor="ctr">
             <a:normAutofit/>
           </a:bodyPr>
           <a:lstStyle/>
           <a:p>
-            <a:pPr lvl="0"/>
-            <a:r>
-              <a:rPr lang="en-US" smtClean="0"/>
-              <a:t>Click to edit Master text styles</a:t>
-            </a:r>
-          </a:p>
-          <a:p>
-            <a:pPr lvl="1"/>
-            <a:r>
-              <a:rPr lang="en-US" smtClean="0"/>
-              <a:t>Second level</a:t>
-            </a:r>
-          </a:p>
-          <a:p>
-            <a:pPr lvl="2"/>
-            <a:r>
-              <a:rPr lang="en-US" smtClean="0"/>
-              <a:t>Third level</a:t>
-            </a:r>
-          </a:p>
-          <a:p>
-            <a:pPr lvl="3"/>
-            <a:r>
-              <a:rPr lang="en-US" smtClean="0"/>
-              <a:t>Fourth level</a:t>
-            </a:r>
-          </a:p>
-          <a:p>
-            <a:pPr lvl="4"/>
-            <a:r>
-              <a:rPr lang="en-US" smtClean="0"/>
-              <a:t>Fifth level</a:t>
-            </a:r>
-            <a:endParaRPr lang="en-US"/>
-          </a:p>
-        </p:txBody>
-      </p:sp>
-      <p:sp>
-        <p:nvSpPr>
-          <p:cNvPr id="4" name="Date Placeholder 3"/>
-          <p:cNvSpPr>
-            <a:spLocks noGrp="1"/>
-          </p:cNvSpPr>
-          <p:nvPr>
-            <p:ph type="dt" sz="half" idx="2"/>
+            <a:r>
+              <a:rPr lang="en-US" dirty="0"/>
+              <a:t>Click to edit Master title style</a:t>
+            </a:r>
+          </a:p>
+        </p:txBody>
+      </p:sp>
+      <p:sp>
+        <p:nvSpPr>
+          <p:cNvPr id="3" name="Text Placeholder 2">
+            <a:extLst>
+              <a:ext uri="{FF2B5EF4-FFF2-40B4-BE49-F238E27FC236}">
+                <a16:creationId xmlns:a16="http://schemas.microsoft.com/office/drawing/2014/main" id="{1F687D6E-D1E9-489C-9AA9-3575C39BAA0B}"/>
+              </a:ext>
+            </a:extLst>
+          </p:cNvPr>
+          <p:cNvSpPr>
+            <a:spLocks noGrp="1"/>
+          </p:cNvSpPr>
+          <p:nvPr>
+            <p:ph type="body" idx="1"/>
           </p:nvPr>
         </p:nvSpPr>
         <p:spPr>
           <a:xfrm>
-            <a:off x="457200" y="6356350"/>
-            <a:ext cx="2133600" cy="365125"/>
+            <a:off x="838200" y="1949450"/>
+            <a:ext cx="10515600" cy="4195763"/>
           </a:xfrm>
           <a:prstGeom prst="rect">
             <a:avLst/>
           </a:prstGeom>
         </p:spPr>
         <p:txBody>
-          <a:bodyPr vert="horz" lIns="91440" tIns="45720" rIns="91440" bIns="45720" rtlCol="0" anchor="ctr"/>
-          <a:lstStyle>
-            <a:lvl1pPr algn="l">
-              <a:defRPr sz="1200">
-                <a:solidFill>
-                  <a:schemeClr val="tx1">
-                    <a:tint val="75000"/>
-                  </a:schemeClr>
-                </a:solidFill>
-              </a:defRPr>
-            </a:lvl1pPr>
-          </a:lstStyle>
-          <a:p>
-            <a:fld id="{5BCAD085-E8A6-8845-BD4E-CB4CCA059FC4}" type="datetimeFigureOut">
-              <a:rPr lang="en-US" smtClean="0"/>
-              <a:t>1/5/2026</a:t>
-            </a:fld>
-            <a:endParaRPr lang="en-US"/>
-          </a:p>
-        </p:txBody>
-      </p:sp>
-      <p:sp>
-        <p:nvSpPr>
-          <p:cNvPr id="5" name="Footer Placeholder 4"/>
-          <p:cNvSpPr>
-            <a:spLocks noGrp="1"/>
-          </p:cNvSpPr>
-          <p:nvPr>
-            <p:ph type="ftr" sz="quarter" idx="3"/>
+          <a:bodyPr vert="horz" lIns="91440" tIns="45720" rIns="91440" bIns="45720" rtlCol="0">
+            <a:normAutofit/>
+          </a:bodyPr>
+          <a:lstStyle/>
+          <a:p>
+            <a:pPr lvl="0"/>
+            <a:r>
+              <a:rPr lang="en-US" dirty="0"/>
+              <a:t>Click to edit Master text styles</a:t>
+            </a:r>
+          </a:p>
+          <a:p>
+            <a:pPr lvl="1"/>
+            <a:r>
+              <a:rPr lang="en-US" dirty="0"/>
+              <a:t>Second level</a:t>
+            </a:r>
+          </a:p>
+          <a:p>
+            <a:pPr lvl="2"/>
+            <a:r>
+              <a:rPr lang="en-US" dirty="0"/>
+              <a:t>Third level</a:t>
+            </a:r>
+          </a:p>
+          <a:p>
+            <a:pPr lvl="3"/>
+            <a:r>
+              <a:rPr lang="en-US" dirty="0"/>
+              <a:t>Fourth level</a:t>
+            </a:r>
+          </a:p>
+          <a:p>
+            <a:pPr lvl="4"/>
+            <a:r>
+              <a:rPr lang="en-US" dirty="0"/>
+              <a:t>Fifth level</a:t>
+            </a:r>
+          </a:p>
+        </p:txBody>
+      </p:sp>
+      <p:sp>
+        <p:nvSpPr>
+          <p:cNvPr id="4" name="Date Placeholder 3">
+            <a:extLst>
+              <a:ext uri="{FF2B5EF4-FFF2-40B4-BE49-F238E27FC236}">
+                <a16:creationId xmlns:a16="http://schemas.microsoft.com/office/drawing/2014/main" id="{86364E9C-08EE-4B1B-B3FC-D6D997F4EA38}"/>
+              </a:ext>
+            </a:extLst>
+          </p:cNvPr>
+          <p:cNvSpPr>
+            <a:spLocks noGrp="1"/>
+          </p:cNvSpPr>
+          <p:nvPr>
+            <p:ph type="dt" sz="half" idx="2"/>
           </p:nvPr>
         </p:nvSpPr>
         <p:spPr>
           <a:xfrm>
-            <a:off x="3124200" y="6356350"/>
-            <a:ext cx="2895600" cy="365125"/>
+            <a:off x="838200" y="6324600"/>
+            <a:ext cx="2743200" cy="365125"/>
           </a:xfrm>
           <a:prstGeom prst="rect">
             <a:avLst/>
@@ -2773,35 +3043,47 @@
         <p:txBody>
           <a:bodyPr vert="horz" lIns="91440" tIns="45720" rIns="91440" bIns="45720" rtlCol="0" anchor="ctr"/>
           <a:lstStyle>
-            <a:lvl1pPr algn="ctr">
-              <a:defRPr sz="1200">
+            <a:lvl1pPr algn="l">
+              <a:defRPr sz="900">
                 <a:solidFill>
-                  <a:schemeClr val="tx1">
-                    <a:tint val="75000"/>
+                  <a:schemeClr val="bg1">
+                    <a:alpha val="60000"/>
                   </a:schemeClr>
                 </a:solidFill>
+                <a:latin typeface="+mn-lt"/>
               </a:defRPr>
             </a:lvl1pPr>
           </a:lstStyle>
           <a:p>
-            <a:endParaRPr lang="en-US"/>
-          </a:p>
-        </p:txBody>
-      </p:sp>
-      <p:sp>
-        <p:nvSpPr>
-          <p:cNvPr id="6" name="Slide Number Placeholder 5"/>
-          <p:cNvSpPr>
-            <a:spLocks noGrp="1"/>
-          </p:cNvSpPr>
-          <p:nvPr>
-            <p:ph type="sldNum" sz="quarter" idx="4"/>
+            <a:fld id="{57E0CF6C-748E-4B7A-BC8B-3011EF78ED13}" type="datetime1">
+              <a:rPr lang="en-US" smtClean="0"/>
+              <a:pPr/>
+              <a:t>2/12/2026</a:t>
+            </a:fld>
+            <a:endParaRPr lang="en-US" dirty="0"/>
+          </a:p>
+        </p:txBody>
+      </p:sp>
+      <p:sp>
+        <p:nvSpPr>
+          <p:cNvPr id="5" name="Footer Placeholder 4">
+            <a:extLst>
+              <a:ext uri="{FF2B5EF4-FFF2-40B4-BE49-F238E27FC236}">
+                <a16:creationId xmlns:a16="http://schemas.microsoft.com/office/drawing/2014/main" id="{BAB0A1F1-38FE-4C27-81E6-A43A54793FC3}"/>
+              </a:ext>
+            </a:extLst>
+          </p:cNvPr>
+          <p:cNvSpPr>
+            <a:spLocks noGrp="1"/>
+          </p:cNvSpPr>
+          <p:nvPr>
+            <p:ph type="ftr" sz="quarter" idx="3"/>
           </p:nvPr>
         </p:nvSpPr>
         <p:spPr>
           <a:xfrm>
-            <a:off x="6553200" y="6356350"/>
-            <a:ext cx="2133600" cy="365125"/>
+            <a:off x="4038600" y="6324600"/>
+            <a:ext cx="4114800" cy="365125"/>
           </a:xfrm>
           <a:prstGeom prst="rect">
             <a:avLst/>
@@ -2810,56 +3092,106 @@
         <p:txBody>
           <a:bodyPr vert="horz" lIns="91440" tIns="45720" rIns="91440" bIns="45720" rtlCol="0" anchor="ctr"/>
           <a:lstStyle>
-            <a:lvl1pPr algn="r">
-              <a:defRPr sz="1200">
+            <a:lvl1pPr algn="ctr">
+              <a:defRPr sz="900">
                 <a:solidFill>
-                  <a:schemeClr val="tx1">
-                    <a:tint val="75000"/>
+                  <a:schemeClr val="bg1">
+                    <a:alpha val="60000"/>
                   </a:schemeClr>
                 </a:solidFill>
+                <a:latin typeface="+mn-lt"/>
               </a:defRPr>
             </a:lvl1pPr>
           </a:lstStyle>
           <a:p>
-            <a:fld id="{C1FF6DA9-008F-8B48-92A6-B652298478BF}" type="slidenum">
+            <a:endParaRPr lang="en-US" dirty="0"/>
+          </a:p>
+        </p:txBody>
+      </p:sp>
+      <p:sp>
+        <p:nvSpPr>
+          <p:cNvPr id="6" name="Slide Number Placeholder 5">
+            <a:extLst>
+              <a:ext uri="{FF2B5EF4-FFF2-40B4-BE49-F238E27FC236}">
+                <a16:creationId xmlns:a16="http://schemas.microsoft.com/office/drawing/2014/main" id="{5E26B39A-FFD8-42EF-ADC7-7DB3B302F8B2}"/>
+              </a:ext>
+            </a:extLst>
+          </p:cNvPr>
+          <p:cNvSpPr>
+            <a:spLocks noGrp="1"/>
+          </p:cNvSpPr>
+          <p:nvPr>
+            <p:ph type="sldNum" sz="quarter" idx="4"/>
+          </p:nvPr>
+        </p:nvSpPr>
+        <p:spPr>
+          <a:xfrm>
+            <a:off x="8610600" y="6324600"/>
+            <a:ext cx="2743200" cy="365125"/>
+          </a:xfrm>
+          <a:prstGeom prst="rect">
+            <a:avLst/>
+          </a:prstGeom>
+        </p:spPr>
+        <p:txBody>
+          <a:bodyPr vert="horz" lIns="91440" tIns="45720" rIns="91440" bIns="45720" rtlCol="0" anchor="ctr"/>
+          <a:lstStyle>
+            <a:lvl1pPr algn="r">
+              <a:defRPr sz="900">
+                <a:solidFill>
+                  <a:schemeClr val="bg1">
+                    <a:alpha val="60000"/>
+                  </a:schemeClr>
+                </a:solidFill>
+                <a:latin typeface="+mn-lt"/>
+              </a:defRPr>
+            </a:lvl1pPr>
+          </a:lstStyle>
+          <a:p>
+            <a:fld id="{73B850FF-6169-4056-8077-06FFA93A5366}" type="slidenum">
               <a:rPr lang="en-US" smtClean="0"/>
+              <a:pPr/>
               <a:t>‹#›</a:t>
             </a:fld>
-            <a:endParaRPr lang="en-US"/>
+            <a:endParaRPr lang="en-US" dirty="0"/>
           </a:p>
         </p:txBody>
       </p:sp>
     </p:spTree>
     <p:extLst>
       <p:ext uri="{BB962C8B-B14F-4D97-AF65-F5344CB8AC3E}">
-        <p14:creationId xmlns:p14="http://schemas.microsoft.com/office/powerpoint/2010/main" val="2209977519"/>
+        <p14:creationId xmlns:p14="http://schemas.microsoft.com/office/powerpoint/2010/main" val="317164135"/>
       </p:ext>
     </p:extLst>
   </p:cSld>
   <p:clrMap bg1="lt1" tx1="dk1" bg2="lt2" tx2="dk2" accent1="accent1" accent2="accent2" accent3="accent3" accent4="accent4" accent5="accent5" accent6="accent6" hlink="hlink" folHlink="folHlink"/>
   <p:sldLayoutIdLst>
-    <p:sldLayoutId id="2147483649" r:id="rId1"/>
-    <p:sldLayoutId id="2147483650" r:id="rId2"/>
-    <p:sldLayoutId id="2147483651" r:id="rId3"/>
-    <p:sldLayoutId id="2147483652" r:id="rId4"/>
-    <p:sldLayoutId id="2147483653" r:id="rId5"/>
-    <p:sldLayoutId id="2147483654" r:id="rId6"/>
-    <p:sldLayoutId id="2147483655" r:id="rId7"/>
-    <p:sldLayoutId id="2147483656" r:id="rId8"/>
-    <p:sldLayoutId id="2147483657" r:id="rId9"/>
-    <p:sldLayoutId id="2147483658" r:id="rId10"/>
-    <p:sldLayoutId id="2147483659" r:id="rId11"/>
+    <p:sldLayoutId id="2147483747" r:id="rId1"/>
+    <p:sldLayoutId id="2147483737" r:id="rId2"/>
+    <p:sldLayoutId id="2147483738" r:id="rId3"/>
+    <p:sldLayoutId id="2147483739" r:id="rId4"/>
+    <p:sldLayoutId id="2147483740" r:id="rId5"/>
+    <p:sldLayoutId id="2147483741" r:id="rId6"/>
+    <p:sldLayoutId id="2147483742" r:id="rId7"/>
+    <p:sldLayoutId id="2147483746" r:id="rId8"/>
+    <p:sldLayoutId id="2147483743" r:id="rId9"/>
+    <p:sldLayoutId id="2147483744" r:id="rId10"/>
+    <p:sldLayoutId id="2147483745" r:id="rId11"/>
   </p:sldLayoutIdLst>
+  <p:hf sldNum="0" hdr="0" ftr="0" dt="0"/>
   <p:txStyles>
     <p:titleStyle>
-      <a:lvl1pPr algn="ctr" defTabSz="457200" rtl="0" eaLnBrk="1" latinLnBrk="0" hangingPunct="1">
+      <a:lvl1pPr algn="l" defTabSz="914400" rtl="0" eaLnBrk="1" latinLnBrk="0" hangingPunct="1">
+        <a:lnSpc>
+          <a:spcPct val="100000"/>
+        </a:lnSpc>
         <a:spcBef>
           <a:spcPct val="0"/>
         </a:spcBef>
         <a:buNone/>
-        <a:defRPr sz="4400" kern="1200">
+        <a:defRPr sz="4400" b="1" kern="1200">
           <a:solidFill>
-            <a:schemeClr val="tx1"/>
+            <a:schemeClr val="bg1"/>
           </a:solidFill>
           <a:latin typeface="+mj-lt"/>
           <a:ea typeface="+mj-ea"/>
@@ -2868,88 +3200,121 @@
       </a:lvl1pPr>
     </p:titleStyle>
     <p:bodyStyle>
-      <a:lvl1pPr marL="342900" indent="-342900" algn="l" defTabSz="457200" rtl="0" eaLnBrk="1" latinLnBrk="0" hangingPunct="1">
+      <a:lvl1pPr marL="228600" indent="-228600" algn="l" defTabSz="914400" rtl="0" eaLnBrk="1" latinLnBrk="0" hangingPunct="1">
+        <a:lnSpc>
+          <a:spcPct val="110000"/>
+        </a:lnSpc>
         <a:spcBef>
-          <a:spcPct val="20000"/>
+          <a:spcPts val="1000"/>
         </a:spcBef>
-        <a:buFont typeface="Arial"/>
+        <a:buClr>
+          <a:schemeClr val="accent1"/>
+        </a:buClr>
+        <a:buFont typeface="Arial" panose="020B0604020202020204" pitchFamily="34" charset="0"/>
         <a:buChar char="•"/>
-        <a:defRPr sz="3200" kern="1200">
+        <a:defRPr sz="2800" kern="1200">
           <a:solidFill>
-            <a:schemeClr val="tx1"/>
+            <a:schemeClr val="bg1"/>
           </a:solidFill>
           <a:latin typeface="+mn-lt"/>
           <a:ea typeface="+mn-ea"/>
           <a:cs typeface="+mn-cs"/>
         </a:defRPr>
       </a:lvl1pPr>
-      <a:lvl2pPr marL="742950" indent="-285750" algn="l" defTabSz="457200" rtl="0" eaLnBrk="1" latinLnBrk="0" hangingPunct="1">
+      <a:lvl2pPr marL="685800" indent="-228600" algn="l" defTabSz="914400" rtl="0" eaLnBrk="1" latinLnBrk="0" hangingPunct="1">
+        <a:lnSpc>
+          <a:spcPct val="110000"/>
+        </a:lnSpc>
         <a:spcBef>
-          <a:spcPct val="20000"/>
+          <a:spcPts val="500"/>
         </a:spcBef>
-        <a:buFont typeface="Arial"/>
-        <a:buChar char="–"/>
-        <a:defRPr sz="2800" kern="1200">
+        <a:buClr>
+          <a:schemeClr val="accent1"/>
+        </a:buClr>
+        <a:buFont typeface="Arial" panose="020B0604020202020204" pitchFamily="34" charset="0"/>
+        <a:buChar char="•"/>
+        <a:defRPr sz="2400" kern="1200">
           <a:solidFill>
-            <a:schemeClr val="tx1"/>
+            <a:schemeClr val="bg1"/>
           </a:solidFill>
           <a:latin typeface="+mn-lt"/>
           <a:ea typeface="+mn-ea"/>
           <a:cs typeface="+mn-cs"/>
         </a:defRPr>
       </a:lvl2pPr>
-      <a:lvl3pPr marL="1143000" indent="-228600" algn="l" defTabSz="457200" rtl="0" eaLnBrk="1" latinLnBrk="0" hangingPunct="1">
+      <a:lvl3pPr marL="1143000" indent="-228600" algn="l" defTabSz="914400" rtl="0" eaLnBrk="1" latinLnBrk="0" hangingPunct="1">
+        <a:lnSpc>
+          <a:spcPct val="110000"/>
+        </a:lnSpc>
         <a:spcBef>
-          <a:spcPct val="20000"/>
+          <a:spcPts val="500"/>
         </a:spcBef>
-        <a:buFont typeface="Arial"/>
+        <a:buClr>
+          <a:schemeClr val="accent1"/>
+        </a:buClr>
+        <a:buFont typeface="Arial" panose="020B0604020202020204" pitchFamily="34" charset="0"/>
         <a:buChar char="•"/>
-        <a:defRPr sz="2400" kern="1200">
+        <a:defRPr sz="2000" kern="1200">
           <a:solidFill>
-            <a:schemeClr val="tx1"/>
+            <a:schemeClr val="bg1"/>
           </a:solidFill>
           <a:latin typeface="+mn-lt"/>
           <a:ea typeface="+mn-ea"/>
           <a:cs typeface="+mn-cs"/>
         </a:defRPr>
       </a:lvl3pPr>
-      <a:lvl4pPr marL="1600200" indent="-228600" algn="l" defTabSz="457200" rtl="0" eaLnBrk="1" latinLnBrk="0" hangingPunct="1">
+      <a:lvl4pPr marL="1600200" indent="-228600" algn="l" defTabSz="914400" rtl="0" eaLnBrk="1" latinLnBrk="0" hangingPunct="1">
+        <a:lnSpc>
+          <a:spcPct val="110000"/>
+        </a:lnSpc>
         <a:spcBef>
-          <a:spcPct val="20000"/>
+          <a:spcPts val="500"/>
         </a:spcBef>
-        <a:buFont typeface="Arial"/>
-        <a:buChar char="–"/>
-        <a:defRPr sz="2000" kern="1200">
+        <a:buClr>
+          <a:schemeClr val="accent1"/>
+        </a:buClr>
+        <a:buFont typeface="Arial" panose="020B0604020202020204" pitchFamily="34" charset="0"/>
+        <a:buChar char="•"/>
+        <a:defRPr sz="1800" kern="1200">
           <a:solidFill>
-            <a:schemeClr val="tx1"/>
+            <a:schemeClr val="bg1"/>
           </a:solidFill>
           <a:latin typeface="+mn-lt"/>
           <a:ea typeface="+mn-ea"/>
           <a:cs typeface="+mn-cs"/>
         </a:defRPr>
       </a:lvl4pPr>
-      <a:lvl5pPr marL="2057400" indent="-228600" algn="l" defTabSz="457200" rtl="0" eaLnBrk="1" latinLnBrk="0" hangingPunct="1">
+      <a:lvl5pPr marL="2057400" indent="-228600" algn="l" defTabSz="914400" rtl="0" eaLnBrk="1" latinLnBrk="0" hangingPunct="1">
+        <a:lnSpc>
+          <a:spcPct val="110000"/>
+        </a:lnSpc>
         <a:spcBef>
-          <a:spcPct val="20000"/>
+          <a:spcPts val="500"/>
         </a:spcBef>
-        <a:buFont typeface="Arial"/>
-        <a:buChar char="»"/>
-        <a:defRPr sz="2000" kern="1200">
+        <a:buClr>
+          <a:schemeClr val="accent1"/>
+        </a:buClr>
+        <a:buFont typeface="Arial" panose="020B0604020202020204" pitchFamily="34" charset="0"/>
+        <a:buChar char="•"/>
+        <a:defRPr sz="1800" kern="1200">
           <a:solidFill>
-            <a:schemeClr val="tx1"/>
+            <a:schemeClr val="bg1"/>
           </a:solidFill>
           <a:latin typeface="+mn-lt"/>
           <a:ea typeface="+mn-ea"/>
           <a:cs typeface="+mn-cs"/>
         </a:defRPr>
       </a:lvl5pPr>
-      <a:lvl6pPr marL="2514600" indent="-228600" algn="l" defTabSz="457200" rtl="0" eaLnBrk="1" latinLnBrk="0" hangingPunct="1">
+      <a:lvl6pPr marL="2514600" indent="-228600" algn="l" defTabSz="914400" rtl="0" eaLnBrk="1" latinLnBrk="0" hangingPunct="1">
+        <a:lnSpc>
+          <a:spcPct val="90000"/>
+        </a:lnSpc>
         <a:spcBef>
-          <a:spcPct val="20000"/>
+          <a:spcPts val="500"/>
         </a:spcBef>
-        <a:buFont typeface="Arial"/>
+        <a:buFont typeface="Arial" panose="020B0604020202020204" pitchFamily="34" charset="0"/>
         <a:buChar char="•"/>
-        <a:defRPr sz="2000" kern="1200">
+        <a:defRPr sz="1800" kern="1200">
           <a:solidFill>
             <a:schemeClr val="tx1"/>
           </a:solidFill>
@@ -2958,13 +3323,16 @@
           <a:cs typeface="+mn-cs"/>
         </a:defRPr>
       </a:lvl6pPr>
-      <a:lvl7pPr marL="2971800" indent="-228600" algn="l" defTabSz="457200" rtl="0" eaLnBrk="1" latinLnBrk="0" hangingPunct="1">
+      <a:lvl7pPr marL="2971800" indent="-228600" algn="l" defTabSz="914400" rtl="0" eaLnBrk="1" latinLnBrk="0" hangingPunct="1">
+        <a:lnSpc>
+          <a:spcPct val="90000"/>
+        </a:lnSpc>
         <a:spcBef>
-          <a:spcPct val="20000"/>
+          <a:spcPts val="500"/>
         </a:spcBef>
-        <a:buFont typeface="Arial"/>
+        <a:buFont typeface="Arial" panose="020B0604020202020204" pitchFamily="34" charset="0"/>
         <a:buChar char="•"/>
-        <a:defRPr sz="2000" kern="1200">
+        <a:defRPr sz="1800" kern="1200">
           <a:solidFill>
             <a:schemeClr val="tx1"/>
           </a:solidFill>
@@ -2973,13 +3341,16 @@
           <a:cs typeface="+mn-cs"/>
         </a:defRPr>
       </a:lvl7pPr>
-      <a:lvl8pPr marL="3429000" indent="-228600" algn="l" defTabSz="457200" rtl="0" eaLnBrk="1" latinLnBrk="0" hangingPunct="1">
+      <a:lvl8pPr marL="3429000" indent="-228600" algn="l" defTabSz="914400" rtl="0" eaLnBrk="1" latinLnBrk="0" hangingPunct="1">
+        <a:lnSpc>
+          <a:spcPct val="90000"/>
+        </a:lnSpc>
         <a:spcBef>
-          <a:spcPct val="20000"/>
+          <a:spcPts val="500"/>
         </a:spcBef>
-        <a:buFont typeface="Arial"/>
+        <a:buFont typeface="Arial" panose="020B0604020202020204" pitchFamily="34" charset="0"/>
         <a:buChar char="•"/>
-        <a:defRPr sz="2000" kern="1200">
+        <a:defRPr sz="1800" kern="1200">
           <a:solidFill>
             <a:schemeClr val="tx1"/>
           </a:solidFill>
@@ -2988,13 +3359,16 @@
           <a:cs typeface="+mn-cs"/>
         </a:defRPr>
       </a:lvl8pPr>
-      <a:lvl9pPr marL="3886200" indent="-228600" algn="l" defTabSz="457200" rtl="0" eaLnBrk="1" latinLnBrk="0" hangingPunct="1">
+      <a:lvl9pPr marL="3886200" indent="-228600" algn="l" defTabSz="914400" rtl="0" eaLnBrk="1" latinLnBrk="0" hangingPunct="1">
+        <a:lnSpc>
+          <a:spcPct val="90000"/>
+        </a:lnSpc>
         <a:spcBef>
-          <a:spcPct val="20000"/>
+          <a:spcPts val="500"/>
         </a:spcBef>
-        <a:buFont typeface="Arial"/>
+        <a:buFont typeface="Arial" panose="020B0604020202020204" pitchFamily="34" charset="0"/>
         <a:buChar char="•"/>
-        <a:defRPr sz="2000" kern="1200">
+        <a:defRPr sz="1800" kern="1200">
           <a:solidFill>
             <a:schemeClr val="tx1"/>
           </a:solidFill>
@@ -3008,7 +3382,7 @@
       <a:defPPr>
         <a:defRPr lang="en-US"/>
       </a:defPPr>
-      <a:lvl1pPr marL="0" algn="l" defTabSz="457200" rtl="0" eaLnBrk="1" latinLnBrk="0" hangingPunct="1">
+      <a:lvl1pPr marL="0" algn="l" defTabSz="914400" rtl="0" eaLnBrk="1" latinLnBrk="0" hangingPunct="1">
         <a:defRPr sz="1800" kern="1200">
           <a:solidFill>
             <a:schemeClr val="tx1"/>
@@ -3018,7 +3392,7 @@
           <a:cs typeface="+mn-cs"/>
         </a:defRPr>
       </a:lvl1pPr>
-      <a:lvl2pPr marL="457200" algn="l" defTabSz="457200" rtl="0" eaLnBrk="1" latinLnBrk="0" hangingPunct="1">
+      <a:lvl2pPr marL="457200" algn="l" defTabSz="914400" rtl="0" eaLnBrk="1" latinLnBrk="0" hangingPunct="1">
         <a:defRPr sz="1800" kern="1200">
           <a:solidFill>
             <a:schemeClr val="tx1"/>
@@ -3028,7 +3402,7 @@
           <a:cs typeface="+mn-cs"/>
         </a:defRPr>
       </a:lvl2pPr>
-      <a:lvl3pPr marL="914400" algn="l" defTabSz="457200" rtl="0" eaLnBrk="1" latinLnBrk="0" hangingPunct="1">
+      <a:lvl3pPr marL="914400" algn="l" defTabSz="914400" rtl="0" eaLnBrk="1" latinLnBrk="0" hangingPunct="1">
         <a:defRPr sz="1800" kern="1200">
           <a:solidFill>
             <a:schemeClr val="tx1"/>
@@ -3038,7 +3412,7 @@
           <a:cs typeface="+mn-cs"/>
         </a:defRPr>
       </a:lvl3pPr>
-      <a:lvl4pPr marL="1371600" algn="l" defTabSz="457200" rtl="0" eaLnBrk="1" latinLnBrk="0" hangingPunct="1">
+      <a:lvl4pPr marL="1371600" algn="l" defTabSz="914400" rtl="0" eaLnBrk="1" latinLnBrk="0" hangingPunct="1">
         <a:defRPr sz="1800" kern="1200">
           <a:solidFill>
             <a:schemeClr val="tx1"/>
@@ -3048,7 +3422,7 @@
           <a:cs typeface="+mn-cs"/>
         </a:defRPr>
       </a:lvl4pPr>
-      <a:lvl5pPr marL="1828800" algn="l" defTabSz="457200" rtl="0" eaLnBrk="1" latinLnBrk="0" hangingPunct="1">
+      <a:lvl5pPr marL="1828800" algn="l" defTabSz="914400" rtl="0" eaLnBrk="1" latinLnBrk="0" hangingPunct="1">
         <a:defRPr sz="1800" kern="1200">
           <a:solidFill>
             <a:schemeClr val="tx1"/>
@@ -3058,7 +3432,7 @@
           <a:cs typeface="+mn-cs"/>
         </a:defRPr>
       </a:lvl5pPr>
-      <a:lvl6pPr marL="2286000" algn="l" defTabSz="457200" rtl="0" eaLnBrk="1" latinLnBrk="0" hangingPunct="1">
+      <a:lvl6pPr marL="2286000" algn="l" defTabSz="914400" rtl="0" eaLnBrk="1" latinLnBrk="0" hangingPunct="1">
         <a:defRPr sz="1800" kern="1200">
           <a:solidFill>
             <a:schemeClr val="tx1"/>
@@ -3068,7 +3442,7 @@
           <a:cs typeface="+mn-cs"/>
         </a:defRPr>
       </a:lvl6pPr>
-      <a:lvl7pPr marL="2743200" algn="l" defTabSz="457200" rtl="0" eaLnBrk="1" latinLnBrk="0" hangingPunct="1">
+      <a:lvl7pPr marL="2743200" algn="l" defTabSz="914400" rtl="0" eaLnBrk="1" latinLnBrk="0" hangingPunct="1">
         <a:defRPr sz="1800" kern="1200">
           <a:solidFill>
             <a:schemeClr val="tx1"/>
@@ -3078,7 +3452,7 @@
           <a:cs typeface="+mn-cs"/>
         </a:defRPr>
       </a:lvl7pPr>
-      <a:lvl8pPr marL="3200400" algn="l" defTabSz="457200" rtl="0" eaLnBrk="1" latinLnBrk="0" hangingPunct="1">
+      <a:lvl8pPr marL="3200400" algn="l" defTabSz="914400" rtl="0" eaLnBrk="1" latinLnBrk="0" hangingPunct="1">
         <a:defRPr sz="1800" kern="1200">
           <a:solidFill>
             <a:schemeClr val="tx1"/>
@@ -3088,7 +3462,7 @@
           <a:cs typeface="+mn-cs"/>
         </a:defRPr>
       </a:lvl8pPr>
-      <a:lvl9pPr marL="3657600" algn="l" defTabSz="457200" rtl="0" eaLnBrk="1" latinLnBrk="0" hangingPunct="1">
+      <a:lvl9pPr marL="3657600" algn="l" defTabSz="914400" rtl="0" eaLnBrk="1" latinLnBrk="0" hangingPunct="1">
         <a:defRPr sz="1800" kern="1200">
           <a:solidFill>
             <a:schemeClr val="tx1"/>
@@ -3108,20 +3482,9 @@
   <p:cSld>
     <p:bg>
       <p:bgPr>
-        <a:gradFill>
-          <a:gsLst>
-            <a:gs pos="100000">
-              <a:srgbClr val="7030A0"/>
-            </a:gs>
-            <a:gs pos="0">
-              <a:schemeClr val="tx2">
-                <a:lumMod val="60000"/>
-                <a:lumOff val="40000"/>
-              </a:schemeClr>
-            </a:gs>
-          </a:gsLst>
-          <a:lin ang="5400000" scaled="1"/>
-        </a:gradFill>
+        <a:solidFill>
+          <a:schemeClr val="bg1"/>
+        </a:solidFill>
         <a:effectLst/>
       </p:bgPr>
     </p:bg>
@@ -3139,9 +3502,413 @@
           <a:chExt cx="0" cy="0"/>
         </a:xfrm>
       </p:grpSpPr>
-      <p:sp>
-        <p:nvSpPr>
-          <p:cNvPr id="2" name="Title 1"/>
+      <p:sp useBgFill="1">
+        <p:nvSpPr>
+          <p:cNvPr id="13" name="Rectangle 12">
+            <a:extLst>
+              <a:ext uri="{FF2B5EF4-FFF2-40B4-BE49-F238E27FC236}">
+                <a16:creationId xmlns:a16="http://schemas.microsoft.com/office/drawing/2014/main" id="{8A245AC3-2A12-4EC5-90F0-635CC8C2C64F}"/>
+              </a:ext>
+              <a:ext uri="{C183D7F6-B498-43B3-948B-1728B52AA6E4}">
+                <adec:decorative xmlns:adec="http://schemas.microsoft.com/office/drawing/2017/decorative" val="1"/>
+              </a:ext>
+            </a:extLst>
+          </p:cNvPr>
+          <p:cNvSpPr>
+            <a:spLocks noGrp="1" noRot="1" noChangeAspect="1" noMove="1" noResize="1" noEditPoints="1" noAdjustHandles="1" noChangeArrowheads="1" noChangeShapeType="1" noTextEdit="1"/>
+          </p:cNvSpPr>
+          <p:nvPr>
+            <p:extLst>
+              <p:ext uri="{386F3935-93C4-4BCD-93E2-E3B085C9AB24}">
+                <p16:designElem xmlns:p16="http://schemas.microsoft.com/office/powerpoint/2015/main" val="1"/>
+              </p:ext>
+            </p:extLst>
+          </p:nvPr>
+        </p:nvSpPr>
+        <p:spPr>
+          <a:xfrm>
+            <a:off x="0" y="0"/>
+            <a:ext cx="12188952" cy="6858000"/>
+          </a:xfrm>
+          <a:prstGeom prst="rect">
+            <a:avLst/>
+          </a:prstGeom>
+          <a:ln>
+            <a:noFill/>
+          </a:ln>
+        </p:spPr>
+        <p:style>
+          <a:lnRef idx="2">
+            <a:schemeClr val="accent1">
+              <a:shade val="50000"/>
+            </a:schemeClr>
+          </a:lnRef>
+          <a:fillRef idx="1">
+            <a:schemeClr val="accent1"/>
+          </a:fillRef>
+          <a:effectRef idx="0">
+            <a:schemeClr val="accent1"/>
+          </a:effectRef>
+          <a:fontRef idx="minor">
+            <a:schemeClr val="lt1"/>
+          </a:fontRef>
+        </p:style>
+        <p:txBody>
+          <a:bodyPr rtlCol="0" anchor="ctr"/>
+          <a:lstStyle/>
+          <a:p>
+            <a:pPr algn="ctr"/>
+            <a:endParaRPr lang="en-US" dirty="0">
+              <a:solidFill>
+                <a:schemeClr val="tx1">
+                  <a:lumMod val="65000"/>
+                  <a:lumOff val="35000"/>
+                </a:schemeClr>
+              </a:solidFill>
+              <a:latin typeface="AvenirNext LT Pro Medium" panose="020B0504020202020204" pitchFamily="34" charset="0"/>
+            </a:endParaRPr>
+          </a:p>
+        </p:txBody>
+      </p:sp>
+      <p:sp>
+        <p:nvSpPr>
+          <p:cNvPr id="15" name="Rectangle 14">
+            <a:extLst>
+              <a:ext uri="{FF2B5EF4-FFF2-40B4-BE49-F238E27FC236}">
+                <a16:creationId xmlns:a16="http://schemas.microsoft.com/office/drawing/2014/main" id="{31E2F09B-BB20-4BE5-AB02-3EB3D1DC4507}"/>
+              </a:ext>
+              <a:ext uri="{C183D7F6-B498-43B3-948B-1728B52AA6E4}">
+                <adec:decorative xmlns:adec="http://schemas.microsoft.com/office/drawing/2017/decorative" val="1"/>
+              </a:ext>
+            </a:extLst>
+          </p:cNvPr>
+          <p:cNvSpPr>
+            <a:spLocks noGrp="1" noRot="1" noChangeAspect="1" noMove="1" noResize="1" noEditPoints="1" noAdjustHandles="1" noChangeArrowheads="1" noChangeShapeType="1" noTextEdit="1"/>
+          </p:cNvSpPr>
+          <p:nvPr>
+            <p:extLst>
+              <p:ext uri="{386F3935-93C4-4BCD-93E2-E3B085C9AB24}">
+                <p16:designElem xmlns:p16="http://schemas.microsoft.com/office/powerpoint/2015/main" val="1"/>
+              </p:ext>
+            </p:extLst>
+          </p:nvPr>
+        </p:nvSpPr>
+        <p:spPr>
+          <a:xfrm>
+            <a:off x="0" y="0"/>
+            <a:ext cx="12188952" cy="6858000"/>
+          </a:xfrm>
+          <a:prstGeom prst="rect">
+            <a:avLst/>
+          </a:prstGeom>
+          <a:solidFill>
+            <a:schemeClr val="bg2"/>
+          </a:solidFill>
+          <a:ln>
+            <a:noFill/>
+          </a:ln>
+        </p:spPr>
+        <p:style>
+          <a:lnRef idx="2">
+            <a:schemeClr val="accent1">
+              <a:shade val="50000"/>
+            </a:schemeClr>
+          </a:lnRef>
+          <a:fillRef idx="1">
+            <a:schemeClr val="accent1"/>
+          </a:fillRef>
+          <a:effectRef idx="0">
+            <a:schemeClr val="accent1"/>
+          </a:effectRef>
+          <a:fontRef idx="minor">
+            <a:schemeClr val="lt1"/>
+          </a:fontRef>
+        </p:style>
+        <p:txBody>
+          <a:bodyPr rtlCol="0" anchor="ctr"/>
+          <a:lstStyle/>
+          <a:p>
+            <a:pPr algn="ctr"/>
+            <a:endParaRPr lang="en-US" dirty="0">
+              <a:solidFill>
+                <a:schemeClr val="tx1">
+                  <a:lumMod val="65000"/>
+                  <a:lumOff val="35000"/>
+                </a:schemeClr>
+              </a:solidFill>
+              <a:latin typeface="AvenirNext LT Pro Medium" panose="020B0504020202020204" pitchFamily="34" charset="0"/>
+            </a:endParaRPr>
+          </a:p>
+        </p:txBody>
+      </p:sp>
+      <p:pic>
+        <p:nvPicPr>
+          <p:cNvPr id="4" name="Picture 3">
+            <a:extLst>
+              <a:ext uri="{FF2B5EF4-FFF2-40B4-BE49-F238E27FC236}">
+                <a16:creationId xmlns:a16="http://schemas.microsoft.com/office/drawing/2014/main" id="{4CC9B4AD-310F-F395-77D0-8ED7C0FD9288}"/>
+              </a:ext>
+            </a:extLst>
+          </p:cNvPr>
+          <p:cNvPicPr>
+            <a:picLocks noChangeAspect="1"/>
+          </p:cNvPicPr>
+          <p:nvPr/>
+        </p:nvPicPr>
+        <p:blipFill>
+          <a:blip r:embed="rId2">
+            <a:alphaModFix/>
+          </a:blip>
+          <a:srcRect t="6462" r="-1" b="8305"/>
+          <a:stretch>
+            <a:fillRect/>
+          </a:stretch>
+        </p:blipFill>
+        <p:spPr>
+          <a:xfrm>
+            <a:off x="20" y="1376"/>
+            <a:ext cx="12188932" cy="6856624"/>
+          </a:xfrm>
+          <a:prstGeom prst="rect">
+            <a:avLst/>
+          </a:prstGeom>
+        </p:spPr>
+      </p:pic>
+      <p:sp>
+        <p:nvSpPr>
+          <p:cNvPr id="17" name="Rectangle 16">
+            <a:extLst>
+              <a:ext uri="{FF2B5EF4-FFF2-40B4-BE49-F238E27FC236}">
+                <a16:creationId xmlns:a16="http://schemas.microsoft.com/office/drawing/2014/main" id="{F23DAFF7-4C98-4E0E-8986-198D54B6C1F0}"/>
+              </a:ext>
+              <a:ext uri="{C183D7F6-B498-43B3-948B-1728B52AA6E4}">
+                <adec:decorative xmlns:adec="http://schemas.microsoft.com/office/drawing/2017/decorative" val="1"/>
+              </a:ext>
+            </a:extLst>
+          </p:cNvPr>
+          <p:cNvSpPr>
+            <a:spLocks noGrp="1" noRot="1" noChangeAspect="1" noMove="1" noResize="1" noEditPoints="1" noAdjustHandles="1" noChangeArrowheads="1" noChangeShapeType="1" noTextEdit="1"/>
+          </p:cNvSpPr>
+          <p:nvPr>
+            <p:extLst>
+              <p:ext uri="{386F3935-93C4-4BCD-93E2-E3B085C9AB24}">
+                <p16:designElem xmlns:p16="http://schemas.microsoft.com/office/powerpoint/2015/main" val="1"/>
+              </p:ext>
+            </p:extLst>
+          </p:nvPr>
+        </p:nvSpPr>
+        <p:spPr>
+          <a:xfrm rot="5400000">
+            <a:off x="5330952" y="0"/>
+            <a:ext cx="6858000" cy="6858000"/>
+          </a:xfrm>
+          <a:prstGeom prst="rect">
+            <a:avLst/>
+          </a:prstGeom>
+          <a:gradFill>
+            <a:gsLst>
+              <a:gs pos="100000">
+                <a:schemeClr val="tx1">
+                  <a:alpha val="0"/>
+                </a:schemeClr>
+              </a:gs>
+              <a:gs pos="0">
+                <a:schemeClr val="tx1"/>
+              </a:gs>
+              <a:gs pos="0">
+                <a:schemeClr val="tx1">
+                  <a:alpha val="40000"/>
+                </a:schemeClr>
+              </a:gs>
+            </a:gsLst>
+            <a:lin ang="5400000" scaled="1"/>
+          </a:gradFill>
+          <a:ln>
+            <a:noFill/>
+          </a:ln>
+        </p:spPr>
+        <p:style>
+          <a:lnRef idx="2">
+            <a:schemeClr val="accent1">
+              <a:shade val="50000"/>
+            </a:schemeClr>
+          </a:lnRef>
+          <a:fillRef idx="1">
+            <a:schemeClr val="accent1"/>
+          </a:fillRef>
+          <a:effectRef idx="0">
+            <a:schemeClr val="accent1"/>
+          </a:effectRef>
+          <a:fontRef idx="minor">
+            <a:schemeClr val="lt1"/>
+          </a:fontRef>
+        </p:style>
+        <p:txBody>
+          <a:bodyPr rtlCol="0" anchor="ctr"/>
+          <a:lstStyle/>
+          <a:p>
+            <a:pPr algn="ctr"/>
+            <a:endParaRPr lang="en-US"/>
+          </a:p>
+        </p:txBody>
+      </p:sp>
+      <p:sp>
+        <p:nvSpPr>
+          <p:cNvPr id="19" name="Rectangle 18">
+            <a:extLst>
+              <a:ext uri="{FF2B5EF4-FFF2-40B4-BE49-F238E27FC236}">
+                <a16:creationId xmlns:a16="http://schemas.microsoft.com/office/drawing/2014/main" id="{9ABA2F37-388F-4D5A-9ABF-F0ADA6CB8E48}"/>
+              </a:ext>
+              <a:ext uri="{C183D7F6-B498-43B3-948B-1728B52AA6E4}">
+                <adec:decorative xmlns:adec="http://schemas.microsoft.com/office/drawing/2017/decorative" val="1"/>
+              </a:ext>
+            </a:extLst>
+          </p:cNvPr>
+          <p:cNvSpPr>
+            <a:spLocks noGrp="1" noRot="1" noChangeAspect="1" noMove="1" noResize="1" noEditPoints="1" noAdjustHandles="1" noChangeArrowheads="1" noChangeShapeType="1" noTextEdit="1"/>
+          </p:cNvSpPr>
+          <p:nvPr>
+            <p:extLst>
+              <p:ext uri="{386F3935-93C4-4BCD-93E2-E3B085C9AB24}">
+                <p16:designElem xmlns:p16="http://schemas.microsoft.com/office/powerpoint/2015/main" val="1"/>
+              </p:ext>
+            </p:extLst>
+          </p:nvPr>
+        </p:nvSpPr>
+        <p:spPr>
+          <a:xfrm>
+            <a:off x="5864352" y="1546522"/>
+            <a:ext cx="6327657" cy="4003971"/>
+          </a:xfrm>
+          <a:prstGeom prst="rect">
+            <a:avLst/>
+          </a:prstGeom>
+          <a:solidFill>
+            <a:schemeClr val="tx2">
+              <a:lumMod val="90000"/>
+              <a:lumOff val="10000"/>
+            </a:schemeClr>
+          </a:solidFill>
+          <a:ln>
+            <a:noFill/>
+          </a:ln>
+        </p:spPr>
+        <p:style>
+          <a:lnRef idx="2">
+            <a:schemeClr val="accent1">
+              <a:shade val="50000"/>
+            </a:schemeClr>
+          </a:lnRef>
+          <a:fillRef idx="1">
+            <a:schemeClr val="accent1"/>
+          </a:fillRef>
+          <a:effectRef idx="0">
+            <a:schemeClr val="accent1"/>
+          </a:effectRef>
+          <a:fontRef idx="minor">
+            <a:schemeClr val="lt1"/>
+          </a:fontRef>
+        </p:style>
+        <p:txBody>
+          <a:bodyPr rtlCol="0" anchor="ctr"/>
+          <a:lstStyle/>
+          <a:p>
+            <a:pPr algn="ctr"/>
+            <a:endParaRPr lang="en-US" dirty="0">
+              <a:solidFill>
+                <a:schemeClr val="tx1">
+                  <a:lumMod val="65000"/>
+                  <a:lumOff val="35000"/>
+                </a:schemeClr>
+              </a:solidFill>
+              <a:latin typeface="AvenirNext LT Pro Medium" panose="020B0504020202020204" pitchFamily="34" charset="0"/>
+            </a:endParaRPr>
+          </a:p>
+        </p:txBody>
+      </p:sp>
+      <p:sp>
+        <p:nvSpPr>
+          <p:cNvPr id="21" name="Rectangle 20">
+            <a:extLst>
+              <a:ext uri="{FF2B5EF4-FFF2-40B4-BE49-F238E27FC236}">
+                <a16:creationId xmlns:a16="http://schemas.microsoft.com/office/drawing/2014/main" id="{6DAD23D2-6BEF-470D-992C-8B2BC3BF4FF5}"/>
+              </a:ext>
+              <a:ext uri="{C183D7F6-B498-43B3-948B-1728B52AA6E4}">
+                <adec:decorative xmlns:adec="http://schemas.microsoft.com/office/drawing/2017/decorative" val="1"/>
+              </a:ext>
+            </a:extLst>
+          </p:cNvPr>
+          <p:cNvSpPr>
+            <a:spLocks noGrp="1" noRot="1" noChangeAspect="1" noMove="1" noResize="1" noEditPoints="1" noAdjustHandles="1" noChangeArrowheads="1" noChangeShapeType="1" noTextEdit="1"/>
+          </p:cNvSpPr>
+          <p:nvPr>
+            <p:extLst>
+              <p:ext uri="{386F3935-93C4-4BCD-93E2-E3B085C9AB24}">
+                <p16:designElem xmlns:p16="http://schemas.microsoft.com/office/powerpoint/2015/main" val="1"/>
+              </p:ext>
+            </p:extLst>
+          </p:nvPr>
+        </p:nvSpPr>
+        <p:spPr>
+          <a:xfrm rot="10800000">
+            <a:off x="5861296" y="1546522"/>
+            <a:ext cx="6327656" cy="4016078"/>
+          </a:xfrm>
+          <a:prstGeom prst="rect">
+            <a:avLst/>
+          </a:prstGeom>
+          <a:blipFill dpi="0" rotWithShape="1">
+            <a:blip r:embed="rId3">
+              <a:alphaModFix amt="20000"/>
+              <a:duotone>
+                <a:schemeClr val="accent1">
+                  <a:shade val="45000"/>
+                  <a:satMod val="135000"/>
+                </a:schemeClr>
+                <a:prstClr val="white"/>
+              </a:duotone>
+            </a:blip>
+            <a:srcRect/>
+            <a:tile tx="889000" ty="0" sx="100000" sy="100000" flip="none" algn="tl"/>
+          </a:blipFill>
+          <a:ln>
+            <a:noFill/>
+          </a:ln>
+        </p:spPr>
+        <p:style>
+          <a:lnRef idx="2">
+            <a:schemeClr val="accent1">
+              <a:shade val="50000"/>
+            </a:schemeClr>
+          </a:lnRef>
+          <a:fillRef idx="1">
+            <a:schemeClr val="accent1"/>
+          </a:fillRef>
+          <a:effectRef idx="0">
+            <a:schemeClr val="accent1"/>
+          </a:effectRef>
+          <a:fontRef idx="minor">
+            <a:schemeClr val="lt1"/>
+          </a:fontRef>
+        </p:style>
+        <p:txBody>
+          <a:bodyPr rtlCol="0" anchor="ctr"/>
+          <a:lstStyle/>
+          <a:p>
+            <a:pPr algn="ctr"/>
+            <a:endParaRPr lang="en-US" dirty="0"/>
+          </a:p>
+        </p:txBody>
+      </p:sp>
+      <p:sp>
+        <p:nvSpPr>
+          <p:cNvPr id="2" name="Cím 1">
+            <a:extLst>
+              <a:ext uri="{FF2B5EF4-FFF2-40B4-BE49-F238E27FC236}">
+                <a16:creationId xmlns:a16="http://schemas.microsoft.com/office/drawing/2014/main" id="{54596A22-3A2C-0005-22F9-5A9CF742596E}"/>
+              </a:ext>
+            </a:extLst>
+          </p:cNvPr>
           <p:cNvSpPr>
             <a:spLocks noGrp="1"/>
           </p:cNvSpPr>
@@ -3149,91 +3916,300 @@
             <p:ph type="ctrTitle"/>
           </p:nvPr>
         </p:nvSpPr>
-        <p:spPr/>
-        <p:txBody>
-          <a:bodyPr/>
-          <a:lstStyle/>
-          <a:p>
-            <a:pPr>
-              <a:defRPr sz="3400" b="1">
-                <a:solidFill>
-                  <a:srgbClr val="5846B4"/>
-                </a:solidFill>
-              </a:defRPr>
-            </a:pPr>
-            <a:r>
-              <a:rPr lang="hu-HU" dirty="0" err="1"/>
-              <a:t>FitApp</a:t>
-            </a:r>
-            <a:r>
-              <a:rPr lang="hu-HU" dirty="0"/>
-              <a:t> – Kalóriaszámláló alkalmazás</a:t>
-            </a:r>
-            <a:endParaRPr dirty="0"/>
-          </a:p>
-        </p:txBody>
-      </p:sp>
-      <p:sp>
-        <p:nvSpPr>
-          <p:cNvPr id="3" name="Subtitle 2"/>
-          <p:cNvSpPr>
-            <a:spLocks noGrp="1"/>
-          </p:cNvSpPr>
-          <p:nvPr>
-            <p:ph type="subTitle" idx="1"/>
-          </p:nvPr>
-        </p:nvSpPr>
-        <p:spPr/>
-        <p:txBody>
-          <a:bodyPr>
+        <p:spPr>
+          <a:xfrm>
+            <a:off x="6248401" y="1828799"/>
+            <a:ext cx="5105400" cy="2491199"/>
+          </a:xfrm>
+        </p:spPr>
+        <p:txBody>
+          <a:bodyPr anchor="b">
             <a:normAutofit/>
           </a:bodyPr>
           <a:lstStyle/>
           <a:p>
-            <a:r>
-              <a:rPr lang="hu-HU" sz="2000" dirty="0"/>
-              <a:t>Projekt dokumentáció</a:t>
-            </a:r>
-          </a:p>
-          <a:p>
-            <a:r>
-              <a:rPr lang="hu-HU" sz="2000" dirty="0"/>
-              <a:t>Gonda Marcell László • Kónya Milla</a:t>
-            </a:r>
-            <a:endParaRPr lang="hu-HU" sz="2000" dirty="0"/>
+            <a:pPr algn="l"/>
+            <a:r>
+              <a:rPr lang="hu-HU">
+                <a:solidFill>
+                  <a:srgbClr val="FFFFFF"/>
+                </a:solidFill>
+              </a:rPr>
+              <a:t>FitApp – Kalóriaszámláló alkalmazás</a:t>
+            </a:r>
+          </a:p>
+        </p:txBody>
+      </p:sp>
+      <p:sp>
+        <p:nvSpPr>
+          <p:cNvPr id="3" name="Alcím 2">
+            <a:extLst>
+              <a:ext uri="{FF2B5EF4-FFF2-40B4-BE49-F238E27FC236}">
+                <a16:creationId xmlns:a16="http://schemas.microsoft.com/office/drawing/2014/main" id="{C10516AF-04C8-7AFD-7E62-6AEE34E9F23B}"/>
+              </a:ext>
+            </a:extLst>
+          </p:cNvPr>
+          <p:cNvSpPr>
+            <a:spLocks noGrp="1"/>
+          </p:cNvSpPr>
+          <p:nvPr>
+            <p:ph type="subTitle" idx="1"/>
+          </p:nvPr>
+        </p:nvSpPr>
+        <p:spPr>
+          <a:xfrm>
+            <a:off x="6248401" y="4455151"/>
+            <a:ext cx="5105400" cy="878849"/>
+          </a:xfrm>
+        </p:spPr>
+        <p:txBody>
+          <a:bodyPr anchor="t">
+            <a:normAutofit/>
+          </a:bodyPr>
+          <a:lstStyle/>
+          <a:p>
+            <a:pPr algn="l"/>
+            <a:r>
+              <a:rPr lang="hu-HU">
+                <a:solidFill>
+                  <a:srgbClr val="FFFFFF"/>
+                </a:solidFill>
+              </a:rPr>
+              <a:t>Project dokumentáció</a:t>
+            </a:r>
+          </a:p>
+          <a:p>
+            <a:pPr algn="l"/>
+            <a:r>
+              <a:rPr lang="hu-HU">
+                <a:solidFill>
+                  <a:srgbClr val="FFFFFF"/>
+                </a:solidFill>
+              </a:rPr>
+              <a:t>Gonda Marcell László, Kónya Milla</a:t>
+            </a:r>
           </a:p>
         </p:txBody>
       </p:sp>
     </p:spTree>
+    <p:extLst>
+      <p:ext uri="{BB962C8B-B14F-4D97-AF65-F5344CB8AC3E}">
+        <p14:creationId xmlns:p14="http://schemas.microsoft.com/office/powerpoint/2010/main" val="3672324999"/>
+      </p:ext>
+    </p:extLst>
   </p:cSld>
   <p:clrMapOvr>
     <a:masterClrMapping/>
   </p:clrMapOvr>
+  <p:timing>
+    <p:tnLst>
+      <p:par>
+        <p:cTn id="1" dur="indefinite" restart="never" nodeType="tmRoot">
+          <p:childTnLst>
+            <p:seq concurrent="1" nextAc="seek">
+              <p:cTn id="2" dur="indefinite" nodeType="mainSeq">
+                <p:childTnLst>
+                  <p:par>
+                    <p:cTn id="3" fill="hold">
+                      <p:stCondLst>
+                        <p:cond delay="indefinite"/>
+                        <p:cond evt="onBegin" delay="0">
+                          <p:tn val="2"/>
+                        </p:cond>
+                      </p:stCondLst>
+                      <p:childTnLst>
+                        <p:par>
+                          <p:cTn id="4" fill="hold">
+                            <p:stCondLst>
+                              <p:cond delay="0"/>
+                            </p:stCondLst>
+                            <p:childTnLst>
+                              <p:par>
+                                <p:cTn id="5" presetID="10" presetClass="entr" presetSubtype="0" fill="hold" grpId="0" nodeType="withEffect">
+                                  <p:stCondLst>
+                                    <p:cond delay="1000"/>
+                                  </p:stCondLst>
+                                  <p:iterate>
+                                    <p:tmPct val="10000"/>
+                                  </p:iterate>
+                                  <p:childTnLst>
+                                    <p:set>
+                                      <p:cBhvr>
+                                        <p:cTn id="6" dur="1" fill="hold">
+                                          <p:stCondLst>
+                                            <p:cond delay="0"/>
+                                          </p:stCondLst>
+                                        </p:cTn>
+                                        <p:tgtEl>
+                                          <p:spTgt spid="2"/>
+                                        </p:tgtEl>
+                                        <p:attrNameLst>
+                                          <p:attrName>style.visibility</p:attrName>
+                                        </p:attrNameLst>
+                                      </p:cBhvr>
+                                      <p:to>
+                                        <p:strVal val="visible"/>
+                                      </p:to>
+                                    </p:set>
+                                    <p:animEffect transition="in" filter="fade">
+                                      <p:cBhvr>
+                                        <p:cTn id="7" dur="700"/>
+                                        <p:tgtEl>
+                                          <p:spTgt spid="2"/>
+                                        </p:tgtEl>
+                                      </p:cBhvr>
+                                    </p:animEffect>
+                                  </p:childTnLst>
+                                </p:cTn>
+                              </p:par>
+                              <p:par>
+                                <p:cTn id="8" presetID="10" presetClass="entr" presetSubtype="0" fill="hold" grpId="0" nodeType="withEffect">
+                                  <p:stCondLst>
+                                    <p:cond delay="1500"/>
+                                  </p:stCondLst>
+                                  <p:iterate>
+                                    <p:tmPct val="10000"/>
+                                  </p:iterate>
+                                  <p:childTnLst>
+                                    <p:set>
+                                      <p:cBhvr>
+                                        <p:cTn id="9" dur="1" fill="hold">
+                                          <p:stCondLst>
+                                            <p:cond delay="0"/>
+                                          </p:stCondLst>
+                                        </p:cTn>
+                                        <p:tgtEl>
+                                          <p:spTgt spid="3">
+                                            <p:txEl>
+                                              <p:pRg st="0" end="0"/>
+                                            </p:txEl>
+                                          </p:spTgt>
+                                        </p:tgtEl>
+                                        <p:attrNameLst>
+                                          <p:attrName>style.visibility</p:attrName>
+                                        </p:attrNameLst>
+                                      </p:cBhvr>
+                                      <p:to>
+                                        <p:strVal val="visible"/>
+                                      </p:to>
+                                    </p:set>
+                                    <p:animEffect transition="in" filter="fade">
+                                      <p:cBhvr>
+                                        <p:cTn id="10" dur="700"/>
+                                        <p:tgtEl>
+                                          <p:spTgt spid="3">
+                                            <p:txEl>
+                                              <p:pRg st="0" end="0"/>
+                                            </p:txEl>
+                                          </p:spTgt>
+                                        </p:tgtEl>
+                                      </p:cBhvr>
+                                    </p:animEffect>
+                                  </p:childTnLst>
+                                </p:cTn>
+                              </p:par>
+                            </p:childTnLst>
+                          </p:cTn>
+                        </p:par>
+                      </p:childTnLst>
+                    </p:cTn>
+                  </p:par>
+                  <p:par>
+                    <p:cTn id="11" fill="hold">
+                      <p:stCondLst>
+                        <p:cond delay="indefinite"/>
+                      </p:stCondLst>
+                      <p:childTnLst>
+                        <p:par>
+                          <p:cTn id="12" fill="hold">
+                            <p:stCondLst>
+                              <p:cond delay="0"/>
+                            </p:stCondLst>
+                            <p:childTnLst>
+                              <p:par>
+                                <p:cTn id="13" presetID="10" presetClass="entr" presetSubtype="0" fill="hold" grpId="0" nodeType="clickEffect">
+                                  <p:stCondLst>
+                                    <p:cond delay="1500"/>
+                                  </p:stCondLst>
+                                  <p:iterate>
+                                    <p:tmPct val="10000"/>
+                                  </p:iterate>
+                                  <p:childTnLst>
+                                    <p:set>
+                                      <p:cBhvr>
+                                        <p:cTn id="14" dur="1" fill="hold">
+                                          <p:stCondLst>
+                                            <p:cond delay="0"/>
+                                          </p:stCondLst>
+                                        </p:cTn>
+                                        <p:tgtEl>
+                                          <p:spTgt spid="3">
+                                            <p:txEl>
+                                              <p:pRg st="1" end="1"/>
+                                            </p:txEl>
+                                          </p:spTgt>
+                                        </p:tgtEl>
+                                        <p:attrNameLst>
+                                          <p:attrName>style.visibility</p:attrName>
+                                        </p:attrNameLst>
+                                      </p:cBhvr>
+                                      <p:to>
+                                        <p:strVal val="visible"/>
+                                      </p:to>
+                                    </p:set>
+                                    <p:animEffect transition="in" filter="fade">
+                                      <p:cBhvr>
+                                        <p:cTn id="15" dur="700"/>
+                                        <p:tgtEl>
+                                          <p:spTgt spid="3">
+                                            <p:txEl>
+                                              <p:pRg st="1" end="1"/>
+                                            </p:txEl>
+                                          </p:spTgt>
+                                        </p:tgtEl>
+                                      </p:cBhvr>
+                                    </p:animEffect>
+                                  </p:childTnLst>
+                                </p:cTn>
+                              </p:par>
+                            </p:childTnLst>
+                          </p:cTn>
+                        </p:par>
+                      </p:childTnLst>
+                    </p:cTn>
+                  </p:par>
+                </p:childTnLst>
+              </p:cTn>
+              <p:prevCondLst>
+                <p:cond evt="onPrev" delay="0">
+                  <p:tgtEl>
+                    <p:sldTgt/>
+                  </p:tgtEl>
+                </p:cond>
+              </p:prevCondLst>
+              <p:nextCondLst>
+                <p:cond evt="onNext" delay="0">
+                  <p:tgtEl>
+                    <p:sldTgt/>
+                  </p:tgtEl>
+                </p:cond>
+              </p:nextCondLst>
+            </p:seq>
+          </p:childTnLst>
+        </p:cTn>
+      </p:par>
+    </p:tnLst>
+    <p:bldLst>
+      <p:bldP spid="2" grpId="0"/>
+      <p:bldP spid="3" grpId="0" build="p"/>
+    </p:bldLst>
+  </p:timing>
 </p:sld>
 </file>
 
 <file path=ppt/slides/slide10.xml><?xml version="1.0" encoding="utf-8"?>
 <p:sld xmlns:a="http://schemas.openxmlformats.org/drawingml/2006/main" xmlns:r="http://schemas.openxmlformats.org/officeDocument/2006/relationships" xmlns:p="http://schemas.openxmlformats.org/presentationml/2006/main">
   <p:cSld>
-    <p:bg>
-      <p:bgPr>
-        <a:gradFill>
-          <a:gsLst>
-            <a:gs pos="100000">
-              <a:srgbClr val="7030A0"/>
-            </a:gs>
-            <a:gs pos="0">
-              <a:schemeClr val="tx2">
-                <a:lumMod val="60000"/>
-                <a:lumOff val="40000"/>
-              </a:schemeClr>
-            </a:gs>
-          </a:gsLst>
-          <a:lin ang="5400000" scaled="1"/>
-        </a:gradFill>
-        <a:effectLst/>
-      </p:bgPr>
-    </p:bg>
     <p:spTree>
       <p:nvGrpSpPr>
         <p:cNvPr id="1" name=""/>
@@ -3250,7 +4226,13 @@
       </p:grpSpPr>
       <p:sp>
         <p:nvSpPr>
-          <p:cNvPr id="2" name="Title 1"/>
+          <p:cNvPr id="2" name="Cím 1">
+            <a:extLst>
+              <a:ext uri="{FF2B5EF4-FFF2-40B4-BE49-F238E27FC236}">
+                <a16:creationId xmlns:a16="http://schemas.microsoft.com/office/drawing/2014/main" id="{9DBC05C5-9E49-5B13-3445-18603143EB1F}"/>
+              </a:ext>
+            </a:extLst>
+          </p:cNvPr>
           <p:cNvSpPr>
             <a:spLocks noGrp="1"/>
           </p:cNvSpPr>
@@ -3263,22 +4245,22 @@
           <a:bodyPr/>
           <a:lstStyle/>
           <a:p>
-            <a:pPr>
-              <a:defRPr sz="3400" b="1">
-                <a:solidFill>
-                  <a:srgbClr val="5846B4"/>
-                </a:solidFill>
-              </a:defRPr>
-            </a:pPr>
-            <a:r>
-              <a:t>Továbbfejlesztési lehetőségek</a:t>
-            </a:r>
-          </a:p>
-        </p:txBody>
-      </p:sp>
-      <p:sp>
-        <p:nvSpPr>
-          <p:cNvPr id="3" name="Content Placeholder 2"/>
+            <a:r>
+              <a:rPr lang="hu-HU" dirty="0"/>
+              <a:t>További fejlesztési lehetőségek</a:t>
+            </a:r>
+          </a:p>
+        </p:txBody>
+      </p:sp>
+      <p:sp>
+        <p:nvSpPr>
+          <p:cNvPr id="3" name="Tartalom helye 2">
+            <a:extLst>
+              <a:ext uri="{FF2B5EF4-FFF2-40B4-BE49-F238E27FC236}">
+                <a16:creationId xmlns:a16="http://schemas.microsoft.com/office/drawing/2014/main" id="{3E2391C4-9924-7941-17F9-822E9145666E}"/>
+              </a:ext>
+            </a:extLst>
+          </p:cNvPr>
           <p:cNvSpPr>
             <a:spLocks noGrp="1"/>
           </p:cNvSpPr>
@@ -3291,26 +4273,13 @@
           <a:bodyPr/>
           <a:lstStyle/>
           <a:p>
-            <a:pPr>
-              <a:defRPr sz="1800">
-                <a:solidFill>
-                  <a:srgbClr val="3C3C5A"/>
-                </a:solidFill>
-              </a:defRPr>
-            </a:pPr>
             <a:r>
               <a:rPr lang="hu-HU" dirty="0"/>
               <a:t>Felhasználói élmény javítása</a:t>
             </a:r>
           </a:p>
           <a:p>
-            <a:pPr lvl="1">
-              <a:defRPr sz="1800">
-                <a:solidFill>
-                  <a:srgbClr val="3C3C5A"/>
-                </a:solidFill>
-              </a:defRPr>
-            </a:pPr>
+            <a:pPr lvl="1"/>
             <a:r>
               <a:rPr lang="hu-HU" dirty="0" err="1"/>
               <a:t>React</a:t>
@@ -3321,61 +4290,40 @@
             </a:r>
           </a:p>
           <a:p>
-            <a:pPr lvl="1">
-              <a:defRPr sz="1800">
-                <a:solidFill>
-                  <a:srgbClr val="3C3C5A"/>
-                </a:solidFill>
-              </a:defRPr>
-            </a:pPr>
+            <a:pPr lvl="1"/>
             <a:r>
               <a:rPr lang="hu-HU" dirty="0"/>
               <a:t>Mobilbarát megjelenés</a:t>
             </a:r>
           </a:p>
           <a:p>
-            <a:pPr>
-              <a:defRPr sz="1800">
-                <a:solidFill>
-                  <a:srgbClr val="3C3C5A"/>
-                </a:solidFill>
-              </a:defRPr>
-            </a:pPr>
             <a:r>
               <a:rPr lang="hu-HU" dirty="0"/>
               <a:t>Elemzések és statisztikák</a:t>
             </a:r>
           </a:p>
           <a:p>
-            <a:pPr lvl="1">
-              <a:defRPr sz="1800">
-                <a:solidFill>
-                  <a:srgbClr val="3C3C5A"/>
-                </a:solidFill>
-              </a:defRPr>
-            </a:pPr>
+            <a:pPr lvl="1"/>
             <a:r>
               <a:rPr lang="hu-HU" dirty="0"/>
               <a:t>Grafikonos kimutatások</a:t>
             </a:r>
           </a:p>
           <a:p>
-            <a:pPr lvl="1">
-              <a:defRPr sz="1800">
-                <a:solidFill>
-                  <a:srgbClr val="3C3C5A"/>
-                </a:solidFill>
-              </a:defRPr>
-            </a:pPr>
+            <a:pPr lvl="1"/>
             <a:r>
               <a:rPr lang="hu-HU" dirty="0"/>
               <a:t>Felhasználói célok kezelése</a:t>
             </a:r>
-            <a:endParaRPr lang="hu-HU" dirty="0"/>
           </a:p>
         </p:txBody>
       </p:sp>
     </p:spTree>
+    <p:extLst>
+      <p:ext uri="{BB962C8B-B14F-4D97-AF65-F5344CB8AC3E}">
+        <p14:creationId xmlns:p14="http://schemas.microsoft.com/office/powerpoint/2010/main" val="1040282333"/>
+      </p:ext>
+    </p:extLst>
   </p:cSld>
   <p:clrMapOvr>
     <a:masterClrMapping/>
@@ -3386,25 +4334,6 @@
 <file path=ppt/slides/slide2.xml><?xml version="1.0" encoding="utf-8"?>
 <p:sld xmlns:a="http://schemas.openxmlformats.org/drawingml/2006/main" xmlns:r="http://schemas.openxmlformats.org/officeDocument/2006/relationships" xmlns:p="http://schemas.openxmlformats.org/presentationml/2006/main">
   <p:cSld>
-    <p:bg>
-      <p:bgPr>
-        <a:gradFill>
-          <a:gsLst>
-            <a:gs pos="100000">
-              <a:srgbClr val="7030A0"/>
-            </a:gs>
-            <a:gs pos="0">
-              <a:schemeClr val="tx2">
-                <a:lumMod val="60000"/>
-                <a:lumOff val="40000"/>
-              </a:schemeClr>
-            </a:gs>
-          </a:gsLst>
-          <a:lin ang="5400000" scaled="1"/>
-        </a:gradFill>
-        <a:effectLst/>
-      </p:bgPr>
-    </p:bg>
     <p:spTree>
       <p:nvGrpSpPr>
         <p:cNvPr id="1" name=""/>
@@ -3421,7 +4350,13 @@
       </p:grpSpPr>
       <p:sp>
         <p:nvSpPr>
-          <p:cNvPr id="2" name="Title 1"/>
+          <p:cNvPr id="2" name="Cím 1">
+            <a:extLst>
+              <a:ext uri="{FF2B5EF4-FFF2-40B4-BE49-F238E27FC236}">
+                <a16:creationId xmlns:a16="http://schemas.microsoft.com/office/drawing/2014/main" id="{595F0BAE-7769-34BF-8744-99D8DDF36B7A}"/>
+              </a:ext>
+            </a:extLst>
+          </p:cNvPr>
           <p:cNvSpPr>
             <a:spLocks noGrp="1"/>
           </p:cNvSpPr>
@@ -3434,24 +4369,22 @@
           <a:bodyPr/>
           <a:lstStyle/>
           <a:p>
-            <a:pPr>
-              <a:defRPr sz="3400" b="1">
-                <a:solidFill>
-                  <a:srgbClr val="5846B4"/>
-                </a:solidFill>
-              </a:defRPr>
-            </a:pPr>
-            <a:r>
-              <a:rPr lang="hu-HU" dirty="0"/>
-              <a:t>Projekt célja</a:t>
-            </a:r>
-            <a:endParaRPr dirty="0"/>
-          </a:p>
-        </p:txBody>
-      </p:sp>
-      <p:sp>
-        <p:nvSpPr>
-          <p:cNvPr id="3" name="Content Placeholder 2"/>
+            <a:r>
+              <a:rPr lang="hu-HU" dirty="0"/>
+              <a:t>Project célja</a:t>
+            </a:r>
+          </a:p>
+        </p:txBody>
+      </p:sp>
+      <p:sp>
+        <p:nvSpPr>
+          <p:cNvPr id="3" name="Tartalom helye 2">
+            <a:extLst>
+              <a:ext uri="{FF2B5EF4-FFF2-40B4-BE49-F238E27FC236}">
+                <a16:creationId xmlns:a16="http://schemas.microsoft.com/office/drawing/2014/main" id="{A1848304-F1A9-2FAE-63E9-3694ED5A7A8E}"/>
+              </a:ext>
+            </a:extLst>
+          </p:cNvPr>
           <p:cNvSpPr>
             <a:spLocks noGrp="1"/>
           </p:cNvSpPr>
@@ -3464,86 +4397,36 @@
           <a:bodyPr/>
           <a:lstStyle/>
           <a:p>
-            <a:pPr>
-              <a:defRPr sz="1800">
-                <a:solidFill>
-                  <a:srgbClr val="3C3C5A"/>
-                </a:solidFill>
-              </a:defRPr>
-            </a:pPr>
             <a:r>
               <a:rPr lang="hu-HU" dirty="0"/>
               <a:t>Egészségtudatos életmód támogatása</a:t>
             </a:r>
           </a:p>
           <a:p>
-            <a:pPr lvl="1">
-              <a:defRPr sz="1800">
-                <a:solidFill>
-                  <a:srgbClr val="3C3C5A"/>
-                </a:solidFill>
-              </a:defRPr>
-            </a:pPr>
-            <a:r>
-              <a:rPr lang="hu-HU" dirty="0"/>
-              <a:t>A felhasználók jobban </a:t>
-            </a:r>
-            <a:r>
-              <a:rPr lang="hu-HU" dirty="0" err="1"/>
-              <a:t>átlássák</a:t>
-            </a:r>
-            <a:r>
-              <a:rPr lang="hu-HU" dirty="0"/>
-              <a:t> napi étkezéseiket</a:t>
-            </a:r>
-          </a:p>
-          <a:p>
-            <a:pPr lvl="1">
-              <a:defRPr sz="1800">
-                <a:solidFill>
-                  <a:srgbClr val="3C3C5A"/>
-                </a:solidFill>
-              </a:defRPr>
-            </a:pPr>
-            <a:r>
-              <a:rPr lang="hu-HU" dirty="0"/>
-              <a:t>Segítség a tudatos kalóriabevitelhez</a:t>
-            </a:r>
-          </a:p>
-          <a:p>
-            <a:pPr>
-              <a:defRPr sz="1800">
-                <a:solidFill>
-                  <a:srgbClr val="3C3C5A"/>
-                </a:solidFill>
-              </a:defRPr>
-            </a:pPr>
+            <a:r>
+              <a:rPr lang="hu-HU" dirty="0"/>
+              <a:t>A felhasználók jobban átlássák a napi étkezéseiket</a:t>
+            </a:r>
+          </a:p>
+          <a:p>
+            <a:r>
+              <a:rPr lang="hu-HU" dirty="0"/>
+              <a:t>Segítség a tudatosabb kalóriabevitelhez</a:t>
+            </a:r>
+          </a:p>
+          <a:p>
             <a:r>
               <a:rPr lang="hu-HU" dirty="0"/>
               <a:t>Kalóriák nyomon követése</a:t>
             </a:r>
           </a:p>
           <a:p>
-            <a:pPr lvl="1">
-              <a:defRPr sz="1800">
-                <a:solidFill>
-                  <a:srgbClr val="3C3C5A"/>
-                </a:solidFill>
-              </a:defRPr>
-            </a:pPr>
             <a:r>
               <a:rPr lang="hu-HU" dirty="0"/>
               <a:t>Elfogyasztott ételek rögzítése</a:t>
             </a:r>
           </a:p>
           <a:p>
-            <a:pPr lvl="1">
-              <a:defRPr sz="1800">
-                <a:solidFill>
-                  <a:srgbClr val="3C3C5A"/>
-                </a:solidFill>
-              </a:defRPr>
-            </a:pPr>
             <a:r>
               <a:rPr lang="hu-HU" dirty="0"/>
               <a:t>Automatikus napi összesítés</a:t>
@@ -3552,6 +4435,11 @@
         </p:txBody>
       </p:sp>
     </p:spTree>
+    <p:extLst>
+      <p:ext uri="{BB962C8B-B14F-4D97-AF65-F5344CB8AC3E}">
+        <p14:creationId xmlns:p14="http://schemas.microsoft.com/office/powerpoint/2010/main" val="3168770598"/>
+      </p:ext>
+    </p:extLst>
   </p:cSld>
   <p:clrMapOvr>
     <a:masterClrMapping/>
@@ -3562,25 +4450,6 @@
 <file path=ppt/slides/slide3.xml><?xml version="1.0" encoding="utf-8"?>
 <p:sld xmlns:a="http://schemas.openxmlformats.org/drawingml/2006/main" xmlns:r="http://schemas.openxmlformats.org/officeDocument/2006/relationships" xmlns:p="http://schemas.openxmlformats.org/presentationml/2006/main">
   <p:cSld>
-    <p:bg>
-      <p:bgPr>
-        <a:gradFill>
-          <a:gsLst>
-            <a:gs pos="100000">
-              <a:srgbClr val="7030A0"/>
-            </a:gs>
-            <a:gs pos="0">
-              <a:schemeClr val="tx2">
-                <a:lumMod val="60000"/>
-                <a:lumOff val="40000"/>
-              </a:schemeClr>
-            </a:gs>
-          </a:gsLst>
-          <a:lin ang="5400000" scaled="1"/>
-        </a:gradFill>
-        <a:effectLst/>
-      </p:bgPr>
-    </p:bg>
     <p:spTree>
       <p:nvGrpSpPr>
         <p:cNvPr id="1" name=""/>
@@ -3597,7 +4466,13 @@
       </p:grpSpPr>
       <p:sp>
         <p:nvSpPr>
-          <p:cNvPr id="2" name="Title 1"/>
+          <p:cNvPr id="2" name="Cím 1">
+            <a:extLst>
+              <a:ext uri="{FF2B5EF4-FFF2-40B4-BE49-F238E27FC236}">
+                <a16:creationId xmlns:a16="http://schemas.microsoft.com/office/drawing/2014/main" id="{4BE961EC-8017-998C-46F8-9944DE5E96D6}"/>
+              </a:ext>
+            </a:extLst>
+          </p:cNvPr>
           <p:cNvSpPr>
             <a:spLocks noGrp="1"/>
           </p:cNvSpPr>
@@ -3610,14 +4485,8 @@
           <a:bodyPr/>
           <a:lstStyle/>
           <a:p>
-            <a:pPr>
-              <a:defRPr sz="3400" b="1">
-                <a:solidFill>
-                  <a:srgbClr val="5846B4"/>
-                </a:solidFill>
-              </a:defRPr>
-            </a:pPr>
-            <a:r>
+            <a:r>
+              <a:rPr lang="hu-HU" dirty="0"/>
               <a:t>Az alkalmazás alapötlete</a:t>
             </a:r>
           </a:p>
@@ -3625,7 +4494,13 @@
       </p:sp>
       <p:sp>
         <p:nvSpPr>
-          <p:cNvPr id="3" name="Content Placeholder 2"/>
+          <p:cNvPr id="3" name="Tartalom helye 2">
+            <a:extLst>
+              <a:ext uri="{FF2B5EF4-FFF2-40B4-BE49-F238E27FC236}">
+                <a16:creationId xmlns:a16="http://schemas.microsoft.com/office/drawing/2014/main" id="{9B77F60A-AFD5-0EE5-BE24-D9DAF1F90231}"/>
+              </a:ext>
+            </a:extLst>
+          </p:cNvPr>
           <p:cNvSpPr>
             <a:spLocks noGrp="1"/>
           </p:cNvSpPr>
@@ -3638,93 +4513,53 @@
           <a:bodyPr/>
           <a:lstStyle/>
           <a:p>
-            <a:pPr>
-              <a:defRPr sz="1800">
-                <a:solidFill>
-                  <a:srgbClr val="3C3C5A"/>
-                </a:solidFill>
-              </a:defRPr>
-            </a:pPr>
-            <a:r>
-              <a:rPr lang="hu-HU" dirty="0" smtClean="0"/>
+            <a:r>
+              <a:rPr lang="hu-HU" dirty="0"/>
               <a:t>Ételek rögzítése</a:t>
             </a:r>
-            <a:endParaRPr dirty="0"/>
-          </a:p>
-          <a:p>
-            <a:pPr lvl="1">
-              <a:defRPr sz="1800">
-                <a:solidFill>
-                  <a:srgbClr val="3C3C5A"/>
-                </a:solidFill>
-              </a:defRPr>
-            </a:pPr>
-            <a:r>
-              <a:rPr lang="hu-HU" dirty="0"/>
-              <a:t>Felhasználó kiválasztja az elfogyasztott ételt</a:t>
-            </a:r>
-          </a:p>
-          <a:p>
-            <a:pPr lvl="1">
-              <a:defRPr sz="1800">
-                <a:solidFill>
-                  <a:srgbClr val="3C3C5A"/>
-                </a:solidFill>
-              </a:defRPr>
-            </a:pPr>
+          </a:p>
+          <a:p>
+            <a:pPr lvl="1"/>
+            <a:r>
+              <a:rPr lang="hu-HU" dirty="0"/>
+              <a:t>A felhasználó kiválasztja az elfogyasztott ételt</a:t>
+            </a:r>
+          </a:p>
+          <a:p>
+            <a:pPr lvl="1"/>
             <a:r>
               <a:rPr lang="hu-HU" dirty="0"/>
               <a:t>Az alkalmazás eltárolja az adatokat</a:t>
             </a:r>
           </a:p>
           <a:p>
-            <a:pPr>
-              <a:defRPr sz="1800">
-                <a:solidFill>
-                  <a:srgbClr val="3C3C5A"/>
-                </a:solidFill>
-              </a:defRPr>
-            </a:pPr>
-            <a:r>
-              <a:rPr lang="hu-HU" dirty="0"/>
-              <a:t>Kalóriaérték megjelenítése</a:t>
-            </a:r>
-          </a:p>
-          <a:p>
-            <a:pPr lvl="1">
-              <a:defRPr sz="1800">
-                <a:solidFill>
-                  <a:srgbClr val="3C3C5A"/>
-                </a:solidFill>
-              </a:defRPr>
-            </a:pPr>
-            <a:r>
-              <a:rPr lang="hu-HU" dirty="0"/>
-              <a:t>Minden ételhez tartozik egy kalóriaérték és </a:t>
-            </a:r>
-            <a:r>
-              <a:rPr lang="hu-HU" dirty="0" smtClean="0"/>
-              <a:t>makrók</a:t>
-            </a:r>
-            <a:endParaRPr lang="hu-HU" dirty="0"/>
-          </a:p>
-          <a:p>
-            <a:pPr lvl="1">
-              <a:defRPr sz="1800">
-                <a:solidFill>
-                  <a:srgbClr val="3C3C5A"/>
-                </a:solidFill>
-              </a:defRPr>
-            </a:pPr>
+            <a:r>
+              <a:rPr lang="hu-HU" dirty="0"/>
+              <a:t>Kalóriák megjelenítése</a:t>
+            </a:r>
+          </a:p>
+          <a:p>
+            <a:pPr lvl="1"/>
+            <a:r>
+              <a:rPr lang="hu-HU" dirty="0"/>
+              <a:t>Minden ételhez tartoznak kalóriaértékek és makrók</a:t>
+            </a:r>
+          </a:p>
+          <a:p>
+            <a:pPr lvl="1"/>
             <a:r>
               <a:rPr lang="hu-HU" dirty="0"/>
               <a:t>Ez segíti az átláthatóságot</a:t>
             </a:r>
-            <a:endParaRPr lang="hu-HU" dirty="0"/>
           </a:p>
         </p:txBody>
       </p:sp>
     </p:spTree>
+    <p:extLst>
+      <p:ext uri="{BB962C8B-B14F-4D97-AF65-F5344CB8AC3E}">
+        <p14:creationId xmlns:p14="http://schemas.microsoft.com/office/powerpoint/2010/main" val="1538580907"/>
+      </p:ext>
+    </p:extLst>
   </p:cSld>
   <p:clrMapOvr>
     <a:masterClrMapping/>
@@ -3735,25 +4570,6 @@
 <file path=ppt/slides/slide4.xml><?xml version="1.0" encoding="utf-8"?>
 <p:sld xmlns:a="http://schemas.openxmlformats.org/drawingml/2006/main" xmlns:r="http://schemas.openxmlformats.org/officeDocument/2006/relationships" xmlns:p="http://schemas.openxmlformats.org/presentationml/2006/main">
   <p:cSld>
-    <p:bg>
-      <p:bgPr>
-        <a:gradFill>
-          <a:gsLst>
-            <a:gs pos="100000">
-              <a:srgbClr val="7030A0"/>
-            </a:gs>
-            <a:gs pos="0">
-              <a:schemeClr val="tx2">
-                <a:lumMod val="60000"/>
-                <a:lumOff val="40000"/>
-              </a:schemeClr>
-            </a:gs>
-          </a:gsLst>
-          <a:lin ang="5400000" scaled="1"/>
-        </a:gradFill>
-        <a:effectLst/>
-      </p:bgPr>
-    </p:bg>
     <p:spTree>
       <p:nvGrpSpPr>
         <p:cNvPr id="1" name=""/>
@@ -3770,7 +4586,13 @@
       </p:grpSpPr>
       <p:sp>
         <p:nvSpPr>
-          <p:cNvPr id="2" name="Title 1"/>
+          <p:cNvPr id="2" name="Cím 1">
+            <a:extLst>
+              <a:ext uri="{FF2B5EF4-FFF2-40B4-BE49-F238E27FC236}">
+                <a16:creationId xmlns:a16="http://schemas.microsoft.com/office/drawing/2014/main" id="{68DD516F-08FE-7F61-135A-BDA196F554CA}"/>
+              </a:ext>
+            </a:extLst>
+          </p:cNvPr>
           <p:cNvSpPr>
             <a:spLocks noGrp="1"/>
           </p:cNvSpPr>
@@ -3783,22 +4605,22 @@
           <a:bodyPr/>
           <a:lstStyle/>
           <a:p>
-            <a:pPr>
-              <a:defRPr sz="3400" b="1">
-                <a:solidFill>
-                  <a:srgbClr val="5846B4"/>
-                </a:solidFill>
-              </a:defRPr>
-            </a:pPr>
-            <a:r>
-              <a:t>Projekt jelenlegi állapota</a:t>
-            </a:r>
-          </a:p>
-        </p:txBody>
-      </p:sp>
-      <p:sp>
-        <p:nvSpPr>
-          <p:cNvPr id="3" name="Content Placeholder 2"/>
+            <a:r>
+              <a:rPr lang="hu-HU" dirty="0"/>
+              <a:t>Project jelenlegi állapota</a:t>
+            </a:r>
+          </a:p>
+        </p:txBody>
+      </p:sp>
+      <p:sp>
+        <p:nvSpPr>
+          <p:cNvPr id="3" name="Tartalom helye 2">
+            <a:extLst>
+              <a:ext uri="{FF2B5EF4-FFF2-40B4-BE49-F238E27FC236}">
+                <a16:creationId xmlns:a16="http://schemas.microsoft.com/office/drawing/2014/main" id="{F6F8927B-123F-0466-980B-E07898C95710}"/>
+              </a:ext>
+            </a:extLst>
+          </p:cNvPr>
           <p:cNvSpPr>
             <a:spLocks noGrp="1"/>
           </p:cNvSpPr>
@@ -3811,78 +4633,40 @@
           <a:bodyPr/>
           <a:lstStyle/>
           <a:p>
-            <a:pPr>
-              <a:defRPr sz="1800">
-                <a:solidFill>
-                  <a:srgbClr val="3C3C5A"/>
-                </a:solidFill>
-              </a:defRPr>
-            </a:pPr>
             <a:r>
               <a:rPr lang="hu-HU" dirty="0"/>
               <a:t>Backend elkészült</a:t>
             </a:r>
           </a:p>
           <a:p>
-            <a:pPr lvl="1">
-              <a:defRPr sz="1800">
-                <a:solidFill>
-                  <a:srgbClr val="3C3C5A"/>
-                </a:solidFill>
-              </a:defRPr>
-            </a:pPr>
+            <a:pPr lvl="1"/>
             <a:r>
               <a:rPr lang="hu-HU" dirty="0"/>
               <a:t>Adatkezelés és üzleti logika működik</a:t>
             </a:r>
           </a:p>
           <a:p>
-            <a:pPr lvl="1">
-              <a:defRPr sz="1800">
-                <a:solidFill>
-                  <a:srgbClr val="3C3C5A"/>
-                </a:solidFill>
-              </a:defRPr>
-            </a:pPr>
-            <a:r>
-              <a:rPr lang="hu-HU" dirty="0"/>
-              <a:t>Adatbázis terve kész van</a:t>
-            </a:r>
-          </a:p>
-          <a:p>
-            <a:pPr>
-              <a:defRPr sz="1800">
-                <a:solidFill>
-                  <a:srgbClr val="3C3C5A"/>
-                </a:solidFill>
-              </a:defRPr>
-            </a:pPr>
+            <a:pPr lvl="1"/>
+            <a:r>
+              <a:rPr lang="hu-HU" dirty="0"/>
+              <a:t>Adatbázis terve készen van</a:t>
+            </a:r>
+          </a:p>
+          <a:p>
             <a:r>
               <a:rPr lang="hu-HU" dirty="0"/>
               <a:t>Frontend fejlesztés később</a:t>
             </a:r>
           </a:p>
           <a:p>
-            <a:pPr lvl="1">
-              <a:defRPr sz="1800">
-                <a:solidFill>
-                  <a:srgbClr val="3C3C5A"/>
-                </a:solidFill>
-              </a:defRPr>
-            </a:pPr>
+            <a:pPr lvl="1"/>
             <a:r>
               <a:rPr lang="hu-HU" dirty="0"/>
               <a:t>Jelenleg nincs grafikus felület</a:t>
             </a:r>
           </a:p>
           <a:p>
-            <a:pPr lvl="1">
-              <a:defRPr sz="1800">
-                <a:solidFill>
-                  <a:srgbClr val="3C3C5A"/>
-                </a:solidFill>
-              </a:defRPr>
-            </a:pPr>
+            <a:pPr lvl="1"/>
             <a:r>
               <a:rPr lang="hu-HU" dirty="0" err="1"/>
               <a:t>React</a:t>
@@ -3891,11 +4675,15 @@
               <a:rPr lang="hu-HU" dirty="0"/>
               <a:t> alapú megoldás van tervben</a:t>
             </a:r>
-            <a:endParaRPr lang="hu-HU" dirty="0"/>
           </a:p>
         </p:txBody>
       </p:sp>
     </p:spTree>
+    <p:extLst>
+      <p:ext uri="{BB962C8B-B14F-4D97-AF65-F5344CB8AC3E}">
+        <p14:creationId xmlns:p14="http://schemas.microsoft.com/office/powerpoint/2010/main" val="2045448722"/>
+      </p:ext>
+    </p:extLst>
   </p:cSld>
   <p:clrMapOvr>
     <a:masterClrMapping/>
@@ -3906,25 +4694,6 @@
 <file path=ppt/slides/slide5.xml><?xml version="1.0" encoding="utf-8"?>
 <p:sld xmlns:a="http://schemas.openxmlformats.org/drawingml/2006/main" xmlns:r="http://schemas.openxmlformats.org/officeDocument/2006/relationships" xmlns:p="http://schemas.openxmlformats.org/presentationml/2006/main">
   <p:cSld>
-    <p:bg>
-      <p:bgPr>
-        <a:gradFill>
-          <a:gsLst>
-            <a:gs pos="100000">
-              <a:srgbClr val="7030A0"/>
-            </a:gs>
-            <a:gs pos="0">
-              <a:schemeClr val="tx2">
-                <a:lumMod val="60000"/>
-                <a:lumOff val="40000"/>
-              </a:schemeClr>
-            </a:gs>
-          </a:gsLst>
-          <a:lin ang="5400000" scaled="1"/>
-        </a:gradFill>
-        <a:effectLst/>
-      </p:bgPr>
-    </p:bg>
     <p:spTree>
       <p:nvGrpSpPr>
         <p:cNvPr id="1" name=""/>
@@ -3941,7 +4710,13 @@
       </p:grpSpPr>
       <p:sp>
         <p:nvSpPr>
-          <p:cNvPr id="2" name="Title 1"/>
+          <p:cNvPr id="2" name="Cím 1">
+            <a:extLst>
+              <a:ext uri="{FF2B5EF4-FFF2-40B4-BE49-F238E27FC236}">
+                <a16:creationId xmlns:a16="http://schemas.microsoft.com/office/drawing/2014/main" id="{92427A85-C304-E1B9-93E2-7316E2C17A61}"/>
+              </a:ext>
+            </a:extLst>
+          </p:cNvPr>
           <p:cNvSpPr>
             <a:spLocks noGrp="1"/>
           </p:cNvSpPr>
@@ -3954,14 +4729,8 @@
           <a:bodyPr/>
           <a:lstStyle/>
           <a:p>
-            <a:pPr>
-              <a:defRPr sz="3400" b="1">
-                <a:solidFill>
-                  <a:srgbClr val="5846B4"/>
-                </a:solidFill>
-              </a:defRPr>
-            </a:pPr>
-            <a:r>
+            <a:r>
+              <a:rPr lang="hu-HU" dirty="0"/>
               <a:t>Felhasznált technológiák</a:t>
             </a:r>
           </a:p>
@@ -3969,7 +4738,13 @@
       </p:sp>
       <p:sp>
         <p:nvSpPr>
-          <p:cNvPr id="3" name="Content Placeholder 2"/>
+          <p:cNvPr id="3" name="Tartalom helye 2">
+            <a:extLst>
+              <a:ext uri="{FF2B5EF4-FFF2-40B4-BE49-F238E27FC236}">
+                <a16:creationId xmlns:a16="http://schemas.microsoft.com/office/drawing/2014/main" id="{DB039760-E194-4BD5-A1E4-CCF67A371FD6}"/>
+              </a:ext>
+            </a:extLst>
+          </p:cNvPr>
           <p:cNvSpPr>
             <a:spLocks noGrp="1"/>
           </p:cNvSpPr>
@@ -3982,39 +4757,20 @@
           <a:bodyPr/>
           <a:lstStyle/>
           <a:p>
-            <a:pPr>
-              <a:defRPr sz="1800">
-                <a:solidFill>
-                  <a:srgbClr val="3C3C5A"/>
-                </a:solidFill>
-              </a:defRPr>
-            </a:pPr>
             <a:r>
               <a:rPr lang="hu-HU" dirty="0"/>
               <a:t>Backend technológiák</a:t>
             </a:r>
           </a:p>
           <a:p>
-            <a:pPr lvl="1">
-              <a:defRPr sz="1800">
-                <a:solidFill>
-                  <a:srgbClr val="3C3C5A"/>
-                </a:solidFill>
-              </a:defRPr>
-            </a:pPr>
+            <a:pPr lvl="1"/>
             <a:r>
               <a:rPr lang="hu-HU" dirty="0"/>
               <a:t>C# a szerveroldali logikához</a:t>
             </a:r>
           </a:p>
           <a:p>
-            <a:pPr lvl="1">
-              <a:defRPr sz="1800">
-                <a:solidFill>
-                  <a:srgbClr val="3C3C5A"/>
-                </a:solidFill>
-              </a:defRPr>
-            </a:pPr>
+            <a:pPr lvl="1"/>
             <a:r>
               <a:rPr lang="hu-HU" dirty="0" err="1"/>
               <a:t>Laravel</a:t>
@@ -4025,52 +4781,41 @@
             </a:r>
           </a:p>
           <a:p>
-            <a:pPr>
-              <a:defRPr sz="1800">
-                <a:solidFill>
-                  <a:srgbClr val="3C3C5A"/>
-                </a:solidFill>
-              </a:defRPr>
-            </a:pPr>
             <a:r>
               <a:rPr lang="hu-HU" dirty="0"/>
               <a:t>Frontend technológiák</a:t>
             </a:r>
           </a:p>
           <a:p>
-            <a:pPr lvl="1">
-              <a:defRPr sz="1800">
-                <a:solidFill>
-                  <a:srgbClr val="3C3C5A"/>
-                </a:solidFill>
-              </a:defRPr>
-            </a:pPr>
-            <a:r>
-              <a:rPr lang="hu-HU" dirty="0"/>
-              <a:t>JavaScript az API kommunikációhoz</a:t>
-            </a:r>
-          </a:p>
-          <a:p>
-            <a:pPr lvl="1">
-              <a:defRPr sz="1800">
-                <a:solidFill>
-                  <a:srgbClr val="3C3C5A"/>
-                </a:solidFill>
-              </a:defRPr>
-            </a:pPr>
+            <a:pPr lvl="1"/>
+            <a:r>
+              <a:rPr lang="hu-HU" dirty="0" err="1"/>
+              <a:t>Javascript</a:t>
+            </a:r>
+            <a:r>
+              <a:rPr lang="hu-HU" dirty="0"/>
+              <a:t> az API kommunikációhoz</a:t>
+            </a:r>
+          </a:p>
+          <a:p>
+            <a:pPr lvl="1"/>
             <a:r>
               <a:rPr lang="hu-HU" dirty="0" err="1"/>
               <a:t>React</a:t>
             </a:r>
             <a:r>
               <a:rPr lang="hu-HU" dirty="0"/>
-              <a:t> a későbbi felülethez</a:t>
-            </a:r>
-            <a:endParaRPr lang="hu-HU" dirty="0"/>
+              <a:t> a későbbi felületekhez</a:t>
+            </a:r>
           </a:p>
         </p:txBody>
       </p:sp>
     </p:spTree>
+    <p:extLst>
+      <p:ext uri="{BB962C8B-B14F-4D97-AF65-F5344CB8AC3E}">
+        <p14:creationId xmlns:p14="http://schemas.microsoft.com/office/powerpoint/2010/main" val="1737735821"/>
+      </p:ext>
+    </p:extLst>
   </p:cSld>
   <p:clrMapOvr>
     <a:masterClrMapping/>
@@ -4081,25 +4826,6 @@
 <file path=ppt/slides/slide6.xml><?xml version="1.0" encoding="utf-8"?>
 <p:sld xmlns:a="http://schemas.openxmlformats.org/drawingml/2006/main" xmlns:r="http://schemas.openxmlformats.org/officeDocument/2006/relationships" xmlns:p="http://schemas.openxmlformats.org/presentationml/2006/main">
   <p:cSld>
-    <p:bg>
-      <p:bgPr>
-        <a:gradFill>
-          <a:gsLst>
-            <a:gs pos="100000">
-              <a:srgbClr val="7030A0"/>
-            </a:gs>
-            <a:gs pos="0">
-              <a:schemeClr val="tx2">
-                <a:lumMod val="60000"/>
-                <a:lumOff val="40000"/>
-              </a:schemeClr>
-            </a:gs>
-          </a:gsLst>
-          <a:lin ang="5400000" scaled="1"/>
-        </a:gradFill>
-        <a:effectLst/>
-      </p:bgPr>
-    </p:bg>
     <p:spTree>
       <p:nvGrpSpPr>
         <p:cNvPr id="1" name=""/>
@@ -4116,7 +4842,13 @@
       </p:grpSpPr>
       <p:sp>
         <p:nvSpPr>
-          <p:cNvPr id="2" name="Title 1"/>
+          <p:cNvPr id="2" name="Cím 1">
+            <a:extLst>
+              <a:ext uri="{FF2B5EF4-FFF2-40B4-BE49-F238E27FC236}">
+                <a16:creationId xmlns:a16="http://schemas.microsoft.com/office/drawing/2014/main" id="{92483872-8CB4-DA88-FDB4-B3AD12B091E4}"/>
+              </a:ext>
+            </a:extLst>
+          </p:cNvPr>
           <p:cNvSpPr>
             <a:spLocks noGrp="1"/>
           </p:cNvSpPr>
@@ -4129,14 +4861,8 @@
           <a:bodyPr/>
           <a:lstStyle/>
           <a:p>
-            <a:pPr>
-              <a:defRPr sz="3400" b="1">
-                <a:solidFill>
-                  <a:srgbClr val="5846B4"/>
-                </a:solidFill>
-              </a:defRPr>
-            </a:pPr>
-            <a:r>
+            <a:r>
+              <a:rPr lang="hu-HU" dirty="0"/>
               <a:t>Backend fő funkciói</a:t>
             </a:r>
           </a:p>
@@ -4144,7 +4870,13 @@
       </p:sp>
       <p:sp>
         <p:nvSpPr>
-          <p:cNvPr id="3" name="Content Placeholder 2"/>
+          <p:cNvPr id="3" name="Tartalom helye 2">
+            <a:extLst>
+              <a:ext uri="{FF2B5EF4-FFF2-40B4-BE49-F238E27FC236}">
+                <a16:creationId xmlns:a16="http://schemas.microsoft.com/office/drawing/2014/main" id="{E12E3993-EA07-AE1A-0150-D0C5D73CC5F4}"/>
+              </a:ext>
+            </a:extLst>
+          </p:cNvPr>
           <p:cNvSpPr>
             <a:spLocks noGrp="1"/>
           </p:cNvSpPr>
@@ -4157,125 +4889,63 @@
           <a:bodyPr/>
           <a:lstStyle/>
           <a:p>
-            <a:pPr>
-              <a:defRPr sz="1800">
-                <a:solidFill>
-                  <a:srgbClr val="3C3C5A"/>
-                </a:solidFill>
-              </a:defRPr>
-            </a:pPr>
             <a:r>
               <a:rPr lang="hu-HU" dirty="0"/>
               <a:t>Felhasználók kezelése</a:t>
             </a:r>
           </a:p>
           <a:p>
-            <a:pPr lvl="1">
-              <a:defRPr sz="1800">
-                <a:solidFill>
-                  <a:srgbClr val="3C3C5A"/>
-                </a:solidFill>
-              </a:defRPr>
-            </a:pPr>
+            <a:pPr lvl="1"/>
             <a:r>
               <a:rPr lang="hu-HU" dirty="0"/>
               <a:t>Regisztráció és adatok tárolása</a:t>
             </a:r>
           </a:p>
           <a:p>
-            <a:pPr lvl="1">
-              <a:defRPr sz="1800">
-                <a:solidFill>
-                  <a:srgbClr val="3C3C5A"/>
-                </a:solidFill>
-              </a:defRPr>
-            </a:pPr>
+            <a:pPr lvl="1"/>
             <a:r>
               <a:rPr lang="hu-HU" dirty="0"/>
               <a:t>Felhasználóhoz kötött adatok kezelése/tárolása</a:t>
             </a:r>
           </a:p>
           <a:p>
-            <a:pPr>
-              <a:defRPr sz="1800">
-                <a:solidFill>
-                  <a:srgbClr val="3C3C5A"/>
-                </a:solidFill>
-              </a:defRPr>
-            </a:pPr>
             <a:r>
               <a:rPr lang="hu-HU" dirty="0"/>
               <a:t>Kalóriaadatok kezelése</a:t>
             </a:r>
           </a:p>
           <a:p>
-            <a:pPr lvl="1">
-              <a:defRPr sz="1800">
-                <a:solidFill>
-                  <a:srgbClr val="3C3C5A"/>
-                </a:solidFill>
-              </a:defRPr>
-            </a:pPr>
+            <a:pPr lvl="1"/>
             <a:r>
               <a:rPr lang="hu-HU" dirty="0"/>
               <a:t>Ételek és kalóriák rögzítése</a:t>
             </a:r>
           </a:p>
           <a:p>
-            <a:pPr lvl="1">
-              <a:defRPr sz="1800">
-                <a:solidFill>
-                  <a:srgbClr val="3C3C5A"/>
-                </a:solidFill>
-              </a:defRPr>
-            </a:pPr>
-            <a:r>
-              <a:rPr lang="hu-HU" dirty="0"/>
-              <a:t>Napi összesített </a:t>
-            </a:r>
-            <a:r>
-              <a:rPr lang="hu-HU" dirty="0" smtClean="0"/>
-              <a:t>kalóriaérték számítása</a:t>
-            </a:r>
-          </a:p>
-          <a:p>
-            <a:pPr lvl="1">
-              <a:defRPr sz="1800">
-                <a:solidFill>
-                  <a:srgbClr val="3C3C5A"/>
-                </a:solidFill>
-              </a:defRPr>
-            </a:pPr>
-            <a:r>
-              <a:rPr lang="hu-HU" dirty="0" smtClean="0"/>
+            <a:pPr lvl="1"/>
+            <a:r>
+              <a:rPr lang="hu-HU" dirty="0"/>
+              <a:t>Napi összesített kalóriaérték számítása</a:t>
+            </a:r>
+          </a:p>
+          <a:p>
+            <a:pPr lvl="1"/>
+            <a:r>
+              <a:rPr lang="hu-HU" dirty="0"/>
               <a:t>Mozgás rögzítése és kalória leszámolása</a:t>
             </a:r>
           </a:p>
           <a:p>
-            <a:pPr marL="3657600" lvl="8" indent="0">
-              <a:buNone/>
-              <a:defRPr sz="1800">
-                <a:solidFill>
-                  <a:srgbClr val="3C3C5A"/>
-                </a:solidFill>
-              </a:defRPr>
-            </a:pPr>
-            <a:endParaRPr lang="hu-HU" dirty="0" smtClean="0"/>
-          </a:p>
-          <a:p>
-            <a:pPr marL="457200" lvl="1" indent="0">
-              <a:buNone/>
-              <a:defRPr sz="1800">
-                <a:solidFill>
-                  <a:srgbClr val="3C3C5A"/>
-                </a:solidFill>
-              </a:defRPr>
-            </a:pPr>
             <a:endParaRPr lang="hu-HU" dirty="0"/>
           </a:p>
         </p:txBody>
       </p:sp>
     </p:spTree>
+    <p:extLst>
+      <p:ext uri="{BB962C8B-B14F-4D97-AF65-F5344CB8AC3E}">
+        <p14:creationId xmlns:p14="http://schemas.microsoft.com/office/powerpoint/2010/main" val="1320163887"/>
+      </p:ext>
+    </p:extLst>
   </p:cSld>
   <p:clrMapOvr>
     <a:masterClrMapping/>
@@ -4286,25 +4956,6 @@
 <file path=ppt/slides/slide7.xml><?xml version="1.0" encoding="utf-8"?>
 <p:sld xmlns:a="http://schemas.openxmlformats.org/drawingml/2006/main" xmlns:r="http://schemas.openxmlformats.org/officeDocument/2006/relationships" xmlns:p="http://schemas.openxmlformats.org/presentationml/2006/main">
   <p:cSld>
-    <p:bg>
-      <p:bgPr>
-        <a:gradFill>
-          <a:gsLst>
-            <a:gs pos="100000">
-              <a:srgbClr val="7030A0"/>
-            </a:gs>
-            <a:gs pos="0">
-              <a:schemeClr val="tx2">
-                <a:lumMod val="60000"/>
-                <a:lumOff val="40000"/>
-              </a:schemeClr>
-            </a:gs>
-          </a:gsLst>
-          <a:lin ang="5400000" scaled="1"/>
-        </a:gradFill>
-        <a:effectLst/>
-      </p:bgPr>
-    </p:bg>
     <p:spTree>
       <p:nvGrpSpPr>
         <p:cNvPr id="1" name=""/>
@@ -4321,7 +4972,13 @@
       </p:grpSpPr>
       <p:sp>
         <p:nvSpPr>
-          <p:cNvPr id="2" name="Title 1"/>
+          <p:cNvPr id="2" name="Cím 1">
+            <a:extLst>
+              <a:ext uri="{FF2B5EF4-FFF2-40B4-BE49-F238E27FC236}">
+                <a16:creationId xmlns:a16="http://schemas.microsoft.com/office/drawing/2014/main" id="{A14A1CFE-0782-9172-C3BD-675541059787}"/>
+              </a:ext>
+            </a:extLst>
+          </p:cNvPr>
           <p:cNvSpPr>
             <a:spLocks noGrp="1"/>
           </p:cNvSpPr>
@@ -4334,14 +4991,8 @@
           <a:bodyPr/>
           <a:lstStyle/>
           <a:p>
-            <a:pPr>
-              <a:defRPr sz="3400" b="1">
-                <a:solidFill>
-                  <a:srgbClr val="5846B4"/>
-                </a:solidFill>
-              </a:defRPr>
-            </a:pPr>
-            <a:r>
+            <a:r>
+              <a:rPr lang="hu-HU" dirty="0"/>
               <a:t>Adatbázis felépítése</a:t>
             </a:r>
           </a:p>
@@ -4349,7 +5000,13 @@
       </p:sp>
       <p:sp>
         <p:nvSpPr>
-          <p:cNvPr id="3" name="Content Placeholder 2"/>
+          <p:cNvPr id="3" name="Tartalom helye 2">
+            <a:extLst>
+              <a:ext uri="{FF2B5EF4-FFF2-40B4-BE49-F238E27FC236}">
+                <a16:creationId xmlns:a16="http://schemas.microsoft.com/office/drawing/2014/main" id="{B5598A2C-A1E5-D17C-3D85-1854F517168E}"/>
+              </a:ext>
+            </a:extLst>
+          </p:cNvPr>
           <p:cNvSpPr>
             <a:spLocks noGrp="1"/>
           </p:cNvSpPr>
@@ -4362,90 +5019,49 @@
           <a:bodyPr/>
           <a:lstStyle/>
           <a:p>
-            <a:pPr>
-              <a:defRPr sz="1800">
-                <a:solidFill>
-                  <a:srgbClr val="3C3C5A"/>
-                </a:solidFill>
-              </a:defRPr>
-            </a:pPr>
             <a:r>
               <a:rPr lang="hu-HU" dirty="0"/>
               <a:t>Relációs adatbázis</a:t>
             </a:r>
           </a:p>
           <a:p>
-            <a:pPr lvl="1">
-              <a:defRPr sz="1800">
-                <a:solidFill>
-                  <a:srgbClr val="3C3C5A"/>
-                </a:solidFill>
-              </a:defRPr>
-            </a:pPr>
             <a:r>
               <a:rPr lang="hu-HU" dirty="0"/>
               <a:t>Táblák közötti kapcsolatok használata</a:t>
             </a:r>
           </a:p>
           <a:p>
-            <a:pPr lvl="1">
-              <a:defRPr sz="1800">
-                <a:solidFill>
-                  <a:srgbClr val="3C3C5A"/>
-                </a:solidFill>
-              </a:defRPr>
-            </a:pPr>
             <a:r>
               <a:rPr lang="hu-HU" dirty="0"/>
               <a:t>Hatékony adatkezelés biztosítása</a:t>
             </a:r>
           </a:p>
           <a:p>
-            <a:pPr>
-              <a:defRPr sz="1800">
-                <a:solidFill>
-                  <a:srgbClr val="3C3C5A"/>
-                </a:solidFill>
-              </a:defRPr>
-            </a:pPr>
             <a:r>
               <a:rPr lang="hu-HU" dirty="0"/>
               <a:t>Normalizált szerkezet</a:t>
             </a:r>
           </a:p>
           <a:p>
-            <a:pPr lvl="1">
-              <a:defRPr sz="1800">
-                <a:solidFill>
-                  <a:srgbClr val="3C3C5A"/>
-                </a:solidFill>
-              </a:defRPr>
-            </a:pPr>
             <a:r>
               <a:rPr lang="hu-HU" dirty="0"/>
               <a:t>Adatismétlés minimalizálása</a:t>
             </a:r>
           </a:p>
           <a:p>
-            <a:pPr lvl="1">
-              <a:defRPr sz="1800">
-                <a:solidFill>
-                  <a:srgbClr val="3C3C5A"/>
-                </a:solidFill>
-              </a:defRPr>
-            </a:pPr>
-            <a:r>
-              <a:rPr lang="hu-HU" dirty="0"/>
-              <a:t>Átlátható </a:t>
-            </a:r>
-            <a:r>
-              <a:rPr lang="hu-HU" dirty="0" smtClean="0"/>
-              <a:t>struktúra</a:t>
+            <a:r>
+              <a:rPr lang="hu-HU" dirty="0"/>
+              <a:t>Átlátható struktúra</a:t>
             </a:r>
           </a:p>
         </p:txBody>
       </p:sp>
     </p:spTree>
+    <p:extLst>
+      <p:ext uri="{BB962C8B-B14F-4D97-AF65-F5344CB8AC3E}">
+        <p14:creationId xmlns:p14="http://schemas.microsoft.com/office/powerpoint/2010/main" val="1103649377"/>
+      </p:ext>
+    </p:extLst>
   </p:cSld>
   <p:clrMapOvr>
     <a:masterClrMapping/>
@@ -4456,25 +5072,6 @@
 <file path=ppt/slides/slide8.xml><?xml version="1.0" encoding="utf-8"?>
 <p:sld xmlns:a="http://schemas.openxmlformats.org/drawingml/2006/main" xmlns:r="http://schemas.openxmlformats.org/officeDocument/2006/relationships" xmlns:p="http://schemas.openxmlformats.org/presentationml/2006/main">
   <p:cSld>
-    <p:bg>
-      <p:bgPr>
-        <a:gradFill>
-          <a:gsLst>
-            <a:gs pos="100000">
-              <a:srgbClr val="7030A0"/>
-            </a:gs>
-            <a:gs pos="0">
-              <a:schemeClr val="tx2">
-                <a:lumMod val="60000"/>
-                <a:lumOff val="40000"/>
-              </a:schemeClr>
-            </a:gs>
-          </a:gsLst>
-          <a:lin ang="5400000" scaled="1"/>
-        </a:gradFill>
-        <a:effectLst/>
-      </p:bgPr>
-    </p:bg>
     <p:spTree>
       <p:nvGrpSpPr>
         <p:cNvPr id="1" name=""/>
@@ -4491,7 +5088,13 @@
       </p:grpSpPr>
       <p:sp>
         <p:nvSpPr>
-          <p:cNvPr id="2" name="Title 1"/>
+          <p:cNvPr id="2" name="Cím 1">
+            <a:extLst>
+              <a:ext uri="{FF2B5EF4-FFF2-40B4-BE49-F238E27FC236}">
+                <a16:creationId xmlns:a16="http://schemas.microsoft.com/office/drawing/2014/main" id="{3C7785E4-8CB0-BA4F-0D82-2B28E861F832}"/>
+              </a:ext>
+            </a:extLst>
+          </p:cNvPr>
           <p:cNvSpPr>
             <a:spLocks noGrp="1"/>
           </p:cNvSpPr>
@@ -4504,14 +5107,8 @@
           <a:bodyPr/>
           <a:lstStyle/>
           <a:p>
-            <a:pPr>
-              <a:defRPr sz="3400" b="1">
-                <a:solidFill>
-                  <a:srgbClr val="5846B4"/>
-                </a:solidFill>
-              </a:defRPr>
-            </a:pPr>
-            <a:r>
+            <a:r>
+              <a:rPr lang="hu-HU" dirty="0"/>
               <a:t>Adatbázis táblák</a:t>
             </a:r>
           </a:p>
@@ -4519,7 +5116,13 @@
       </p:sp>
       <p:sp>
         <p:nvSpPr>
-          <p:cNvPr id="3" name="Content Placeholder 2"/>
+          <p:cNvPr id="3" name="Tartalom helye 2">
+            <a:extLst>
+              <a:ext uri="{FF2B5EF4-FFF2-40B4-BE49-F238E27FC236}">
+                <a16:creationId xmlns:a16="http://schemas.microsoft.com/office/drawing/2014/main" id="{1EE1E40E-5BE1-B6FD-1095-9B02F3018B8E}"/>
+              </a:ext>
+            </a:extLst>
+          </p:cNvPr>
           <p:cNvSpPr>
             <a:spLocks noGrp="1"/>
           </p:cNvSpPr>
@@ -4529,182 +5132,99 @@
         </p:nvSpPr>
         <p:spPr/>
         <p:txBody>
-          <a:bodyPr/>
-          <a:lstStyle/>
-          <a:p>
-            <a:pPr>
-              <a:defRPr sz="1800">
-                <a:solidFill>
-                  <a:srgbClr val="3C3C5A"/>
-                </a:solidFill>
-              </a:defRPr>
-            </a:pPr>
+          <a:bodyPr>
+            <a:normAutofit/>
+          </a:bodyPr>
+          <a:lstStyle/>
+          <a:p>
             <a:r>
               <a:rPr lang="hu-HU" dirty="0"/>
               <a:t>Felhasználói adatok</a:t>
             </a:r>
           </a:p>
           <a:p>
-            <a:pPr lvl="1">
-              <a:defRPr sz="1800">
-                <a:solidFill>
-                  <a:srgbClr val="3C3C5A"/>
-                </a:solidFill>
-              </a:defRPr>
-            </a:pPr>
+            <a:pPr lvl="1"/>
             <a:r>
               <a:rPr lang="hu-HU" dirty="0" err="1"/>
               <a:t>users</a:t>
             </a:r>
             <a:r>
               <a:rPr lang="hu-HU" dirty="0"/>
-              <a:t> </a:t>
-            </a:r>
-            <a:r>
-              <a:rPr lang="hu-HU" dirty="0" smtClean="0"/>
-              <a:t>- </a:t>
-            </a:r>
-            <a:r>
-              <a:rPr lang="hu-HU" dirty="0"/>
-              <a:t>alapadatok</a:t>
-            </a:r>
-          </a:p>
-          <a:p>
-            <a:pPr lvl="1">
-              <a:defRPr sz="1800">
-                <a:solidFill>
-                  <a:srgbClr val="3C3C5A"/>
-                </a:solidFill>
-              </a:defRPr>
-            </a:pPr>
+              <a:t> – alapadatok</a:t>
+            </a:r>
+          </a:p>
+          <a:p>
+            <a:pPr lvl="1"/>
             <a:r>
               <a:rPr lang="hu-HU" dirty="0" err="1"/>
               <a:t>personalData</a:t>
             </a:r>
             <a:r>
               <a:rPr lang="hu-HU" dirty="0"/>
-              <a:t> </a:t>
-            </a:r>
-            <a:r>
-              <a:rPr lang="hu-HU" dirty="0" smtClean="0"/>
-              <a:t>- </a:t>
-            </a:r>
-            <a:r>
-              <a:rPr lang="hu-HU" dirty="0"/>
-              <a:t>érzékeny </a:t>
-            </a:r>
-            <a:r>
-              <a:rPr lang="hu-HU" dirty="0" smtClean="0"/>
-              <a:t>információk</a:t>
-            </a:r>
-          </a:p>
-          <a:p>
-            <a:pPr lvl="1">
-              <a:defRPr sz="1800">
-                <a:solidFill>
-                  <a:srgbClr val="3C3C5A"/>
-                </a:solidFill>
-              </a:defRPr>
-            </a:pPr>
-            <a:r>
-              <a:rPr lang="hu-HU" dirty="0" err="1" smtClean="0"/>
+              <a:t> – érzékeny információk</a:t>
+            </a:r>
+          </a:p>
+          <a:p>
+            <a:pPr lvl="1"/>
+            <a:r>
+              <a:rPr lang="hu-HU" dirty="0" err="1"/>
               <a:t>weightLog</a:t>
             </a:r>
             <a:r>
               <a:rPr lang="hu-HU" dirty="0"/>
-              <a:t> </a:t>
-            </a:r>
-            <a:r>
-              <a:rPr lang="hu-HU" dirty="0" smtClean="0"/>
-              <a:t>– A felhasználó jelenlegi testsúlyát rögzíti dátummal</a:t>
-            </a:r>
-            <a:endParaRPr lang="hu-HU" dirty="0"/>
-          </a:p>
-          <a:p>
-            <a:pPr>
-              <a:defRPr sz="1800">
-                <a:solidFill>
-                  <a:srgbClr val="3C3C5A"/>
-                </a:solidFill>
-              </a:defRPr>
-            </a:pPr>
+              <a:t> – a felhasználó jelenlegi rögzített súlyát rögzíti dátummal</a:t>
+            </a:r>
+          </a:p>
+          <a:p>
             <a:r>
               <a:rPr lang="hu-HU" dirty="0"/>
               <a:t>Étkezési adatok</a:t>
             </a:r>
           </a:p>
           <a:p>
-            <a:pPr lvl="1">
-              <a:defRPr sz="1800">
-                <a:solidFill>
-                  <a:srgbClr val="3C3C5A"/>
-                </a:solidFill>
-              </a:defRPr>
-            </a:pPr>
+            <a:pPr lvl="1"/>
             <a:r>
               <a:rPr lang="hu-HU" dirty="0" err="1"/>
               <a:t>foods</a:t>
             </a:r>
             <a:r>
               <a:rPr lang="hu-HU" dirty="0"/>
-              <a:t> </a:t>
-            </a:r>
-            <a:r>
-              <a:rPr lang="hu-HU" dirty="0" smtClean="0"/>
-              <a:t>- ételek </a:t>
-            </a:r>
-            <a:r>
-              <a:rPr lang="hu-HU" dirty="0"/>
-              <a:t>és </a:t>
-            </a:r>
-            <a:r>
-              <a:rPr lang="hu-HU" dirty="0" smtClean="0"/>
-              <a:t>kalóriák, elmentett ételek</a:t>
-            </a:r>
+              <a:t> – ételek és kalóriák, elmentett ételek</a:t>
+            </a:r>
+          </a:p>
+          <a:p>
+            <a:pPr lvl="1"/>
+            <a:r>
+              <a:rPr lang="hu-HU" dirty="0" err="1"/>
+              <a:t>foogLog</a:t>
+            </a:r>
+            <a:r>
+              <a:rPr lang="hu-HU" dirty="0"/>
+              <a:t> – elfogyasztott ételek</a:t>
+            </a:r>
+          </a:p>
+          <a:p>
+            <a:pPr lvl="1"/>
+            <a:r>
+              <a:rPr lang="hu-HU" dirty="0" err="1"/>
+              <a:t>dailyCalories</a:t>
+            </a:r>
+            <a:r>
+              <a:rPr lang="hu-HU" dirty="0"/>
+              <a:t> – napi kalória és makrók összesítése</a:t>
+            </a:r>
+          </a:p>
+          <a:p>
             <a:endParaRPr lang="hu-HU" dirty="0"/>
           </a:p>
-          <a:p>
-            <a:pPr lvl="1">
-              <a:defRPr sz="1800">
-                <a:solidFill>
-                  <a:srgbClr val="3C3C5A"/>
-                </a:solidFill>
-              </a:defRPr>
-            </a:pPr>
-            <a:r>
-              <a:rPr lang="hu-HU" dirty="0" err="1"/>
-              <a:t>foodLog</a:t>
-            </a:r>
-            <a:r>
-              <a:rPr lang="hu-HU" dirty="0"/>
-              <a:t> </a:t>
-            </a:r>
-            <a:r>
-              <a:rPr lang="hu-HU" dirty="0" smtClean="0"/>
-              <a:t>- elfogyasztott ételek</a:t>
-            </a:r>
-          </a:p>
-          <a:p>
-            <a:pPr lvl="1">
-              <a:defRPr sz="1800">
-                <a:solidFill>
-                  <a:srgbClr val="3C3C5A"/>
-                </a:solidFill>
-              </a:defRPr>
-            </a:pPr>
-            <a:r>
-              <a:rPr lang="hu-HU" dirty="0" err="1" smtClean="0"/>
-              <a:t>dailyCalories</a:t>
-            </a:r>
-            <a:r>
-              <a:rPr lang="hu-HU" dirty="0" smtClean="0"/>
-              <a:t> - napi kalória és makrók összegzése</a:t>
-            </a:r>
-            <a:endParaRPr lang="hu-HU" dirty="0"/>
-          </a:p>
         </p:txBody>
       </p:sp>
     </p:spTree>
+    <p:extLst>
+      <p:ext uri="{BB962C8B-B14F-4D97-AF65-F5344CB8AC3E}">
+        <p14:creationId xmlns:p14="http://schemas.microsoft.com/office/powerpoint/2010/main" val="364415653"/>
+      </p:ext>
+    </p:extLst>
   </p:cSld>
   <p:clrMapOvr>
     <a:masterClrMapping/>
@@ -4715,25 +5235,6 @@
 <file path=ppt/slides/slide9.xml><?xml version="1.0" encoding="utf-8"?>
 <p:sld xmlns:a="http://schemas.openxmlformats.org/drawingml/2006/main" xmlns:r="http://schemas.openxmlformats.org/officeDocument/2006/relationships" xmlns:p="http://schemas.openxmlformats.org/presentationml/2006/main">
   <p:cSld>
-    <p:bg>
-      <p:bgPr>
-        <a:gradFill>
-          <a:gsLst>
-            <a:gs pos="100000">
-              <a:srgbClr val="7030A0"/>
-            </a:gs>
-            <a:gs pos="0">
-              <a:schemeClr val="tx2">
-                <a:lumMod val="60000"/>
-                <a:lumOff val="40000"/>
-              </a:schemeClr>
-            </a:gs>
-          </a:gsLst>
-          <a:lin ang="5400000" scaled="1"/>
-        </a:gradFill>
-        <a:effectLst/>
-      </p:bgPr>
-    </p:bg>
     <p:spTree>
       <p:nvGrpSpPr>
         <p:cNvPr id="1" name=""/>
@@ -4750,7 +5251,13 @@
       </p:grpSpPr>
       <p:sp>
         <p:nvSpPr>
-          <p:cNvPr id="2" name="Title 1"/>
+          <p:cNvPr id="2" name="Cím 1">
+            <a:extLst>
+              <a:ext uri="{FF2B5EF4-FFF2-40B4-BE49-F238E27FC236}">
+                <a16:creationId xmlns:a16="http://schemas.microsoft.com/office/drawing/2014/main" id="{916BC242-10E8-0D91-8E34-3A917D452D57}"/>
+              </a:ext>
+            </a:extLst>
+          </p:cNvPr>
           <p:cNvSpPr>
             <a:spLocks noGrp="1"/>
           </p:cNvSpPr>
@@ -4763,14 +5270,8 @@
           <a:bodyPr/>
           <a:lstStyle/>
           <a:p>
-            <a:pPr>
-              <a:defRPr sz="3400" b="1">
-                <a:solidFill>
-                  <a:srgbClr val="5846B4"/>
-                </a:solidFill>
-              </a:defRPr>
-            </a:pPr>
-            <a:r>
+            <a:r>
+              <a:rPr lang="hu-HU" dirty="0"/>
               <a:t>Fejlesztési folyamat</a:t>
             </a:r>
           </a:p>
@@ -4778,7 +5279,13 @@
       </p:sp>
       <p:sp>
         <p:nvSpPr>
-          <p:cNvPr id="3" name="Content Placeholder 2"/>
+          <p:cNvPr id="3" name="Tartalom helye 2">
+            <a:extLst>
+              <a:ext uri="{FF2B5EF4-FFF2-40B4-BE49-F238E27FC236}">
+                <a16:creationId xmlns:a16="http://schemas.microsoft.com/office/drawing/2014/main" id="{9733FA48-F066-053F-9E8B-647FEF2A216F}"/>
+              </a:ext>
+            </a:extLst>
+          </p:cNvPr>
           <p:cNvSpPr>
             <a:spLocks noGrp="1"/>
           </p:cNvSpPr>
@@ -4791,101 +5298,60 @@
           <a:bodyPr/>
           <a:lstStyle/>
           <a:p>
-            <a:pPr>
-              <a:defRPr sz="1800">
-                <a:solidFill>
-                  <a:srgbClr val="3C3C5A"/>
-                </a:solidFill>
-              </a:defRPr>
-            </a:pPr>
             <a:r>
               <a:rPr lang="hu-HU" dirty="0"/>
               <a:t>Tervezés</a:t>
             </a:r>
           </a:p>
           <a:p>
-            <a:pPr lvl="1">
-              <a:defRPr sz="1800">
-                <a:solidFill>
-                  <a:srgbClr val="3C3C5A"/>
-                </a:solidFill>
-              </a:defRPr>
-            </a:pPr>
-            <a:r>
-              <a:rPr lang="hu-HU" dirty="0"/>
-              <a:t>Projekt struktúra kialakítása</a:t>
-            </a:r>
-          </a:p>
-          <a:p>
-            <a:pPr lvl="1">
-              <a:defRPr sz="1800">
-                <a:solidFill>
-                  <a:srgbClr val="3C3C5A"/>
-                </a:solidFill>
-              </a:defRPr>
-            </a:pPr>
-            <a:r>
-              <a:rPr lang="hu-HU" dirty="0" smtClean="0"/>
+            <a:pPr lvl="1"/>
+            <a:r>
+              <a:rPr lang="hu-HU" dirty="0"/>
+              <a:t>Project struktúra kialakítása</a:t>
+            </a:r>
+          </a:p>
+          <a:p>
+            <a:pPr lvl="1"/>
+            <a:r>
+              <a:rPr lang="hu-HU" dirty="0"/>
               <a:t>Adatbázis tökéletesítése</a:t>
             </a:r>
           </a:p>
           <a:p>
-            <a:pPr>
-              <a:defRPr sz="1800">
-                <a:solidFill>
-                  <a:srgbClr val="3C3C5A"/>
-                </a:solidFill>
-              </a:defRPr>
-            </a:pPr>
-            <a:r>
-              <a:rPr lang="hu-HU" dirty="0" smtClean="0"/>
+            <a:r>
+              <a:rPr lang="hu-HU" dirty="0"/>
               <a:t>Megvalósítás</a:t>
             </a:r>
           </a:p>
           <a:p>
-            <a:pPr lvl="1">
-              <a:defRPr sz="1800">
-                <a:solidFill>
-                  <a:srgbClr val="3C3C5A"/>
-                </a:solidFill>
-              </a:defRPr>
-            </a:pPr>
-            <a:r>
-              <a:rPr lang="hu-HU" dirty="0" smtClean="0"/>
+            <a:pPr lvl="1"/>
+            <a:r>
+              <a:rPr lang="hu-HU" dirty="0"/>
               <a:t>Backend fejlesztése</a:t>
             </a:r>
           </a:p>
           <a:p>
-            <a:pPr lvl="1">
-              <a:defRPr sz="1800">
-                <a:solidFill>
-                  <a:srgbClr val="3C3C5A"/>
-                </a:solidFill>
-              </a:defRPr>
-            </a:pPr>
-            <a:r>
-              <a:rPr lang="hu-HU" dirty="0" smtClean="0"/>
-              <a:t>Adatábázis megcsinálása</a:t>
-            </a:r>
-            <a:endParaRPr lang="hu-HU" dirty="0"/>
-          </a:p>
-          <a:p>
-            <a:pPr lvl="1">
-              <a:defRPr sz="1800">
-                <a:solidFill>
-                  <a:srgbClr val="3C3C5A"/>
-                </a:solidFill>
-              </a:defRPr>
-            </a:pPr>
+            <a:pPr lvl="1"/>
+            <a:r>
+              <a:rPr lang="hu-HU" dirty="0"/>
+              <a:t>Adatbázis megcsinálása</a:t>
+            </a:r>
+          </a:p>
+          <a:p>
+            <a:pPr lvl="1"/>
             <a:r>
               <a:rPr lang="hu-HU" dirty="0"/>
               <a:t>Tesztelés és hibajavítás</a:t>
             </a:r>
-            <a:endParaRPr lang="hu-HU" dirty="0"/>
           </a:p>
         </p:txBody>
       </p:sp>
     </p:spTree>
+    <p:extLst>
+      <p:ext uri="{BB962C8B-B14F-4D97-AF65-F5344CB8AC3E}">
+        <p14:creationId xmlns:p14="http://schemas.microsoft.com/office/powerpoint/2010/main" val="1580309962"/>
+      </p:ext>
+    </p:extLst>
   </p:cSld>
   <p:clrMapOvr>
     <a:masterClrMapping/>
@@ -4894,9 +5360,9 @@
 </file>
 
 <file path=ppt/theme/theme1.xml><?xml version="1.0" encoding="utf-8"?>
-<a:theme xmlns:a="http://schemas.openxmlformats.org/drawingml/2006/main" name="Office Theme">
+<a:theme xmlns:a="http://schemas.openxmlformats.org/drawingml/2006/main" name="BlockprintVTI">
   <a:themeElements>
-    <a:clrScheme name="Office">
+    <a:clrScheme name="Custom 69">
       <a:dk1>
         <a:sysClr val="windowText" lastClr="000000"/>
       </a:dk1>
@@ -4904,106 +5370,46 @@
         <a:sysClr val="window" lastClr="FFFFFF"/>
       </a:lt1>
       <a:dk2>
-        <a:srgbClr val="1F497D"/>
+        <a:srgbClr val="44131A"/>
       </a:dk2>
       <a:lt2>
-        <a:srgbClr val="EEECE1"/>
+        <a:srgbClr val="F2ECEA"/>
       </a:lt2>
       <a:accent1>
-        <a:srgbClr val="4F81BD"/>
+        <a:srgbClr val="A62C52"/>
       </a:accent1>
       <a:accent2>
-        <a:srgbClr val="C0504D"/>
+        <a:srgbClr val="A7928D"/>
       </a:accent2>
       <a:accent3>
-        <a:srgbClr val="9BBB59"/>
+        <a:srgbClr val="307C71"/>
       </a:accent3>
       <a:accent4>
-        <a:srgbClr val="8064A2"/>
+        <a:srgbClr val="41575D"/>
       </a:accent4>
       <a:accent5>
-        <a:srgbClr val="4BACC6"/>
+        <a:srgbClr val="8FA3A3"/>
       </a:accent5>
       <a:accent6>
-        <a:srgbClr val="F79646"/>
+        <a:srgbClr val="CA8370"/>
       </a:accent6>
       <a:hlink>
-        <a:srgbClr val="0000FF"/>
+        <a:srgbClr val="D13D6E"/>
       </a:hlink>
       <a:folHlink>
-        <a:srgbClr val="800080"/>
+        <a:srgbClr val="6C9D92"/>
       </a:folHlink>
     </a:clrScheme>
-    <a:fontScheme name="Office">
+    <a:fontScheme name="Custom 56">
       <a:majorFont>
-        <a:latin typeface="Calibri"/>
+        <a:latin typeface="Avenir Next LT Pro"/>
         <a:ea typeface=""/>
         <a:cs typeface=""/>
-        <a:font script="Jpan" typeface="ＭＳ Ｐゴシック"/>
-        <a:font script="Hang" typeface="맑은 고딕"/>
-        <a:font script="Hans" typeface="宋体"/>
-        <a:font script="Hant" typeface="新細明體"/>
-        <a:font script="Arab" typeface="Times New Roman"/>
-        <a:font script="Hebr" typeface="Times New Roman"/>
-        <a:font script="Thai" typeface="Angsana New"/>
-        <a:font script="Ethi" typeface="Nyala"/>
-        <a:font script="Beng" typeface="Vrinda"/>
-        <a:font script="Gujr" typeface="Shruti"/>
-        <a:font script="Khmr" typeface="MoolBoran"/>
-        <a:font script="Knda" typeface="Tunga"/>
-        <a:font script="Guru" typeface="Raavi"/>
-        <a:font script="Cans" typeface="Euphemia"/>
-        <a:font script="Cher" typeface="Plantagenet Cherokee"/>
-        <a:font script="Yiii" typeface="Microsoft Yi Baiti"/>
-        <a:font script="Tibt" typeface="Microsoft Himalaya"/>
-        <a:font script="Thaa" typeface="MV Boli"/>
-        <a:font script="Deva" typeface="Mangal"/>
-        <a:font script="Telu" typeface="Gautami"/>
-        <a:font script="Taml" typeface="Latha"/>
-        <a:font script="Syrc" typeface="Estrangelo Edessa"/>
-        <a:font script="Orya" typeface="Kalinga"/>
-        <a:font script="Mlym" typeface="Kartika"/>
-        <a:font script="Laoo" typeface="DokChampa"/>
-        <a:font script="Sinh" typeface="Iskoola Pota"/>
-        <a:font script="Mong" typeface="Mongolian Baiti"/>
-        <a:font script="Viet" typeface="Times New Roman"/>
-        <a:font script="Uigh" typeface="Microsoft Uighur"/>
-        <a:font script="Geor" typeface="Sylfaen"/>
       </a:majorFont>
       <a:minorFont>
-        <a:latin typeface="Calibri"/>
+        <a:latin typeface="Avenir Next LT Pro"/>
         <a:ea typeface=""/>
         <a:cs typeface=""/>
-        <a:font script="Jpan" typeface="ＭＳ Ｐゴシック"/>
-        <a:font script="Hang" typeface="맑은 고딕"/>
-        <a:font script="Hans" typeface="宋体"/>
-        <a:font script="Hant" typeface="新細明體"/>
-        <a:font script="Arab" typeface="Arial"/>
-        <a:font script="Hebr" typeface="Arial"/>
-        <a:font script="Thai" typeface="Cordia New"/>
-        <a:font script="Ethi" typeface="Nyala"/>
-        <a:font script="Beng" typeface="Vrinda"/>
-        <a:font script="Gujr" typeface="Shruti"/>
-        <a:font script="Khmr" typeface="DaunPenh"/>
-        <a:font script="Knda" typeface="Tunga"/>
-        <a:font script="Guru" typeface="Raavi"/>
-        <a:font script="Cans" typeface="Euphemia"/>
-        <a:font script="Cher" typeface="Plantagenet Cherokee"/>
-        <a:font script="Yiii" typeface="Microsoft Yi Baiti"/>
-        <a:font script="Tibt" typeface="Microsoft Himalaya"/>
-        <a:font script="Thaa" typeface="MV Boli"/>
-        <a:font script="Deva" typeface="Mangal"/>
-        <a:font script="Telu" typeface="Gautami"/>
-        <a:font script="Taml" typeface="Latha"/>
-        <a:font script="Syrc" typeface="Estrangelo Edessa"/>
-        <a:font script="Orya" typeface="Kalinga"/>
-        <a:font script="Mlym" typeface="Kartika"/>
-        <a:font script="Laoo" typeface="DokChampa"/>
-        <a:font script="Sinh" typeface="Iskoola Pota"/>
-        <a:font script="Mong" typeface="Mongolian Baiti"/>
-        <a:font script="Viet" typeface="Arial"/>
-        <a:font script="Uigh" typeface="Microsoft Uighur"/>
-        <a:font script="Geor" typeface="Sylfaen"/>
       </a:minorFont>
     </a:fontScheme>
     <a:fmtScheme name="Office">
@@ -5015,200 +5421,141 @@
           <a:gsLst>
             <a:gs pos="0">
               <a:schemeClr val="phClr">
-                <a:tint val="50000"/>
-                <a:satMod val="300000"/>
+                <a:lumMod val="110000"/>
+                <a:satMod val="105000"/>
+                <a:tint val="67000"/>
               </a:schemeClr>
             </a:gs>
-            <a:gs pos="35000">
+            <a:gs pos="50000">
               <a:schemeClr val="phClr">
-                <a:tint val="37000"/>
-                <a:satMod val="300000"/>
+                <a:lumMod val="105000"/>
+                <a:satMod val="103000"/>
+                <a:tint val="73000"/>
               </a:schemeClr>
             </a:gs>
             <a:gs pos="100000">
               <a:schemeClr val="phClr">
-                <a:tint val="15000"/>
-                <a:satMod val="350000"/>
+                <a:lumMod val="105000"/>
+                <a:satMod val="109000"/>
+                <a:tint val="81000"/>
               </a:schemeClr>
             </a:gs>
           </a:gsLst>
-          <a:lin ang="16200000" scaled="1"/>
+          <a:lin ang="5400000" scaled="0"/>
         </a:gradFill>
         <a:gradFill rotWithShape="1">
           <a:gsLst>
             <a:gs pos="0">
               <a:schemeClr val="phClr">
-                <a:tint val="100000"/>
+                <a:satMod val="103000"/>
+                <a:lumMod val="102000"/>
+                <a:tint val="94000"/>
+              </a:schemeClr>
+            </a:gs>
+            <a:gs pos="50000">
+              <a:schemeClr val="phClr">
+                <a:satMod val="110000"/>
+                <a:lumMod val="100000"/>
                 <a:shade val="100000"/>
-                <a:satMod val="130000"/>
               </a:schemeClr>
             </a:gs>
             <a:gs pos="100000">
               <a:schemeClr val="phClr">
-                <a:tint val="50000"/>
-                <a:shade val="100000"/>
-                <a:satMod val="350000"/>
+                <a:lumMod val="99000"/>
+                <a:satMod val="120000"/>
+                <a:shade val="78000"/>
               </a:schemeClr>
             </a:gs>
           </a:gsLst>
-          <a:lin ang="16200000" scaled="0"/>
+          <a:lin ang="5400000" scaled="0"/>
         </a:gradFill>
       </a:fillStyleLst>
       <a:lnStyleLst>
-        <a:ln w="9525" cap="flat" cmpd="sng" algn="ctr">
-          <a:solidFill>
-            <a:schemeClr val="phClr">
-              <a:shade val="95000"/>
-              <a:satMod val="105000"/>
-            </a:schemeClr>
-          </a:solidFill>
-          <a:prstDash val="solid"/>
-        </a:ln>
-        <a:ln w="25400" cap="flat" cmpd="sng" algn="ctr">
+        <a:ln w="6350" cap="flat" cmpd="sng" algn="ctr">
           <a:solidFill>
             <a:schemeClr val="phClr"/>
           </a:solidFill>
           <a:prstDash val="solid"/>
+          <a:miter lim="800000"/>
         </a:ln>
-        <a:ln w="38100" cap="flat" cmpd="sng" algn="ctr">
+        <a:ln w="12700" cap="flat" cmpd="sng" algn="ctr">
           <a:solidFill>
             <a:schemeClr val="phClr"/>
           </a:solidFill>
           <a:prstDash val="solid"/>
+          <a:miter lim="800000"/>
+        </a:ln>
+        <a:ln w="19050" cap="flat" cmpd="sng" algn="ctr">
+          <a:solidFill>
+            <a:schemeClr val="phClr"/>
+          </a:solidFill>
+          <a:prstDash val="solid"/>
+          <a:miter lim="800000"/>
         </a:ln>
       </a:lnStyleLst>
       <a:effectStyleLst>
         <a:effectStyle>
+          <a:effectLst/>
+        </a:effectStyle>
+        <a:effectStyle>
+          <a:effectLst/>
+        </a:effectStyle>
+        <a:effectStyle>
           <a:effectLst>
-            <a:outerShdw blurRad="40000" dist="20000" dir="5400000" rotWithShape="0">
+            <a:outerShdw blurRad="57150" dist="19050" dir="5400000" algn="ctr" rotWithShape="0">
               <a:srgbClr val="000000">
-                <a:alpha val="38000"/>
+                <a:alpha val="63000"/>
               </a:srgbClr>
             </a:outerShdw>
           </a:effectLst>
-        </a:effectStyle>
-        <a:effectStyle>
-          <a:effectLst>
-            <a:outerShdw blurRad="40000" dist="23000" dir="5400000" rotWithShape="0">
-              <a:srgbClr val="000000">
-                <a:alpha val="35000"/>
-              </a:srgbClr>
-            </a:outerShdw>
-          </a:effectLst>
-        </a:effectStyle>
-        <a:effectStyle>
-          <a:effectLst>
-            <a:outerShdw blurRad="40000" dist="23000" dir="5400000" rotWithShape="0">
-              <a:srgbClr val="000000">
-                <a:alpha val="35000"/>
-              </a:srgbClr>
-            </a:outerShdw>
-          </a:effectLst>
-          <a:scene3d>
-            <a:camera prst="orthographicFront">
-              <a:rot lat="0" lon="0" rev="0"/>
-            </a:camera>
-            <a:lightRig rig="threePt" dir="t">
-              <a:rot lat="0" lon="0" rev="1200000"/>
-            </a:lightRig>
-          </a:scene3d>
-          <a:sp3d>
-            <a:bevelT w="63500" h="25400"/>
-          </a:sp3d>
         </a:effectStyle>
       </a:effectStyleLst>
       <a:bgFillStyleLst>
         <a:solidFill>
           <a:schemeClr val="phClr"/>
         </a:solidFill>
+        <a:solidFill>
+          <a:schemeClr val="phClr">
+            <a:tint val="95000"/>
+            <a:satMod val="170000"/>
+          </a:schemeClr>
+        </a:solidFill>
         <a:gradFill rotWithShape="1">
           <a:gsLst>
             <a:gs pos="0">
               <a:schemeClr val="phClr">
-                <a:tint val="40000"/>
-                <a:satMod val="350000"/>
+                <a:tint val="93000"/>
+                <a:satMod val="150000"/>
+                <a:shade val="98000"/>
+                <a:lumMod val="102000"/>
               </a:schemeClr>
             </a:gs>
-            <a:gs pos="40000">
+            <a:gs pos="50000">
               <a:schemeClr val="phClr">
-                <a:tint val="45000"/>
-                <a:shade val="99000"/>
-                <a:satMod val="350000"/>
+                <a:tint val="98000"/>
+                <a:satMod val="130000"/>
+                <a:shade val="90000"/>
+                <a:lumMod val="103000"/>
               </a:schemeClr>
             </a:gs>
             <a:gs pos="100000">
               <a:schemeClr val="phClr">
-                <a:shade val="20000"/>
-                <a:satMod val="255000"/>
+                <a:shade val="63000"/>
+                <a:satMod val="120000"/>
               </a:schemeClr>
             </a:gs>
           </a:gsLst>
-          <a:path path="circle">
-            <a:fillToRect l="50000" t="-80000" r="50000" b="180000"/>
-          </a:path>
-        </a:gradFill>
-        <a:gradFill rotWithShape="1">
-          <a:gsLst>
-            <a:gs pos="0">
-              <a:schemeClr val="phClr">
-                <a:tint val="80000"/>
-                <a:satMod val="300000"/>
-              </a:schemeClr>
-            </a:gs>
-            <a:gs pos="100000">
-              <a:schemeClr val="phClr">
-                <a:shade val="30000"/>
-                <a:satMod val="200000"/>
-              </a:schemeClr>
-            </a:gs>
-          </a:gsLst>
-          <a:path path="circle">
-            <a:fillToRect l="50000" t="50000" r="50000" b="50000"/>
-          </a:path>
+          <a:lin ang="5400000" scaled="0"/>
         </a:gradFill>
       </a:bgFillStyleLst>
     </a:fmtScheme>
   </a:themeElements>
-  <a:objectDefaults>
-    <a:spDef>
-      <a:spPr/>
-      <a:bodyPr/>
-      <a:lstStyle/>
-      <a:style>
-        <a:lnRef idx="1">
-          <a:schemeClr val="accent1"/>
-        </a:lnRef>
-        <a:fillRef idx="3">
-          <a:schemeClr val="accent1"/>
-        </a:fillRef>
-        <a:effectRef idx="2">
-          <a:schemeClr val="accent1"/>
-        </a:effectRef>
-        <a:fontRef idx="minor">
-          <a:schemeClr val="lt1"/>
-        </a:fontRef>
-      </a:style>
-    </a:spDef>
-    <a:lnDef>
-      <a:spPr/>
-      <a:bodyPr/>
-      <a:lstStyle/>
-      <a:style>
-        <a:lnRef idx="2">
-          <a:schemeClr val="accent1"/>
-        </a:lnRef>
-        <a:fillRef idx="0">
-          <a:schemeClr val="accent1"/>
-        </a:fillRef>
-        <a:effectRef idx="1">
-          <a:schemeClr val="accent1"/>
-        </a:effectRef>
-        <a:fontRef idx="minor">
-          <a:schemeClr val="tx1"/>
-        </a:fontRef>
-      </a:style>
-    </a:lnDef>
-  </a:objectDefaults>
+  <a:objectDefaults/>
   <a:extraClrSchemeLst/>
+  <a:extLst>
+    <a:ext uri="{05A4C25C-085E-4340-85A3-A5531E510DB2}">
+      <thm15:themeFamily xmlns:thm15="http://schemas.microsoft.com/office/thememl/2012/main" name="BlockprintVTI" id="{AA8C8908-6BA4-477C-AEA4-CB6C32A1FE3B}" vid="{36392749-7C1D-4938-93BB-440CD2A1B0AB}"/>
+    </a:ext>
+  </a:extLst>
 </a:theme>
 </file>